--- a/docs/public/course-assets/course-pptx/em-003.pptx
+++ b/docs/public/course-assets/course-pptx/em-003.pptx
@@ -2,23 +2,23 @@
 <file path=ppt/presentation.xml><?xml version="1.0" encoding="utf-8"?>
 <p:presentation xmlns:p="http://schemas.openxmlformats.org/presentationml/2006/main">
   <p:sldMasterIdLst>
-    <p:sldMasterId xmlns:r="http://schemas.openxmlformats.org/officeDocument/2006/relationships" id="2147483648" r:id="R7ac0ecc89a564357"/>
+    <p:sldMasterId xmlns:r="http://schemas.openxmlformats.org/officeDocument/2006/relationships" id="2147483648" r:id="R2d7e61cbc644443f"/>
   </p:sldMasterIdLst>
   <p:notesMasterIdLst>
-    <p:notesMasterId xmlns:r="http://schemas.openxmlformats.org/officeDocument/2006/relationships" r:id="R5b2680d22d324841"/>
+    <p:notesMasterId xmlns:r="http://schemas.openxmlformats.org/officeDocument/2006/relationships" r:id="R2a0571a31991468b"/>
   </p:notesMasterIdLst>
   <p:sldIdLst>
-    <p:sldId xmlns:r="http://schemas.openxmlformats.org/officeDocument/2006/relationships" id="256" r:id="R7c0c0d4ad6724d64"/>
-    <p:sldId xmlns:r="http://schemas.openxmlformats.org/officeDocument/2006/relationships" id="257" r:id="R42ba4db27f8c46b4"/>
-    <p:sldId xmlns:r="http://schemas.openxmlformats.org/officeDocument/2006/relationships" id="258" r:id="Rb282e825bf3d4b2e"/>
-    <p:sldId xmlns:r="http://schemas.openxmlformats.org/officeDocument/2006/relationships" id="259" r:id="R902c8f44bb2a4d3e"/>
-    <p:sldId xmlns:r="http://schemas.openxmlformats.org/officeDocument/2006/relationships" id="260" r:id="R0e849dc9304d41e4"/>
-    <p:sldId xmlns:r="http://schemas.openxmlformats.org/officeDocument/2006/relationships" id="261" r:id="R9ff5ba4b461f437f"/>
-    <p:sldId xmlns:r="http://schemas.openxmlformats.org/officeDocument/2006/relationships" id="262" r:id="R6c6db231f50f49c8"/>
-    <p:sldId xmlns:r="http://schemas.openxmlformats.org/officeDocument/2006/relationships" id="263" r:id="R3b91671fab2e436f"/>
-    <p:sldId xmlns:r="http://schemas.openxmlformats.org/officeDocument/2006/relationships" id="264" r:id="Rbbc07b2c77234866"/>
-    <p:sldId xmlns:r="http://schemas.openxmlformats.org/officeDocument/2006/relationships" id="265" r:id="Rd8536b99a2a84a87"/>
-    <p:sldId xmlns:r="http://schemas.openxmlformats.org/officeDocument/2006/relationships" id="266" r:id="R3a3ff5a3b0114738"/>
+    <p:sldId xmlns:r="http://schemas.openxmlformats.org/officeDocument/2006/relationships" id="256" r:id="Rfea824a5afbf4701"/>
+    <p:sldId xmlns:r="http://schemas.openxmlformats.org/officeDocument/2006/relationships" id="257" r:id="Ra9841ef635494e96"/>
+    <p:sldId xmlns:r="http://schemas.openxmlformats.org/officeDocument/2006/relationships" id="258" r:id="R97e6482ea3db4b0c"/>
+    <p:sldId xmlns:r="http://schemas.openxmlformats.org/officeDocument/2006/relationships" id="259" r:id="Rdf2e501f04674b59"/>
+    <p:sldId xmlns:r="http://schemas.openxmlformats.org/officeDocument/2006/relationships" id="260" r:id="Rbb282b57c31c4ddb"/>
+    <p:sldId xmlns:r="http://schemas.openxmlformats.org/officeDocument/2006/relationships" id="261" r:id="R99570578a003466d"/>
+    <p:sldId xmlns:r="http://schemas.openxmlformats.org/officeDocument/2006/relationships" id="262" r:id="R5feec7b2e64c4559"/>
+    <p:sldId xmlns:r="http://schemas.openxmlformats.org/officeDocument/2006/relationships" id="263" r:id="R18446510c05540bd"/>
+    <p:sldId xmlns:r="http://schemas.openxmlformats.org/officeDocument/2006/relationships" id="264" r:id="R174940c3c95f4bab"/>
+    <p:sldId xmlns:r="http://schemas.openxmlformats.org/officeDocument/2006/relationships" id="265" r:id="Rf143655fcd1e4813"/>
+    <p:sldId xmlns:r="http://schemas.openxmlformats.org/officeDocument/2006/relationships" id="266" r:id="Rfa4596fcb85e483e"/>
   </p:sldIdLst>
   <p:sldSz cx="12192000" cy="6858000"/>
   <p:notesSz cx="6858000" cy="9144000"/>
@@ -1271,7 +1271,7 @@
   </p:cSld>
   <p:clrMap bg1="lt1" tx1="dk1" bg2="lt2" tx2="dk2" accent1="accent1" accent2="accent2" accent3="accent3" accent4="accent4" accent5="accent5" accent6="accent6" hlink="hlink" folHlink="folHlink"/>
   <p:sldLayoutIdLst>
-    <p:sldLayoutId xmlns:r="http://schemas.openxmlformats.org/officeDocument/2006/relationships" id="2147483649" r:id="R1cc45713821b4a9d"/>
+    <p:sldLayoutId xmlns:r="http://schemas.openxmlformats.org/officeDocument/2006/relationships" id="2147483649" r:id="R20576943557e4123"/>
   </p:sldLayoutIdLst>
   <p:txStyles>
     <p:titleStyle>
@@ -1822,7 +1822,7 @@
           <p:cNvPr id="1" name="cover-rule">
             <a:extLst xmlns:a="http://schemas.openxmlformats.org/drawingml/2006/main">
               <a:ext uri="{FF2B5EF4-FFF2-40B4-BE49-F238E27FC236}">
-                <a16:creationId xmlns:a16="http://schemas.microsoft.com/office/drawing/2014/main" id="{FD4AD426-F93F-4E66-90E2-8D2AF7B75D2A}"/>
+                <a16:creationId xmlns:a16="http://schemas.microsoft.com/office/drawing/2014/main" id="{1D539EED-70E1-4540-867C-01552943542B}"/>
               </a:ext>
             </a:extLst>
           </p:cNvPr>
@@ -1855,7 +1855,7 @@
           <p:cNvPr id="2" name="cover-ring-1">
             <a:extLst xmlns:a="http://schemas.openxmlformats.org/drawingml/2006/main">
               <a:ext uri="{FF2B5EF4-FFF2-40B4-BE49-F238E27FC236}">
-                <a16:creationId xmlns:a16="http://schemas.microsoft.com/office/drawing/2014/main" id="{7B55F25D-0C4E-4B78-8CCF-AAECCA9037DB}"/>
+                <a16:creationId xmlns:a16="http://schemas.microsoft.com/office/drawing/2014/main" id="{A60B4DF4-1B0B-48AD-A8C8-F0A8EDEFC87A}"/>
               </a:ext>
             </a:extLst>
           </p:cNvPr>
@@ -1886,7 +1886,7 @@
           <p:cNvPr id="3" name="cover-ring-2">
             <a:extLst xmlns:a="http://schemas.openxmlformats.org/drawingml/2006/main">
               <a:ext uri="{FF2B5EF4-FFF2-40B4-BE49-F238E27FC236}">
-                <a16:creationId xmlns:a16="http://schemas.microsoft.com/office/drawing/2014/main" id="{7F15213E-8719-4168-8DBC-12A13ADBB43C}"/>
+                <a16:creationId xmlns:a16="http://schemas.microsoft.com/office/drawing/2014/main" id="{F3C21325-2D73-43DF-BF6C-7F1D6C64C82A}"/>
               </a:ext>
             </a:extLst>
           </p:cNvPr>
@@ -1917,7 +1917,7 @@
           <p:cNvPr id="4" name="cover-core">
             <a:extLst xmlns:a="http://schemas.openxmlformats.org/drawingml/2006/main">
               <a:ext uri="{FF2B5EF4-FFF2-40B4-BE49-F238E27FC236}">
-                <a16:creationId xmlns:a16="http://schemas.microsoft.com/office/drawing/2014/main" id="{A0B780FE-6529-4A38-9C1E-1D3720FB1A85}"/>
+                <a16:creationId xmlns:a16="http://schemas.microsoft.com/office/drawing/2014/main" id="{2C975E3E-CFEE-4765-9191-B38257A60061}"/>
               </a:ext>
             </a:extLst>
           </p:cNvPr>
@@ -1950,7 +1950,7 @@
           <p:cNvPr id="5" name="cover-line-1">
             <a:extLst xmlns:a="http://schemas.openxmlformats.org/drawingml/2006/main">
               <a:ext uri="{FF2B5EF4-FFF2-40B4-BE49-F238E27FC236}">
-                <a16:creationId xmlns:a16="http://schemas.microsoft.com/office/drawing/2014/main" id="{FB916571-E7CF-426B-AE50-90F387A1577F}"/>
+                <a16:creationId xmlns:a16="http://schemas.microsoft.com/office/drawing/2014/main" id="{6385C555-5D4D-45DE-926F-759F5843B8BA}"/>
               </a:ext>
             </a:extLst>
           </p:cNvPr>
@@ -1981,7 +1981,7 @@
           <p:cNvPr id="6" name="cover-line-2">
             <a:extLst xmlns:a="http://schemas.openxmlformats.org/drawingml/2006/main">
               <a:ext uri="{FF2B5EF4-FFF2-40B4-BE49-F238E27FC236}">
-                <a16:creationId xmlns:a16="http://schemas.microsoft.com/office/drawing/2014/main" id="{319A101C-F1BA-45E7-A336-795414E8FA4E}"/>
+                <a16:creationId xmlns:a16="http://schemas.microsoft.com/office/drawing/2014/main" id="{01E42A76-17F0-4200-8241-C52BD0A8CB5E}"/>
               </a:ext>
             </a:extLst>
           </p:cNvPr>
@@ -2012,7 +2012,7 @@
           <p:cNvPr id="7" name="cover-eyebrow">
             <a:extLst xmlns:a="http://schemas.openxmlformats.org/drawingml/2006/main">
               <a:ext uri="{FF2B5EF4-FFF2-40B4-BE49-F238E27FC236}">
-                <a16:creationId xmlns:a16="http://schemas.microsoft.com/office/drawing/2014/main" id="{201E161A-8D71-4E24-BD90-1F19A5A0C36E}"/>
+                <a16:creationId xmlns:a16="http://schemas.microsoft.com/office/drawing/2014/main" id="{13531B7C-C83E-43BD-B853-BF41643BCCF7}"/>
               </a:ext>
             </a:extLst>
           </p:cNvPr>
@@ -2070,7 +2070,7 @@
           <p:cNvPr id="8" name="cover-title">
             <a:extLst xmlns:a="http://schemas.openxmlformats.org/drawingml/2006/main">
               <a:ext uri="{FF2B5EF4-FFF2-40B4-BE49-F238E27FC236}">
-                <a16:creationId xmlns:a16="http://schemas.microsoft.com/office/drawing/2014/main" id="{A238FEB7-2CC5-4942-8371-EC1A86681629}"/>
+                <a16:creationId xmlns:a16="http://schemas.microsoft.com/office/drawing/2014/main" id="{D3A80B7D-7E3D-4F45-8C20-AAD1B5F5693F}"/>
               </a:ext>
             </a:extLst>
           </p:cNvPr>
@@ -2128,7 +2128,7 @@
           <p:cNvPr id="9" name="cover-subtitle">
             <a:extLst xmlns:a="http://schemas.openxmlformats.org/drawingml/2006/main">
               <a:ext uri="{FF2B5EF4-FFF2-40B4-BE49-F238E27FC236}">
-                <a16:creationId xmlns:a16="http://schemas.microsoft.com/office/drawing/2014/main" id="{156918E4-E5C0-4983-9E39-9FF64E759AEE}"/>
+                <a16:creationId xmlns:a16="http://schemas.microsoft.com/office/drawing/2014/main" id="{9C21CA9B-A439-4458-9B47-5BBB2CF6FB05}"/>
               </a:ext>
             </a:extLst>
           </p:cNvPr>
@@ -2190,7 +2190,7 @@
           <p:cNvPr id="10" name="cover-lead">
             <a:extLst xmlns:a="http://schemas.openxmlformats.org/drawingml/2006/main">
               <a:ext uri="{FF2B5EF4-FFF2-40B4-BE49-F238E27FC236}">
-                <a16:creationId xmlns:a16="http://schemas.microsoft.com/office/drawing/2014/main" id="{5E66B6D0-9E65-42A2-A277-BF276F58A4FB}"/>
+                <a16:creationId xmlns:a16="http://schemas.microsoft.com/office/drawing/2014/main" id="{765F4E61-5CA4-422F-AA3F-4211B20267FA}"/>
               </a:ext>
             </a:extLst>
           </p:cNvPr>
@@ -2248,7 +2248,7 @@
           <p:cNvPr id="11" name="cover-course">
             <a:extLst xmlns:a="http://schemas.openxmlformats.org/drawingml/2006/main">
               <a:ext uri="{FF2B5EF4-FFF2-40B4-BE49-F238E27FC236}">
-                <a16:creationId xmlns:a16="http://schemas.microsoft.com/office/drawing/2014/main" id="{CDB2FF50-6FB9-43D5-AC27-EB4153A2FFB5}"/>
+                <a16:creationId xmlns:a16="http://schemas.microsoft.com/office/drawing/2014/main" id="{5C4A99AF-DFA2-4CBA-B30F-21EB82BBCB85}"/>
               </a:ext>
             </a:extLst>
           </p:cNvPr>
@@ -2306,7 +2306,7 @@
           <p:cNvPr id="12" name="cover-id">
             <a:extLst xmlns:a="http://schemas.openxmlformats.org/drawingml/2006/main">
               <a:ext uri="{FF2B5EF4-FFF2-40B4-BE49-F238E27FC236}">
-                <a16:creationId xmlns:a16="http://schemas.microsoft.com/office/drawing/2014/main" id="{90095968-EA6F-4F70-8256-686B233453BD}"/>
+                <a16:creationId xmlns:a16="http://schemas.microsoft.com/office/drawing/2014/main" id="{766E7BFD-25AF-488E-AA8B-D84CA4C25B6B}"/>
               </a:ext>
             </a:extLst>
           </p:cNvPr>
@@ -2362,7 +2362,7 @@
     </p:spTree>
     <p:extLst>
       <p:ext uri="{BB962C8B-B14F-4D97-AF65-F5344CB8AC3E}">
-        <p14:creationId xmlns:p14="http://schemas.microsoft.com/office/powerpoint/2010/main" val="943130057"/>
+        <p14:creationId xmlns:p14="http://schemas.microsoft.com/office/powerpoint/2010/main" val="286805585"/>
       </p:ext>
     </p:extLst>
   </p:cSld>
@@ -2393,7 +2393,7 @@
           <p:cNvPr id="1" name="s10-rule">
             <a:extLst xmlns:a="http://schemas.openxmlformats.org/drawingml/2006/main">
               <a:ext uri="{FF2B5EF4-FFF2-40B4-BE49-F238E27FC236}">
-                <a16:creationId xmlns:a16="http://schemas.microsoft.com/office/drawing/2014/main" id="{A9820A08-6AD4-4708-B6D8-C91D92F06322}"/>
+                <a16:creationId xmlns:a16="http://schemas.microsoft.com/office/drawing/2014/main" id="{D117703A-DCAB-4922-8918-69D2A8FDDD51}"/>
               </a:ext>
             </a:extLst>
           </p:cNvPr>
@@ -2426,7 +2426,7 @@
           <p:cNvPr id="2" name="s10-eyebrow">
             <a:extLst xmlns:a="http://schemas.openxmlformats.org/drawingml/2006/main">
               <a:ext uri="{FF2B5EF4-FFF2-40B4-BE49-F238E27FC236}">
-                <a16:creationId xmlns:a16="http://schemas.microsoft.com/office/drawing/2014/main" id="{4D0606C9-C0D6-4A8F-A44D-1352BBE86CED}"/>
+                <a16:creationId xmlns:a16="http://schemas.microsoft.com/office/drawing/2014/main" id="{10FD2698-9122-43FA-BCFC-DC1B4AAAA4D1}"/>
               </a:ext>
             </a:extLst>
           </p:cNvPr>
@@ -2484,7 +2484,7 @@
           <p:cNvPr id="3" name="s10-title">
             <a:extLst xmlns:a="http://schemas.openxmlformats.org/drawingml/2006/main">
               <a:ext uri="{FF2B5EF4-FFF2-40B4-BE49-F238E27FC236}">
-                <a16:creationId xmlns:a16="http://schemas.microsoft.com/office/drawing/2014/main" id="{72046402-D155-4BC6-AA75-C072B50A8C78}"/>
+                <a16:creationId xmlns:a16="http://schemas.microsoft.com/office/drawing/2014/main" id="{735899EC-0FA8-4D86-B70A-49B0B5BA456D}"/>
               </a:ext>
             </a:extLst>
           </p:cNvPr>
@@ -2532,7 +2532,7 @@
                 <a:ea typeface="PingFang SC"/>
                 <a:cs typeface="PingFang SC"/>
               </a:rPr>
-              <a:t>带走三条可复用的判断原则</a:t>
+              <a:t>多模态感知：判断时先抓住三点</a:t>
             </a:r>
           </a:p>
         </p:txBody>
@@ -2542,7 +2542,7 @@
           <p:cNvPr id="4" name="s10-footer">
             <a:extLst xmlns:a="http://schemas.openxmlformats.org/drawingml/2006/main">
               <a:ext uri="{FF2B5EF4-FFF2-40B4-BE49-F238E27FC236}">
-                <a16:creationId xmlns:a16="http://schemas.microsoft.com/office/drawing/2014/main" id="{B8F50226-1AE2-47FF-9B1C-B4B7F3FDF979}"/>
+                <a16:creationId xmlns:a16="http://schemas.microsoft.com/office/drawing/2014/main" id="{63542485-0BB4-4E03-A09E-8DB7C69D64E4}"/>
               </a:ext>
             </a:extLst>
           </p:cNvPr>
@@ -2573,7 +2573,7 @@
           <p:cNvPr id="5" name="s10-identity">
             <a:extLst xmlns:a="http://schemas.openxmlformats.org/drawingml/2006/main">
               <a:ext uri="{FF2B5EF4-FFF2-40B4-BE49-F238E27FC236}">
-                <a16:creationId xmlns:a16="http://schemas.microsoft.com/office/drawing/2014/main" id="{31B59243-6043-47A1-8DEE-F410C8D0E95C}"/>
+                <a16:creationId xmlns:a16="http://schemas.microsoft.com/office/drawing/2014/main" id="{87018438-0C81-48FD-A26A-365CB2BFE495}"/>
               </a:ext>
             </a:extLst>
           </p:cNvPr>
@@ -2631,7 +2631,7 @@
           <p:cNvPr id="6" name="recap-circle-0">
             <a:extLst xmlns:a="http://schemas.openxmlformats.org/drawingml/2006/main">
               <a:ext uri="{FF2B5EF4-FFF2-40B4-BE49-F238E27FC236}">
-                <a16:creationId xmlns:a16="http://schemas.microsoft.com/office/drawing/2014/main" id="{250D03F6-1A7D-4160-B04E-63F0380F1F12}"/>
+                <a16:creationId xmlns:a16="http://schemas.microsoft.com/office/drawing/2014/main" id="{ECE70CA8-33A2-46FB-B38E-8CD980FA3DB5}"/>
               </a:ext>
             </a:extLst>
           </p:cNvPr>
@@ -2664,7 +2664,7 @@
           <p:cNvPr id="7" name="recap-number-0">
             <a:extLst xmlns:a="http://schemas.openxmlformats.org/drawingml/2006/main">
               <a:ext uri="{FF2B5EF4-FFF2-40B4-BE49-F238E27FC236}">
-                <a16:creationId xmlns:a16="http://schemas.microsoft.com/office/drawing/2014/main" id="{1CAE0DCD-3ACB-4D82-950D-055196F6F52C}"/>
+                <a16:creationId xmlns:a16="http://schemas.microsoft.com/office/drawing/2014/main" id="{A678AC21-7395-4D40-B559-0C7702103FD5}"/>
               </a:ext>
             </a:extLst>
           </p:cNvPr>
@@ -2722,7 +2722,7 @@
           <p:cNvPr id="8" name="recap-item-0">
             <a:extLst xmlns:a="http://schemas.openxmlformats.org/drawingml/2006/main">
               <a:ext uri="{FF2B5EF4-FFF2-40B4-BE49-F238E27FC236}">
-                <a16:creationId xmlns:a16="http://schemas.microsoft.com/office/drawing/2014/main" id="{BE2A5363-5600-4588-9B3A-E38FC244ACB5}"/>
+                <a16:creationId xmlns:a16="http://schemas.microsoft.com/office/drawing/2014/main" id="{30496382-C908-4138-A2BC-64632910F4AE}"/>
               </a:ext>
             </a:extLst>
           </p:cNvPr>
@@ -2786,7 +2786,7 @@
           <p:cNvPr id="9" name="recap-connector-0">
             <a:extLst xmlns:a="http://schemas.openxmlformats.org/drawingml/2006/main">
               <a:ext uri="{FF2B5EF4-FFF2-40B4-BE49-F238E27FC236}">
-                <a16:creationId xmlns:a16="http://schemas.microsoft.com/office/drawing/2014/main" id="{B93C015C-6172-44E7-8AB9-C110E6D41280}"/>
+                <a16:creationId xmlns:a16="http://schemas.microsoft.com/office/drawing/2014/main" id="{CCD0BDC6-9C30-456C-928A-74AFA1AFCC25}"/>
               </a:ext>
             </a:extLst>
           </p:cNvPr>
@@ -2806,7 +2806,7 @@
           <a:noFill xmlns:a="http://schemas.openxmlformats.org/drawingml/2006/main"/>
           <a:ln xmlns:a="http://schemas.openxmlformats.org/drawingml/2006/main" w="28575">
             <a:solidFill>
-              <a:srgbClr val="2D9B72"/>
+              <a:srgbClr val="0B6B4F"/>
             </a:solidFill>
             <a:prstDash val="solid"/>
           </a:ln>
@@ -2817,7 +2817,7 @@
           <p:cNvPr id="10" name="recap-circle-1">
             <a:extLst xmlns:a="http://schemas.openxmlformats.org/drawingml/2006/main">
               <a:ext uri="{FF2B5EF4-FFF2-40B4-BE49-F238E27FC236}">
-                <a16:creationId xmlns:a16="http://schemas.microsoft.com/office/drawing/2014/main" id="{430D6C95-B7AD-491A-9E22-6A27E7D65CAE}"/>
+                <a16:creationId xmlns:a16="http://schemas.microsoft.com/office/drawing/2014/main" id="{6882F559-FC2E-4B64-A34F-0CE50E3BD62E}"/>
               </a:ext>
             </a:extLst>
           </p:cNvPr>
@@ -2850,7 +2850,7 @@
           <p:cNvPr id="11" name="recap-number-1">
             <a:extLst xmlns:a="http://schemas.openxmlformats.org/drawingml/2006/main">
               <a:ext uri="{FF2B5EF4-FFF2-40B4-BE49-F238E27FC236}">
-                <a16:creationId xmlns:a16="http://schemas.microsoft.com/office/drawing/2014/main" id="{63BB018F-0659-4E3C-AC94-9EC73DA0570E}"/>
+                <a16:creationId xmlns:a16="http://schemas.microsoft.com/office/drawing/2014/main" id="{77B8E565-D606-41BF-B147-1E7EDDCD6901}"/>
               </a:ext>
             </a:extLst>
           </p:cNvPr>
@@ -2908,7 +2908,7 @@
           <p:cNvPr id="12" name="recap-item-1">
             <a:extLst xmlns:a="http://schemas.openxmlformats.org/drawingml/2006/main">
               <a:ext uri="{FF2B5EF4-FFF2-40B4-BE49-F238E27FC236}">
-                <a16:creationId xmlns:a16="http://schemas.microsoft.com/office/drawing/2014/main" id="{2DBC7BB9-DFF3-445C-AE3E-537C9B1A0D72}"/>
+                <a16:creationId xmlns:a16="http://schemas.microsoft.com/office/drawing/2014/main" id="{6107A597-58CD-4954-90D5-8B5A5567218D}"/>
               </a:ext>
             </a:extLst>
           </p:cNvPr>
@@ -2972,7 +2972,7 @@
           <p:cNvPr id="13" name="recap-connector-1">
             <a:extLst xmlns:a="http://schemas.openxmlformats.org/drawingml/2006/main">
               <a:ext uri="{FF2B5EF4-FFF2-40B4-BE49-F238E27FC236}">
-                <a16:creationId xmlns:a16="http://schemas.microsoft.com/office/drawing/2014/main" id="{1509C832-460B-42E9-9C7C-4367927A1651}"/>
+                <a16:creationId xmlns:a16="http://schemas.microsoft.com/office/drawing/2014/main" id="{0B660D01-AC8D-4CFA-A12A-8EAB595777E5}"/>
               </a:ext>
             </a:extLst>
           </p:cNvPr>
@@ -2992,7 +2992,7 @@
           <a:noFill xmlns:a="http://schemas.openxmlformats.org/drawingml/2006/main"/>
           <a:ln xmlns:a="http://schemas.openxmlformats.org/drawingml/2006/main" w="28575">
             <a:solidFill>
-              <a:srgbClr val="2D9B72"/>
+              <a:srgbClr val="0B6B4F"/>
             </a:solidFill>
             <a:prstDash val="solid"/>
           </a:ln>
@@ -3003,7 +3003,7 @@
           <p:cNvPr id="14" name="recap-circle-2">
             <a:extLst xmlns:a="http://schemas.openxmlformats.org/drawingml/2006/main">
               <a:ext uri="{FF2B5EF4-FFF2-40B4-BE49-F238E27FC236}">
-                <a16:creationId xmlns:a16="http://schemas.microsoft.com/office/drawing/2014/main" id="{D3381E23-8253-40C3-ABCC-BC78809D24F0}"/>
+                <a16:creationId xmlns:a16="http://schemas.microsoft.com/office/drawing/2014/main" id="{1E06E025-EBBF-4624-8E16-A64BFAD4FE5D}"/>
               </a:ext>
             </a:extLst>
           </p:cNvPr>
@@ -3021,7 +3021,7 @@
             <a:avLst/>
           </a:prstGeom>
           <a:solidFill xmlns:a="http://schemas.openxmlformats.org/drawingml/2006/main">
-            <a:srgbClr val="2D9B72"/>
+            <a:srgbClr val="0B6B4F"/>
           </a:solidFill>
           <a:ln xmlns:a="http://schemas.openxmlformats.org/drawingml/2006/main" w="28575">
             <a:solidFill>
@@ -3036,7 +3036,7 @@
           <p:cNvPr id="15" name="recap-number-2">
             <a:extLst xmlns:a="http://schemas.openxmlformats.org/drawingml/2006/main">
               <a:ext uri="{FF2B5EF4-FFF2-40B4-BE49-F238E27FC236}">
-                <a16:creationId xmlns:a16="http://schemas.microsoft.com/office/drawing/2014/main" id="{42F288FE-E03B-4E3E-B47B-FAE4817E952B}"/>
+                <a16:creationId xmlns:a16="http://schemas.microsoft.com/office/drawing/2014/main" id="{CD418E3D-72C0-4ADC-8091-021A5B7E425A}"/>
               </a:ext>
             </a:extLst>
           </p:cNvPr>
@@ -3094,7 +3094,7 @@
           <p:cNvPr id="16" name="recap-item-2">
             <a:extLst xmlns:a="http://schemas.openxmlformats.org/drawingml/2006/main">
               <a:ext uri="{FF2B5EF4-FFF2-40B4-BE49-F238E27FC236}">
-                <a16:creationId xmlns:a16="http://schemas.microsoft.com/office/drawing/2014/main" id="{1E52AA97-E72B-47A8-9CDD-EE426946FF2D}"/>
+                <a16:creationId xmlns:a16="http://schemas.microsoft.com/office/drawing/2014/main" id="{939972EA-56C7-429D-B35C-CC45A35FDD31}"/>
               </a:ext>
             </a:extLst>
           </p:cNvPr>
@@ -3118,7 +3118,7 @@
           </a:solidFill>
           <a:ln xmlns:a="http://schemas.openxmlformats.org/drawingml/2006/main" w="19050">
             <a:solidFill>
-              <a:srgbClr val="2D9B72"/>
+              <a:srgbClr val="0B6B4F"/>
             </a:solidFill>
             <a:prstDash val="solid"/>
           </a:ln>
@@ -3148,7 +3148,7 @@
                 <a:ea typeface="PingFang SC"/>
                 <a:cs typeface="PingFang SC"/>
               </a:rPr>
-              <a:t>仿真环境可以先验证传感器挂载、坐标系、话题命名和可视化链路</a:t>
+              <a:t>仿真先验证接口链路，真机再验证物理差异</a:t>
             </a:r>
           </a:p>
         </p:txBody>
@@ -3156,7 +3156,7 @@
     </p:spTree>
     <p:extLst>
       <p:ext uri="{BB962C8B-B14F-4D97-AF65-F5344CB8AC3E}">
-        <p14:creationId xmlns:p14="http://schemas.microsoft.com/office/powerpoint/2010/main" val="813694360"/>
+        <p14:creationId xmlns:p14="http://schemas.microsoft.com/office/powerpoint/2010/main" val="693886316"/>
       </p:ext>
     </p:extLst>
   </p:cSld>
@@ -3187,7 +3187,7 @@
           <p:cNvPr id="1" name="s11-rule">
             <a:extLst xmlns:a="http://schemas.openxmlformats.org/drawingml/2006/main">
               <a:ext uri="{FF2B5EF4-FFF2-40B4-BE49-F238E27FC236}">
-                <a16:creationId xmlns:a16="http://schemas.microsoft.com/office/drawing/2014/main" id="{838C3A97-EF1E-4F5B-B879-472E80B059DB}"/>
+                <a16:creationId xmlns:a16="http://schemas.microsoft.com/office/drawing/2014/main" id="{36007D13-C7E3-4388-9D08-84FA294C35CC}"/>
               </a:ext>
             </a:extLst>
           </p:cNvPr>
@@ -3220,7 +3220,7 @@
           <p:cNvPr id="2" name="s11-eyebrow">
             <a:extLst xmlns:a="http://schemas.openxmlformats.org/drawingml/2006/main">
               <a:ext uri="{FF2B5EF4-FFF2-40B4-BE49-F238E27FC236}">
-                <a16:creationId xmlns:a16="http://schemas.microsoft.com/office/drawing/2014/main" id="{05EB0DC5-26E5-4D5B-A0DA-B636732CBAE9}"/>
+                <a16:creationId xmlns:a16="http://schemas.microsoft.com/office/drawing/2014/main" id="{65A2905C-BDCF-4395-835D-EEBA59FB43D8}"/>
               </a:ext>
             </a:extLst>
           </p:cNvPr>
@@ -3278,7 +3278,7 @@
           <p:cNvPr id="3" name="s11-title">
             <a:extLst xmlns:a="http://schemas.openxmlformats.org/drawingml/2006/main">
               <a:ext uri="{FF2B5EF4-FFF2-40B4-BE49-F238E27FC236}">
-                <a16:creationId xmlns:a16="http://schemas.microsoft.com/office/drawing/2014/main" id="{42FA87B2-96F7-4B78-BAE8-7BA9DBE6A5EA}"/>
+                <a16:creationId xmlns:a16="http://schemas.microsoft.com/office/drawing/2014/main" id="{01BCAAF4-0C70-479C-B9A1-48EBD8B014C3}"/>
               </a:ext>
             </a:extLst>
           </p:cNvPr>
@@ -3326,7 +3326,7 @@
                 <a:ea typeface="PingFang SC"/>
                 <a:cs typeface="PingFang SC"/>
               </a:rPr>
-              <a:t>从公开重制课件回到可核对的学习资料</a:t>
+              <a:t>多模态感知：依据、边界与延伸</a:t>
             </a:r>
           </a:p>
         </p:txBody>
@@ -3336,7 +3336,7 @@
           <p:cNvPr id="4" name="s11-footer">
             <a:extLst xmlns:a="http://schemas.openxmlformats.org/drawingml/2006/main">
               <a:ext uri="{FF2B5EF4-FFF2-40B4-BE49-F238E27FC236}">
-                <a16:creationId xmlns:a16="http://schemas.microsoft.com/office/drawing/2014/main" id="{A158C6DE-60B3-4D76-9DBC-6BB009E6009E}"/>
+                <a16:creationId xmlns:a16="http://schemas.microsoft.com/office/drawing/2014/main" id="{3C09740A-948E-42C2-BBB8-C049467228C5}"/>
               </a:ext>
             </a:extLst>
           </p:cNvPr>
@@ -3367,7 +3367,7 @@
           <p:cNvPr id="5" name="s11-identity">
             <a:extLst xmlns:a="http://schemas.openxmlformats.org/drawingml/2006/main">
               <a:ext uri="{FF2B5EF4-FFF2-40B4-BE49-F238E27FC236}">
-                <a16:creationId xmlns:a16="http://schemas.microsoft.com/office/drawing/2014/main" id="{1D78F10F-B07F-4940-AC3B-32EDED9DE6BC}"/>
+                <a16:creationId xmlns:a16="http://schemas.microsoft.com/office/drawing/2014/main" id="{EB5FD40E-C963-42C8-8715-B3563590C0F3}"/>
               </a:ext>
             </a:extLst>
           </p:cNvPr>
@@ -3425,7 +3425,7 @@
           <p:cNvPr id="6" name="source-0">
             <a:extLst xmlns:a="http://schemas.openxmlformats.org/drawingml/2006/main">
               <a:ext uri="{FF2B5EF4-FFF2-40B4-BE49-F238E27FC236}">
-                <a16:creationId xmlns:a16="http://schemas.microsoft.com/office/drawing/2014/main" id="{B8F552D3-3EAB-4CAF-885F-1A90A6BBE116}"/>
+                <a16:creationId xmlns:a16="http://schemas.microsoft.com/office/drawing/2014/main" id="{2A5B96A9-A95C-4F6B-998F-2D182C3A58E8}"/>
               </a:ext>
             </a:extLst>
           </p:cNvPr>
@@ -3449,7 +3449,7 @@
           </a:solidFill>
           <a:ln xmlns:a="http://schemas.openxmlformats.org/drawingml/2006/main" w="9525">
             <a:solidFill>
-              <a:srgbClr val="2D9B72"/>
+              <a:srgbClr val="0B6B4F"/>
             </a:solidFill>
             <a:prstDash val="solid"/>
           </a:ln>
@@ -3489,7 +3489,7 @@
           <p:cNvPr id="7" name="source-1">
             <a:extLst xmlns:a="http://schemas.openxmlformats.org/drawingml/2006/main">
               <a:ext uri="{FF2B5EF4-FFF2-40B4-BE49-F238E27FC236}">
-                <a16:creationId xmlns:a16="http://schemas.microsoft.com/office/drawing/2014/main" id="{642BFE9C-F3D0-4BA2-8843-CA461C3D47E0}"/>
+                <a16:creationId xmlns:a16="http://schemas.microsoft.com/office/drawing/2014/main" id="{EFE37FBC-3D5C-4E84-8C98-758C1A45B652}"/>
               </a:ext>
             </a:extLst>
           </p:cNvPr>
@@ -3520,7 +3520,7 @@
         </p:spPr>
         <p:txBody>
           <a:bodyPr xmlns:a="http://schemas.openxmlformats.org/drawingml/2006/main" lIns="152400" tIns="133350" rIns="152400" bIns="133350" anchor="ctr">
-            <a:normAutofit fontScale="87377"/>
+            <a:normAutofit fontScale="77712"/>
           </a:bodyPr>
           <a:lstStyle xmlns:a="http://schemas.openxmlformats.org/drawingml/2006/main"/>
           <a:p xmlns:a="http://schemas.openxmlformats.org/drawingml/2006/main">
@@ -3543,17 +3543,209 @@
                 <a:ea typeface="PingFang SC"/>
                 <a:cs typeface="PingFang SC"/>
               </a:rPr>
-              <a:t>02  实训时以设备当前官方驱动与 ROS2 发行版文档为准，并记录硬件型号、固件、驱动和标定文件版本</a:t>
-            </a:r>
-          </a:p>
-        </p:txBody>
-      </p:sp>
-      <p:sp>
-        <p:nvSpPr>
-          <p:cNvPr id="8" name="s11-takeaway-rule">
-            <a:extLst xmlns:a="http://schemas.openxmlformats.org/drawingml/2006/main">
-              <a:ext uri="{FF2B5EF4-FFF2-40B4-BE49-F238E27FC236}">
-                <a16:creationId xmlns:a16="http://schemas.microsoft.com/office/drawing/2014/main" id="{8A6B2040-0584-4312-B6C3-890306BC486F}"/>
+              <a:t>02  RealSense D435i 官方规格：核对双目深度、IMU、视场与工作范围；深度传感器与 RGB 传感器的快门类型不能混写。（核对日期：2026-07-12）</a:t>
+            </a:r>
+          </a:p>
+        </p:txBody>
+      </p:sp>
+      <p:sp>
+        <p:nvSpPr>
+          <p:cNvPr id="8" name="source-2">
+            <a:extLst xmlns:a="http://schemas.openxmlformats.org/drawingml/2006/main">
+              <a:ext uri="{FF2B5EF4-FFF2-40B4-BE49-F238E27FC236}">
+                <a16:creationId xmlns:a16="http://schemas.microsoft.com/office/drawing/2014/main" id="{ECCC2033-7054-4E5E-8D67-0D778B49CC04}"/>
+              </a:ext>
+            </a:extLst>
+          </p:cNvPr>
+          <p:cNvSpPr>
+            <a:spLocks xmlns:a="http://schemas.openxmlformats.org/drawingml/2006/main" noGrp="1"/>
+          </p:cNvSpPr>
+          <p:nvPr/>
+        </p:nvSpPr>
+        <p:spPr>
+          <a:xfrm xmlns:a="http://schemas.openxmlformats.org/drawingml/2006/main">
+            <a:off x="914400" y="3314700"/>
+            <a:ext cx="10363200" cy="533400"/>
+          </a:xfrm>
+          <a:prstGeom xmlns:a="http://schemas.openxmlformats.org/drawingml/2006/main" prst="roundRect">
+            <a:avLst>
+              <a:gd name="adj" fmla="val 21429"/>
+            </a:avLst>
+          </a:prstGeom>
+          <a:solidFill xmlns:a="http://schemas.openxmlformats.org/drawingml/2006/main">
+            <a:srgbClr val="FFFFFF"/>
+          </a:solidFill>
+          <a:ln xmlns:a="http://schemas.openxmlformats.org/drawingml/2006/main" w="9525">
+            <a:solidFill>
+              <a:srgbClr val="D8E0E8"/>
+            </a:solidFill>
+            <a:prstDash val="solid"/>
+          </a:ln>
+        </p:spPr>
+        <p:txBody>
+          <a:bodyPr xmlns:a="http://schemas.openxmlformats.org/drawingml/2006/main" lIns="152400" tIns="133350" rIns="152400" bIns="133350" anchor="ctr">
+            <a:normAutofit fontScale="80262"/>
+          </a:bodyPr>
+          <a:lstStyle xmlns:a="http://schemas.openxmlformats.org/drawingml/2006/main"/>
+          <a:p xmlns:a="http://schemas.openxmlformats.org/drawingml/2006/main">
+            <a:pPr algn="l">
+              <a:defRPr sz="1500" b="0">
+                <a:solidFill>
+                  <a:srgbClr val="10233F"/>
+                </a:solidFill>
+                <a:latin typeface="PingFang SC"/>
+                <a:ea typeface="PingFang SC"/>
+                <a:cs typeface="PingFang SC"/>
+              </a:defRPr>
+            </a:pPr>
+            <a:r>
+              <a:rPr sz="1500" b="0">
+                <a:solidFill>
+                  <a:srgbClr val="10233F"/>
+                </a:solidFill>
+                <a:latin typeface="PingFang SC"/>
+                <a:ea typeface="PingFang SC"/>
+                <a:cs typeface="PingFang SC"/>
+              </a:rPr>
+              <a:t>03  RealSense 官方 ROS2 wrapper：核对话题、TF、外参、IMU 与 RGB-D 发布方式；课程使用迁移后的官方仓库。（核对日期：2026-07-12）</a:t>
+            </a:r>
+          </a:p>
+        </p:txBody>
+      </p:sp>
+      <p:sp>
+        <p:nvSpPr>
+          <p:cNvPr id="9" name="source-3">
+            <a:extLst xmlns:a="http://schemas.openxmlformats.org/drawingml/2006/main">
+              <a:ext uri="{FF2B5EF4-FFF2-40B4-BE49-F238E27FC236}">
+                <a16:creationId xmlns:a16="http://schemas.microsoft.com/office/drawing/2014/main" id="{A11FF8C1-2D8D-4EF9-8AC6-2330F8DBAD40}"/>
+              </a:ext>
+            </a:extLst>
+          </p:cNvPr>
+          <p:cNvSpPr>
+            <a:spLocks xmlns:a="http://schemas.openxmlformats.org/drawingml/2006/main" noGrp="1"/>
+          </p:cNvSpPr>
+          <p:nvPr/>
+        </p:nvSpPr>
+        <p:spPr>
+          <a:xfrm xmlns:a="http://schemas.openxmlformats.org/drawingml/2006/main">
+            <a:off x="914400" y="4000500"/>
+            <a:ext cx="10363200" cy="533400"/>
+          </a:xfrm>
+          <a:prstGeom xmlns:a="http://schemas.openxmlformats.org/drawingml/2006/main" prst="roundRect">
+            <a:avLst>
+              <a:gd name="adj" fmla="val 21429"/>
+            </a:avLst>
+          </a:prstGeom>
+          <a:solidFill xmlns:a="http://schemas.openxmlformats.org/drawingml/2006/main">
+            <a:srgbClr val="FFFFFF"/>
+          </a:solidFill>
+          <a:ln xmlns:a="http://schemas.openxmlformats.org/drawingml/2006/main" w="9525">
+            <a:solidFill>
+              <a:srgbClr val="D8E0E8"/>
+            </a:solidFill>
+            <a:prstDash val="solid"/>
+          </a:ln>
+        </p:spPr>
+        <p:txBody>
+          <a:bodyPr xmlns:a="http://schemas.openxmlformats.org/drawingml/2006/main" lIns="152400" tIns="133350" rIns="152400" bIns="133350" anchor="ctr">
+            <a:normAutofit fontScale="85987"/>
+          </a:bodyPr>
+          <a:lstStyle xmlns:a="http://schemas.openxmlformats.org/drawingml/2006/main"/>
+          <a:p xmlns:a="http://schemas.openxmlformats.org/drawingml/2006/main">
+            <a:pPr algn="l">
+              <a:defRPr sz="1500" b="0">
+                <a:solidFill>
+                  <a:srgbClr val="10233F"/>
+                </a:solidFill>
+                <a:latin typeface="PingFang SC"/>
+                <a:ea typeface="PingFang SC"/>
+                <a:cs typeface="PingFang SC"/>
+              </a:defRPr>
+            </a:pPr>
+            <a:r>
+              <a:rPr sz="1500" b="0">
+                <a:solidFill>
+                  <a:srgbClr val="10233F"/>
+                </a:solidFill>
+                <a:latin typeface="PingFang SC"/>
+                <a:ea typeface="PingFang SC"/>
+                <a:cs typeface="PingFang SC"/>
+              </a:rPr>
+              <a:t>04  Livox Mid-360 官方规格：核对视场、点率、IMU 与同步能力；量程必须同时说明反射率和环境光条件。（核对日期：2026-07-12）</a:t>
+            </a:r>
+          </a:p>
+        </p:txBody>
+      </p:sp>
+      <p:sp>
+        <p:nvSpPr>
+          <p:cNvPr id="10" name="source-4">
+            <a:extLst xmlns:a="http://schemas.openxmlformats.org/drawingml/2006/main">
+              <a:ext uri="{FF2B5EF4-FFF2-40B4-BE49-F238E27FC236}">
+                <a16:creationId xmlns:a16="http://schemas.microsoft.com/office/drawing/2014/main" id="{C9479E3A-FF01-444B-862C-0E831B94DB8B}"/>
+              </a:ext>
+            </a:extLst>
+          </p:cNvPr>
+          <p:cNvSpPr>
+            <a:spLocks xmlns:a="http://schemas.openxmlformats.org/drawingml/2006/main" noGrp="1"/>
+          </p:cNvSpPr>
+          <p:nvPr/>
+        </p:nvSpPr>
+        <p:spPr>
+          <a:xfrm xmlns:a="http://schemas.openxmlformats.org/drawingml/2006/main">
+            <a:off x="914400" y="4686300"/>
+            <a:ext cx="10363200" cy="533400"/>
+          </a:xfrm>
+          <a:prstGeom xmlns:a="http://schemas.openxmlformats.org/drawingml/2006/main" prst="roundRect">
+            <a:avLst>
+              <a:gd name="adj" fmla="val 21429"/>
+            </a:avLst>
+          </a:prstGeom>
+          <a:solidFill xmlns:a="http://schemas.openxmlformats.org/drawingml/2006/main">
+            <a:srgbClr val="FFFFFF"/>
+          </a:solidFill>
+          <a:ln xmlns:a="http://schemas.openxmlformats.org/drawingml/2006/main" w="9525">
+            <a:solidFill>
+              <a:srgbClr val="D8E0E8"/>
+            </a:solidFill>
+            <a:prstDash val="solid"/>
+          </a:ln>
+        </p:spPr>
+        <p:txBody>
+          <a:bodyPr xmlns:a="http://schemas.openxmlformats.org/drawingml/2006/main" lIns="152400" tIns="133350" rIns="152400" bIns="133350" anchor="ctr">
+            <a:normAutofit fontScale="81212"/>
+          </a:bodyPr>
+          <a:lstStyle xmlns:a="http://schemas.openxmlformats.org/drawingml/2006/main"/>
+          <a:p xmlns:a="http://schemas.openxmlformats.org/drawingml/2006/main">
+            <a:pPr algn="l">
+              <a:defRPr sz="1500" b="0">
+                <a:solidFill>
+                  <a:srgbClr val="10233F"/>
+                </a:solidFill>
+                <a:latin typeface="PingFang SC"/>
+                <a:ea typeface="PingFang SC"/>
+                <a:cs typeface="PingFang SC"/>
+              </a:defRPr>
+            </a:pPr>
+            <a:r>
+              <a:rPr sz="1500" b="0">
+                <a:solidFill>
+                  <a:srgbClr val="10233F"/>
+                </a:solidFill>
+                <a:latin typeface="PingFang SC"/>
+                <a:ea typeface="PingFang SC"/>
+                <a:cs typeface="PingFang SC"/>
+              </a:rPr>
+              <a:t>05  Livox ROS Driver 2：核对 Mid-360 与 ROS2 支持；官方将该驱动定位为调试工具，量产系统仍需工程化验证。（核对日期：2026-07-12）</a:t>
+            </a:r>
+          </a:p>
+        </p:txBody>
+      </p:sp>
+      <p:sp>
+        <p:nvSpPr>
+          <p:cNvPr id="11" name="s11-takeaway-rule">
+            <a:extLst xmlns:a="http://schemas.openxmlformats.org/drawingml/2006/main">
+              <a:ext uri="{FF2B5EF4-FFF2-40B4-BE49-F238E27FC236}">
+                <a16:creationId xmlns:a16="http://schemas.microsoft.com/office/drawing/2014/main" id="{16D902E2-1BE9-4834-9065-E7446556FC82}"/>
               </a:ext>
             </a:extLst>
           </p:cNvPr>
@@ -3583,10 +3775,10 @@
       </p:sp>
       <p:sp>
         <p:nvSpPr>
-          <p:cNvPr id="9" name="s11-takeaway">
-            <a:extLst xmlns:a="http://schemas.openxmlformats.org/drawingml/2006/main">
-              <a:ext uri="{FF2B5EF4-FFF2-40B4-BE49-F238E27FC236}">
-                <a16:creationId xmlns:a16="http://schemas.microsoft.com/office/drawing/2014/main" id="{F4413EB9-16EE-4AF8-8C1A-ABDF081EC56D}"/>
+          <p:cNvPr id="12" name="s11-takeaway">
+            <a:extLst xmlns:a="http://schemas.openxmlformats.org/drawingml/2006/main">
+              <a:ext uri="{FF2B5EF4-FFF2-40B4-BE49-F238E27FC236}">
+                <a16:creationId xmlns:a16="http://schemas.microsoft.com/office/drawing/2014/main" id="{163508B6-5D23-45AC-90D2-309DF59B2C7C}"/>
               </a:ext>
             </a:extLst>
           </p:cNvPr>
@@ -3642,7 +3834,7 @@
     </p:spTree>
     <p:extLst>
       <p:ext uri="{BB962C8B-B14F-4D97-AF65-F5344CB8AC3E}">
-        <p14:creationId xmlns:p14="http://schemas.microsoft.com/office/powerpoint/2010/main" val="1063717083"/>
+        <p14:creationId xmlns:p14="http://schemas.microsoft.com/office/powerpoint/2010/main" val="1392358053"/>
       </p:ext>
     </p:extLst>
   </p:cSld>
@@ -3673,7 +3865,7 @@
           <p:cNvPr id="1" name="s2-rule">
             <a:extLst xmlns:a="http://schemas.openxmlformats.org/drawingml/2006/main">
               <a:ext uri="{FF2B5EF4-FFF2-40B4-BE49-F238E27FC236}">
-                <a16:creationId xmlns:a16="http://schemas.microsoft.com/office/drawing/2014/main" id="{9EBD7BF5-2BE3-4178-93D9-8BD951FD661E}"/>
+                <a16:creationId xmlns:a16="http://schemas.microsoft.com/office/drawing/2014/main" id="{DD6AA188-6AAA-4EFA-95F7-46E3AB416264}"/>
               </a:ext>
             </a:extLst>
           </p:cNvPr>
@@ -3706,7 +3898,7 @@
           <p:cNvPr id="2" name="s2-eyebrow">
             <a:extLst xmlns:a="http://schemas.openxmlformats.org/drawingml/2006/main">
               <a:ext uri="{FF2B5EF4-FFF2-40B4-BE49-F238E27FC236}">
-                <a16:creationId xmlns:a16="http://schemas.microsoft.com/office/drawing/2014/main" id="{68C50B8B-8228-4129-B7BC-E1B31E6208EA}"/>
+                <a16:creationId xmlns:a16="http://schemas.microsoft.com/office/drawing/2014/main" id="{751CF830-50D7-4FA8-8CE9-E0B05BE06CFB}"/>
               </a:ext>
             </a:extLst>
           </p:cNvPr>
@@ -3764,7 +3956,7 @@
           <p:cNvPr id="3" name="s2-title">
             <a:extLst xmlns:a="http://schemas.openxmlformats.org/drawingml/2006/main">
               <a:ext uri="{FF2B5EF4-FFF2-40B4-BE49-F238E27FC236}">
-                <a16:creationId xmlns:a16="http://schemas.microsoft.com/office/drawing/2014/main" id="{1587F2D8-C786-4927-965F-BC0A4C6AC525}"/>
+                <a16:creationId xmlns:a16="http://schemas.microsoft.com/office/drawing/2014/main" id="{CB146A99-40B3-45D2-A869-47D425E0BD99}"/>
               </a:ext>
             </a:extLst>
           </p:cNvPr>
@@ -3812,7 +4004,7 @@
                 <a:ea typeface="PingFang SC"/>
                 <a:cs typeface="PingFang SC"/>
               </a:rPr>
-              <a:t>学完这一节，你能完成这些判断与行动</a:t>
+              <a:t>多模态感知：2项学习结果</a:t>
             </a:r>
           </a:p>
         </p:txBody>
@@ -3822,7 +4014,7 @@
           <p:cNvPr id="4" name="s2-footer">
             <a:extLst xmlns:a="http://schemas.openxmlformats.org/drawingml/2006/main">
               <a:ext uri="{FF2B5EF4-FFF2-40B4-BE49-F238E27FC236}">
-                <a16:creationId xmlns:a16="http://schemas.microsoft.com/office/drawing/2014/main" id="{A3BF950C-3531-46E2-B14A-42E8CAB89DF7}"/>
+                <a16:creationId xmlns:a16="http://schemas.microsoft.com/office/drawing/2014/main" id="{435B6F4F-5C01-43FF-AAF7-B5C723A0AEF7}"/>
               </a:ext>
             </a:extLst>
           </p:cNvPr>
@@ -3853,7 +4045,7 @@
           <p:cNvPr id="5" name="s2-identity">
             <a:extLst xmlns:a="http://schemas.openxmlformats.org/drawingml/2006/main">
               <a:ext uri="{FF2B5EF4-FFF2-40B4-BE49-F238E27FC236}">
-                <a16:creationId xmlns:a16="http://schemas.microsoft.com/office/drawing/2014/main" id="{7BD9193D-A5A5-43E9-8A00-3DFAA2191C45}"/>
+                <a16:creationId xmlns:a16="http://schemas.microsoft.com/office/drawing/2014/main" id="{C370844D-2E5A-4015-BE83-5CA751C4970C}"/>
               </a:ext>
             </a:extLst>
           </p:cNvPr>
@@ -3911,7 +4103,7 @@
           <p:cNvPr id="6" name="objective-1">
             <a:extLst xmlns:a="http://schemas.openxmlformats.org/drawingml/2006/main">
               <a:ext uri="{FF2B5EF4-FFF2-40B4-BE49-F238E27FC236}">
-                <a16:creationId xmlns:a16="http://schemas.microsoft.com/office/drawing/2014/main" id="{6CD3C88E-0C0A-4853-ADEF-608DF9630D59}"/>
+                <a16:creationId xmlns:a16="http://schemas.microsoft.com/office/drawing/2014/main" id="{A4CCBB43-EE74-431D-BA34-E32A6441BE30}"/>
               </a:ext>
             </a:extLst>
           </p:cNvPr>
@@ -3998,7 +4190,7 @@
           <p:cNvPr id="7" name="objective-2">
             <a:extLst xmlns:a="http://schemas.openxmlformats.org/drawingml/2006/main">
               <a:ext uri="{FF2B5EF4-FFF2-40B4-BE49-F238E27FC236}">
-                <a16:creationId xmlns:a16="http://schemas.microsoft.com/office/drawing/2014/main" id="{F3316D36-E4F9-411C-9359-A2B0C604AA8A}"/>
+                <a16:creationId xmlns:a16="http://schemas.microsoft.com/office/drawing/2014/main" id="{DCBD51DE-922D-492D-BBF6-D13181125F35}"/>
               </a:ext>
             </a:extLst>
           </p:cNvPr>
@@ -4022,7 +4214,7 @@
           </a:solidFill>
           <a:ln xmlns:a="http://schemas.openxmlformats.org/drawingml/2006/main" w="19050">
             <a:solidFill>
-              <a:srgbClr val="2D9B72"/>
+              <a:srgbClr val="0B6B4F"/>
             </a:solidFill>
             <a:prstDash val="solid"/>
           </a:ln>
@@ -4083,7 +4275,7 @@
     </p:spTree>
     <p:extLst>
       <p:ext uri="{BB962C8B-B14F-4D97-AF65-F5344CB8AC3E}">
-        <p14:creationId xmlns:p14="http://schemas.microsoft.com/office/powerpoint/2010/main" val="986254443"/>
+        <p14:creationId xmlns:p14="http://schemas.microsoft.com/office/powerpoint/2010/main" val="285881198"/>
       </p:ext>
     </p:extLst>
   </p:cSld>
@@ -4114,7 +4306,7 @@
           <p:cNvPr id="1" name="s3-rule">
             <a:extLst xmlns:a="http://schemas.openxmlformats.org/drawingml/2006/main">
               <a:ext uri="{FF2B5EF4-FFF2-40B4-BE49-F238E27FC236}">
-                <a16:creationId xmlns:a16="http://schemas.microsoft.com/office/drawing/2014/main" id="{14416F8E-297C-4CE7-9742-D471B9A984F9}"/>
+                <a16:creationId xmlns:a16="http://schemas.microsoft.com/office/drawing/2014/main" id="{0BA96C45-5BB6-4427-A50F-12E36A0615B6}"/>
               </a:ext>
             </a:extLst>
           </p:cNvPr>
@@ -4147,7 +4339,7 @@
           <p:cNvPr id="2" name="s3-eyebrow">
             <a:extLst xmlns:a="http://schemas.openxmlformats.org/drawingml/2006/main">
               <a:ext uri="{FF2B5EF4-FFF2-40B4-BE49-F238E27FC236}">
-                <a16:creationId xmlns:a16="http://schemas.microsoft.com/office/drawing/2014/main" id="{0FFF0B90-9413-4EAD-9B4F-3058A416BED7}"/>
+                <a16:creationId xmlns:a16="http://schemas.microsoft.com/office/drawing/2014/main" id="{C4C00570-3359-4022-A65E-75513680B43E}"/>
               </a:ext>
             </a:extLst>
           </p:cNvPr>
@@ -4205,7 +4397,7 @@
           <p:cNvPr id="3" name="s3-title">
             <a:extLst xmlns:a="http://schemas.openxmlformats.org/drawingml/2006/main">
               <a:ext uri="{FF2B5EF4-FFF2-40B4-BE49-F238E27FC236}">
-                <a16:creationId xmlns:a16="http://schemas.microsoft.com/office/drawing/2014/main" id="{9B16DFB5-ED57-4DCC-86A4-731586326FC0}"/>
+                <a16:creationId xmlns:a16="http://schemas.microsoft.com/office/drawing/2014/main" id="{9BE8B40F-3665-40B7-8381-8C07A42A2FD1}"/>
               </a:ext>
             </a:extLst>
           </p:cNvPr>
@@ -4263,7 +4455,7 @@
           <p:cNvPr id="4" name="s3-footer">
             <a:extLst xmlns:a="http://schemas.openxmlformats.org/drawingml/2006/main">
               <a:ext uri="{FF2B5EF4-FFF2-40B4-BE49-F238E27FC236}">
-                <a16:creationId xmlns:a16="http://schemas.microsoft.com/office/drawing/2014/main" id="{3774DCD3-E8E6-4925-BD5D-05E6F55ACD28}"/>
+                <a16:creationId xmlns:a16="http://schemas.microsoft.com/office/drawing/2014/main" id="{65312B9B-2C6A-4906-9144-095A12808036}"/>
               </a:ext>
             </a:extLst>
           </p:cNvPr>
@@ -4294,7 +4486,7 @@
           <p:cNvPr id="5" name="s3-identity">
             <a:extLst xmlns:a="http://schemas.openxmlformats.org/drawingml/2006/main">
               <a:ext uri="{FF2B5EF4-FFF2-40B4-BE49-F238E27FC236}">
-                <a16:creationId xmlns:a16="http://schemas.microsoft.com/office/drawing/2014/main" id="{B50D8798-4D4B-4CA6-8316-82EBACAF1DA3}"/>
+                <a16:creationId xmlns:a16="http://schemas.microsoft.com/office/drawing/2014/main" id="{116B4AA8-E6DD-4F92-B07B-AE37DFAE6955}"/>
               </a:ext>
             </a:extLst>
           </p:cNvPr>
@@ -4352,7 +4544,7 @@
           <p:cNvPr id="6" name="core-no-0">
             <a:extLst xmlns:a="http://schemas.openxmlformats.org/drawingml/2006/main">
               <a:ext uri="{FF2B5EF4-FFF2-40B4-BE49-F238E27FC236}">
-                <a16:creationId xmlns:a16="http://schemas.microsoft.com/office/drawing/2014/main" id="{7221217E-9FC1-49AB-920F-38D2418F4A99}"/>
+                <a16:creationId xmlns:a16="http://schemas.microsoft.com/office/drawing/2014/main" id="{D940E7D2-7E16-4DBD-B3D4-698B1A113B44}"/>
               </a:ext>
             </a:extLst>
           </p:cNvPr>
@@ -4384,7 +4576,7 @@
             <a:pPr algn="l">
               <a:defRPr sz="2250" b="1">
                 <a:solidFill>
-                  <a:srgbClr val="2D9B72"/>
+                  <a:srgbClr val="0B6B4F"/>
                 </a:solidFill>
                 <a:latin typeface="PingFang SC"/>
                 <a:ea typeface="PingFang SC"/>
@@ -4394,7 +4586,7 @@
             <a:r>
               <a:rPr sz="2250" b="1">
                 <a:solidFill>
-                  <a:srgbClr val="2D9B72"/>
+                  <a:srgbClr val="0B6B4F"/>
                 </a:solidFill>
                 <a:latin typeface="PingFang SC"/>
                 <a:ea typeface="PingFang SC"/>
@@ -4410,7 +4602,7 @@
           <p:cNvPr id="7" name="core-label-0">
             <a:extLst xmlns:a="http://schemas.openxmlformats.org/drawingml/2006/main">
               <a:ext uri="{FF2B5EF4-FFF2-40B4-BE49-F238E27FC236}">
-                <a16:creationId xmlns:a16="http://schemas.microsoft.com/office/drawing/2014/main" id="{D6CE6D6F-1A9F-49FD-A8A6-3A4764C98650}"/>
+                <a16:creationId xmlns:a16="http://schemas.microsoft.com/office/drawing/2014/main" id="{57B79D92-BE4F-4A38-83D8-93FC6CB8CF2D}"/>
               </a:ext>
             </a:extLst>
           </p:cNvPr>
@@ -4468,7 +4660,7 @@
           <p:cNvPr id="8" name="core-body-0">
             <a:extLst xmlns:a="http://schemas.openxmlformats.org/drawingml/2006/main">
               <a:ext uri="{FF2B5EF4-FFF2-40B4-BE49-F238E27FC236}">
-                <a16:creationId xmlns:a16="http://schemas.microsoft.com/office/drawing/2014/main" id="{36BD3C6D-C83A-4C6F-AC1A-5E754F6E5A27}"/>
+                <a16:creationId xmlns:a16="http://schemas.microsoft.com/office/drawing/2014/main" id="{4F3E9F31-5420-43C3-8345-9F23E2E2F906}"/>
               </a:ext>
             </a:extLst>
           </p:cNvPr>
@@ -4492,7 +4684,7 @@
           </a:solidFill>
           <a:ln xmlns:a="http://schemas.openxmlformats.org/drawingml/2006/main" w="19050">
             <a:solidFill>
-              <a:srgbClr val="2D9B72"/>
+              <a:srgbClr val="0B6B4F"/>
             </a:solidFill>
             <a:prstDash val="solid"/>
           </a:ln>
@@ -4532,7 +4724,7 @@
           <p:cNvPr id="9" name="core-no-1">
             <a:extLst xmlns:a="http://schemas.openxmlformats.org/drawingml/2006/main">
               <a:ext uri="{FF2B5EF4-FFF2-40B4-BE49-F238E27FC236}">
-                <a16:creationId xmlns:a16="http://schemas.microsoft.com/office/drawing/2014/main" id="{FC8438A3-6E39-4EA6-ACA9-60A05D6B9FB5}"/>
+                <a16:creationId xmlns:a16="http://schemas.microsoft.com/office/drawing/2014/main" id="{E0A04847-1906-4BDC-B56E-E2A18E53A3BA}"/>
               </a:ext>
             </a:extLst>
           </p:cNvPr>
@@ -4564,7 +4756,7 @@
             <a:pPr algn="l">
               <a:defRPr sz="2250" b="1">
                 <a:solidFill>
-                  <a:srgbClr val="2D9B72"/>
+                  <a:srgbClr val="0B6B4F"/>
                 </a:solidFill>
                 <a:latin typeface="PingFang SC"/>
                 <a:ea typeface="PingFang SC"/>
@@ -4574,7 +4766,7 @@
             <a:r>
               <a:rPr sz="2250" b="1">
                 <a:solidFill>
-                  <a:srgbClr val="2D9B72"/>
+                  <a:srgbClr val="0B6B4F"/>
                 </a:solidFill>
                 <a:latin typeface="PingFang SC"/>
                 <a:ea typeface="PingFang SC"/>
@@ -4590,7 +4782,7 @@
           <p:cNvPr id="10" name="core-body-1">
             <a:extLst xmlns:a="http://schemas.openxmlformats.org/drawingml/2006/main">
               <a:ext uri="{FF2B5EF4-FFF2-40B4-BE49-F238E27FC236}">
-                <a16:creationId xmlns:a16="http://schemas.microsoft.com/office/drawing/2014/main" id="{ED70FA70-96A3-41BF-BD80-DFAA4160551C}"/>
+                <a16:creationId xmlns:a16="http://schemas.microsoft.com/office/drawing/2014/main" id="{5F763B0D-EF65-49BB-99D3-50B4B4DE305A}"/>
               </a:ext>
             </a:extLst>
           </p:cNvPr>
@@ -4654,7 +4846,7 @@
           <p:cNvPr id="11" name="s3-takeaway-rule">
             <a:extLst xmlns:a="http://schemas.openxmlformats.org/drawingml/2006/main">
               <a:ext uri="{FF2B5EF4-FFF2-40B4-BE49-F238E27FC236}">
-                <a16:creationId xmlns:a16="http://schemas.microsoft.com/office/drawing/2014/main" id="{6366E115-0815-4738-972A-C1322C2ECC3F}"/>
+                <a16:creationId xmlns:a16="http://schemas.microsoft.com/office/drawing/2014/main" id="{8C30C8AA-189F-4C7F-A21A-4F86F727424D}"/>
               </a:ext>
             </a:extLst>
           </p:cNvPr>
@@ -4687,7 +4879,7 @@
           <p:cNvPr id="12" name="s3-takeaway">
             <a:extLst xmlns:a="http://schemas.openxmlformats.org/drawingml/2006/main">
               <a:ext uri="{FF2B5EF4-FFF2-40B4-BE49-F238E27FC236}">
-                <a16:creationId xmlns:a16="http://schemas.microsoft.com/office/drawing/2014/main" id="{BC4498ED-671C-484C-9689-8B263407FAAB}"/>
+                <a16:creationId xmlns:a16="http://schemas.microsoft.com/office/drawing/2014/main" id="{4FE7EFA7-0CF4-45EE-933C-157588077FED}"/>
               </a:ext>
             </a:extLst>
           </p:cNvPr>
@@ -4743,7 +4935,7 @@
     </p:spTree>
     <p:extLst>
       <p:ext uri="{BB962C8B-B14F-4D97-AF65-F5344CB8AC3E}">
-        <p14:creationId xmlns:p14="http://schemas.microsoft.com/office/powerpoint/2010/main" val="1311445159"/>
+        <p14:creationId xmlns:p14="http://schemas.microsoft.com/office/powerpoint/2010/main" val="918397333"/>
       </p:ext>
     </p:extLst>
   </p:cSld>
@@ -4774,7 +4966,7 @@
           <p:cNvPr id="1" name="s4-rule">
             <a:extLst xmlns:a="http://schemas.openxmlformats.org/drawingml/2006/main">
               <a:ext uri="{FF2B5EF4-FFF2-40B4-BE49-F238E27FC236}">
-                <a16:creationId xmlns:a16="http://schemas.microsoft.com/office/drawing/2014/main" id="{C591D6D2-338C-4076-8D36-2941CA1A8EF5}"/>
+                <a16:creationId xmlns:a16="http://schemas.microsoft.com/office/drawing/2014/main" id="{4FA199B0-1E10-4C77-9F01-7698FE29815A}"/>
               </a:ext>
             </a:extLst>
           </p:cNvPr>
@@ -4807,7 +4999,7 @@
           <p:cNvPr id="2" name="s4-eyebrow">
             <a:extLst xmlns:a="http://schemas.openxmlformats.org/drawingml/2006/main">
               <a:ext uri="{FF2B5EF4-FFF2-40B4-BE49-F238E27FC236}">
-                <a16:creationId xmlns:a16="http://schemas.microsoft.com/office/drawing/2014/main" id="{CB2B2BA6-CED0-4BE4-B05A-28F0FBC4A8E1}"/>
+                <a16:creationId xmlns:a16="http://schemas.microsoft.com/office/drawing/2014/main" id="{A9940BA9-7F7B-4623-B3C2-522F0D91B1FB}"/>
               </a:ext>
             </a:extLst>
           </p:cNvPr>
@@ -4865,7 +5057,7 @@
           <p:cNvPr id="3" name="s4-title">
             <a:extLst xmlns:a="http://schemas.openxmlformats.org/drawingml/2006/main">
               <a:ext uri="{FF2B5EF4-FFF2-40B4-BE49-F238E27FC236}">
-                <a16:creationId xmlns:a16="http://schemas.microsoft.com/office/drawing/2014/main" id="{AC53F4D7-FD9A-4E42-B3E4-1A2D4D160DD2}"/>
+                <a16:creationId xmlns:a16="http://schemas.microsoft.com/office/drawing/2014/main" id="{649AC77A-0961-4158-B74B-01ADE5C7239A}"/>
               </a:ext>
             </a:extLst>
           </p:cNvPr>
@@ -4923,7 +5115,7 @@
           <p:cNvPr id="4" name="s4-footer">
             <a:extLst xmlns:a="http://schemas.openxmlformats.org/drawingml/2006/main">
               <a:ext uri="{FF2B5EF4-FFF2-40B4-BE49-F238E27FC236}">
-                <a16:creationId xmlns:a16="http://schemas.microsoft.com/office/drawing/2014/main" id="{81752FFE-8F6F-4BC6-A85A-5ABBF8A9DF8F}"/>
+                <a16:creationId xmlns:a16="http://schemas.microsoft.com/office/drawing/2014/main" id="{F1D9B16E-5185-4E0E-9690-CFED0CCF5A66}"/>
               </a:ext>
             </a:extLst>
           </p:cNvPr>
@@ -4954,7 +5146,7 @@
           <p:cNvPr id="5" name="s4-identity">
             <a:extLst xmlns:a="http://schemas.openxmlformats.org/drawingml/2006/main">
               <a:ext uri="{FF2B5EF4-FFF2-40B4-BE49-F238E27FC236}">
-                <a16:creationId xmlns:a16="http://schemas.microsoft.com/office/drawing/2014/main" id="{738411E9-F4E9-4C28-8907-F59641FB8C07}"/>
+                <a16:creationId xmlns:a16="http://schemas.microsoft.com/office/drawing/2014/main" id="{BCBBE04E-E912-47A2-BB00-9FBC839BD0B7}"/>
               </a:ext>
             </a:extLst>
           </p:cNvPr>
@@ -5012,7 +5204,7 @@
           <p:cNvPr id="6" name="core-no-0">
             <a:extLst xmlns:a="http://schemas.openxmlformats.org/drawingml/2006/main">
               <a:ext uri="{FF2B5EF4-FFF2-40B4-BE49-F238E27FC236}">
-                <a16:creationId xmlns:a16="http://schemas.microsoft.com/office/drawing/2014/main" id="{CC9CBDE8-8E35-4E3B-8E3E-1806DF6AF8A2}"/>
+                <a16:creationId xmlns:a16="http://schemas.microsoft.com/office/drawing/2014/main" id="{EC56A202-EBC5-4CAB-A03E-EA040D054C68}"/>
               </a:ext>
             </a:extLst>
           </p:cNvPr>
@@ -5044,7 +5236,7 @@
             <a:pPr algn="l">
               <a:defRPr sz="2250" b="1">
                 <a:solidFill>
-                  <a:srgbClr val="2D9B72"/>
+                  <a:srgbClr val="0B6B4F"/>
                 </a:solidFill>
                 <a:latin typeface="PingFang SC"/>
                 <a:ea typeface="PingFang SC"/>
@@ -5054,7 +5246,7 @@
             <a:r>
               <a:rPr sz="2250" b="1">
                 <a:solidFill>
-                  <a:srgbClr val="2D9B72"/>
+                  <a:srgbClr val="0B6B4F"/>
                 </a:solidFill>
                 <a:latin typeface="PingFang SC"/>
                 <a:ea typeface="PingFang SC"/>
@@ -5070,7 +5262,7 @@
           <p:cNvPr id="7" name="core-label-0">
             <a:extLst xmlns:a="http://schemas.openxmlformats.org/drawingml/2006/main">
               <a:ext uri="{FF2B5EF4-FFF2-40B4-BE49-F238E27FC236}">
-                <a16:creationId xmlns:a16="http://schemas.microsoft.com/office/drawing/2014/main" id="{E8808B7C-DA92-4300-9CC5-5FD80B3F9567}"/>
+                <a16:creationId xmlns:a16="http://schemas.microsoft.com/office/drawing/2014/main" id="{D5A3DD87-092A-450C-A74F-A5CB10CB86D1}"/>
               </a:ext>
             </a:extLst>
           </p:cNvPr>
@@ -5128,7 +5320,7 @@
           <p:cNvPr id="8" name="core-body-0">
             <a:extLst xmlns:a="http://schemas.openxmlformats.org/drawingml/2006/main">
               <a:ext uri="{FF2B5EF4-FFF2-40B4-BE49-F238E27FC236}">
-                <a16:creationId xmlns:a16="http://schemas.microsoft.com/office/drawing/2014/main" id="{778DC481-87CC-4B99-8A9C-4AD7533613FF}"/>
+                <a16:creationId xmlns:a16="http://schemas.microsoft.com/office/drawing/2014/main" id="{3A5E7F29-F068-4271-868A-EA8AC51456FA}"/>
               </a:ext>
             </a:extLst>
           </p:cNvPr>
@@ -5152,7 +5344,7 @@
           </a:solidFill>
           <a:ln xmlns:a="http://schemas.openxmlformats.org/drawingml/2006/main" w="19050">
             <a:solidFill>
-              <a:srgbClr val="2D9B72"/>
+              <a:srgbClr val="0B6B4F"/>
             </a:solidFill>
             <a:prstDash val="solid"/>
           </a:ln>
@@ -5192,7 +5384,7 @@
           <p:cNvPr id="9" name="core-no-1">
             <a:extLst xmlns:a="http://schemas.openxmlformats.org/drawingml/2006/main">
               <a:ext uri="{FF2B5EF4-FFF2-40B4-BE49-F238E27FC236}">
-                <a16:creationId xmlns:a16="http://schemas.microsoft.com/office/drawing/2014/main" id="{B5CABC7F-1C76-400B-9F9A-497A18CA720C}"/>
+                <a16:creationId xmlns:a16="http://schemas.microsoft.com/office/drawing/2014/main" id="{86DE56A7-87F8-4969-BB67-731926575180}"/>
               </a:ext>
             </a:extLst>
           </p:cNvPr>
@@ -5224,7 +5416,7 @@
             <a:pPr algn="l">
               <a:defRPr sz="2250" b="1">
                 <a:solidFill>
-                  <a:srgbClr val="2D9B72"/>
+                  <a:srgbClr val="0B6B4F"/>
                 </a:solidFill>
                 <a:latin typeface="PingFang SC"/>
                 <a:ea typeface="PingFang SC"/>
@@ -5234,7 +5426,7 @@
             <a:r>
               <a:rPr sz="2250" b="1">
                 <a:solidFill>
-                  <a:srgbClr val="2D9B72"/>
+                  <a:srgbClr val="0B6B4F"/>
                 </a:solidFill>
                 <a:latin typeface="PingFang SC"/>
                 <a:ea typeface="PingFang SC"/>
@@ -5250,7 +5442,7 @@
           <p:cNvPr id="10" name="core-body-1">
             <a:extLst xmlns:a="http://schemas.openxmlformats.org/drawingml/2006/main">
               <a:ext uri="{FF2B5EF4-FFF2-40B4-BE49-F238E27FC236}">
-                <a16:creationId xmlns:a16="http://schemas.microsoft.com/office/drawing/2014/main" id="{03BB71DB-BF14-4378-880B-E0373C6BF245}"/>
+                <a16:creationId xmlns:a16="http://schemas.microsoft.com/office/drawing/2014/main" id="{3A035543-299A-44BC-9755-88C4366BFA77}"/>
               </a:ext>
             </a:extLst>
           </p:cNvPr>
@@ -5314,7 +5506,7 @@
           <p:cNvPr id="11" name="s4-takeaway-rule">
             <a:extLst xmlns:a="http://schemas.openxmlformats.org/drawingml/2006/main">
               <a:ext uri="{FF2B5EF4-FFF2-40B4-BE49-F238E27FC236}">
-                <a16:creationId xmlns:a16="http://schemas.microsoft.com/office/drawing/2014/main" id="{38AAB98B-C381-432C-B537-89F013D2857A}"/>
+                <a16:creationId xmlns:a16="http://schemas.microsoft.com/office/drawing/2014/main" id="{5EA9BF9E-79A4-4004-A22F-4ADE74DB5D8D}"/>
               </a:ext>
             </a:extLst>
           </p:cNvPr>
@@ -5347,7 +5539,7 @@
           <p:cNvPr id="12" name="s4-takeaway">
             <a:extLst xmlns:a="http://schemas.openxmlformats.org/drawingml/2006/main">
               <a:ext uri="{FF2B5EF4-FFF2-40B4-BE49-F238E27FC236}">
-                <a16:creationId xmlns:a16="http://schemas.microsoft.com/office/drawing/2014/main" id="{547003D0-AEB5-4FBE-94F4-F181DFE081D5}"/>
+                <a16:creationId xmlns:a16="http://schemas.microsoft.com/office/drawing/2014/main" id="{9F596421-5DEA-4054-AF4A-0C315CA71948}"/>
               </a:ext>
             </a:extLst>
           </p:cNvPr>
@@ -5403,7 +5595,7 @@
     </p:spTree>
     <p:extLst>
       <p:ext uri="{BB962C8B-B14F-4D97-AF65-F5344CB8AC3E}">
-        <p14:creationId xmlns:p14="http://schemas.microsoft.com/office/powerpoint/2010/main" val="358005507"/>
+        <p14:creationId xmlns:p14="http://schemas.microsoft.com/office/powerpoint/2010/main" val="1269148891"/>
       </p:ext>
     </p:extLst>
   </p:cSld>
@@ -5434,7 +5626,7 @@
           <p:cNvPr id="1" name="s5-rule">
             <a:extLst xmlns:a="http://schemas.openxmlformats.org/drawingml/2006/main">
               <a:ext uri="{FF2B5EF4-FFF2-40B4-BE49-F238E27FC236}">
-                <a16:creationId xmlns:a16="http://schemas.microsoft.com/office/drawing/2014/main" id="{77FE0AB0-B1F7-4F8E-AC4A-30E454B6AE28}"/>
+                <a16:creationId xmlns:a16="http://schemas.microsoft.com/office/drawing/2014/main" id="{D971AD88-1D30-4181-BEF9-65EA4EFEDA7F}"/>
               </a:ext>
             </a:extLst>
           </p:cNvPr>
@@ -5467,7 +5659,7 @@
           <p:cNvPr id="2" name="s5-eyebrow">
             <a:extLst xmlns:a="http://schemas.openxmlformats.org/drawingml/2006/main">
               <a:ext uri="{FF2B5EF4-FFF2-40B4-BE49-F238E27FC236}">
-                <a16:creationId xmlns:a16="http://schemas.microsoft.com/office/drawing/2014/main" id="{06F25F40-4975-4F55-81AD-73BBD6EE20E9}"/>
+                <a16:creationId xmlns:a16="http://schemas.microsoft.com/office/drawing/2014/main" id="{F5F39DA3-D57B-4C59-AA3F-EC289466572D}"/>
               </a:ext>
             </a:extLst>
           </p:cNvPr>
@@ -5525,7 +5717,7 @@
           <p:cNvPr id="3" name="s5-title">
             <a:extLst xmlns:a="http://schemas.openxmlformats.org/drawingml/2006/main">
               <a:ext uri="{FF2B5EF4-FFF2-40B4-BE49-F238E27FC236}">
-                <a16:creationId xmlns:a16="http://schemas.microsoft.com/office/drawing/2014/main" id="{7BC92DA3-EFCC-41A2-992A-39CC19FAC048}"/>
+                <a16:creationId xmlns:a16="http://schemas.microsoft.com/office/drawing/2014/main" id="{CB79060C-6595-4263-87B4-A1CE8ED06C56}"/>
               </a:ext>
             </a:extLst>
           </p:cNvPr>
@@ -5583,7 +5775,7 @@
           <p:cNvPr id="4" name="s5-footer">
             <a:extLst xmlns:a="http://schemas.openxmlformats.org/drawingml/2006/main">
               <a:ext uri="{FF2B5EF4-FFF2-40B4-BE49-F238E27FC236}">
-                <a16:creationId xmlns:a16="http://schemas.microsoft.com/office/drawing/2014/main" id="{6081A2CE-A8CA-462C-B037-F3B817D14950}"/>
+                <a16:creationId xmlns:a16="http://schemas.microsoft.com/office/drawing/2014/main" id="{3EDB5789-EE62-49AC-9E18-533ED5113475}"/>
               </a:ext>
             </a:extLst>
           </p:cNvPr>
@@ -5614,7 +5806,7 @@
           <p:cNvPr id="5" name="s5-identity">
             <a:extLst xmlns:a="http://schemas.openxmlformats.org/drawingml/2006/main">
               <a:ext uri="{FF2B5EF4-FFF2-40B4-BE49-F238E27FC236}">
-                <a16:creationId xmlns:a16="http://schemas.microsoft.com/office/drawing/2014/main" id="{E0FA3E87-B0C3-4799-B8AA-D528995BC897}"/>
+                <a16:creationId xmlns:a16="http://schemas.microsoft.com/office/drawing/2014/main" id="{E8498011-B38F-4E8B-91D9-323E05D5608E}"/>
               </a:ext>
             </a:extLst>
           </p:cNvPr>
@@ -5672,7 +5864,7 @@
           <p:cNvPr id="6" name="core-no-0">
             <a:extLst xmlns:a="http://schemas.openxmlformats.org/drawingml/2006/main">
               <a:ext uri="{FF2B5EF4-FFF2-40B4-BE49-F238E27FC236}">
-                <a16:creationId xmlns:a16="http://schemas.microsoft.com/office/drawing/2014/main" id="{A5BCEDC0-08E0-436A-9393-AC2EA7D70B4D}"/>
+                <a16:creationId xmlns:a16="http://schemas.microsoft.com/office/drawing/2014/main" id="{76A3B898-826A-4E34-92E8-1E8428FC74BF}"/>
               </a:ext>
             </a:extLst>
           </p:cNvPr>
@@ -5704,7 +5896,7 @@
             <a:pPr algn="l">
               <a:defRPr sz="2250" b="1">
                 <a:solidFill>
-                  <a:srgbClr val="2D9B72"/>
+                  <a:srgbClr val="0B6B4F"/>
                 </a:solidFill>
                 <a:latin typeface="PingFang SC"/>
                 <a:ea typeface="PingFang SC"/>
@@ -5714,7 +5906,7 @@
             <a:r>
               <a:rPr sz="2250" b="1">
                 <a:solidFill>
-                  <a:srgbClr val="2D9B72"/>
+                  <a:srgbClr val="0B6B4F"/>
                 </a:solidFill>
                 <a:latin typeface="PingFang SC"/>
                 <a:ea typeface="PingFang SC"/>
@@ -5730,7 +5922,7 @@
           <p:cNvPr id="7" name="core-label-0">
             <a:extLst xmlns:a="http://schemas.openxmlformats.org/drawingml/2006/main">
               <a:ext uri="{FF2B5EF4-FFF2-40B4-BE49-F238E27FC236}">
-                <a16:creationId xmlns:a16="http://schemas.microsoft.com/office/drawing/2014/main" id="{ABA7A412-D2C3-4C34-8FCE-1230B8C43013}"/>
+                <a16:creationId xmlns:a16="http://schemas.microsoft.com/office/drawing/2014/main" id="{B3ADBF75-A229-4AD8-B2A0-F379C0B81906}"/>
               </a:ext>
             </a:extLst>
           </p:cNvPr>
@@ -5788,7 +5980,7 @@
           <p:cNvPr id="8" name="core-body-0">
             <a:extLst xmlns:a="http://schemas.openxmlformats.org/drawingml/2006/main">
               <a:ext uri="{FF2B5EF4-FFF2-40B4-BE49-F238E27FC236}">
-                <a16:creationId xmlns:a16="http://schemas.microsoft.com/office/drawing/2014/main" id="{9DE3D9B9-DCB3-4DC5-94BE-5576165A9BFB}"/>
+                <a16:creationId xmlns:a16="http://schemas.microsoft.com/office/drawing/2014/main" id="{933490D8-9172-4C9D-9B75-BF7A0F255635}"/>
               </a:ext>
             </a:extLst>
           </p:cNvPr>
@@ -5812,7 +6004,7 @@
           </a:solidFill>
           <a:ln xmlns:a="http://schemas.openxmlformats.org/drawingml/2006/main" w="19050">
             <a:solidFill>
-              <a:srgbClr val="2D9B72"/>
+              <a:srgbClr val="0B6B4F"/>
             </a:solidFill>
             <a:prstDash val="solid"/>
           </a:ln>
@@ -5852,7 +6044,7 @@
           <p:cNvPr id="9" name="core-no-1">
             <a:extLst xmlns:a="http://schemas.openxmlformats.org/drawingml/2006/main">
               <a:ext uri="{FF2B5EF4-FFF2-40B4-BE49-F238E27FC236}">
-                <a16:creationId xmlns:a16="http://schemas.microsoft.com/office/drawing/2014/main" id="{B33FD85C-A8E7-45CE-AE4F-1B8845D7E97E}"/>
+                <a16:creationId xmlns:a16="http://schemas.microsoft.com/office/drawing/2014/main" id="{FCDFA741-8943-4491-8ACC-D5422166AC2A}"/>
               </a:ext>
             </a:extLst>
           </p:cNvPr>
@@ -5884,7 +6076,7 @@
             <a:pPr algn="l">
               <a:defRPr sz="2250" b="1">
                 <a:solidFill>
-                  <a:srgbClr val="2D9B72"/>
+                  <a:srgbClr val="0B6B4F"/>
                 </a:solidFill>
                 <a:latin typeface="PingFang SC"/>
                 <a:ea typeface="PingFang SC"/>
@@ -5894,7 +6086,7 @@
             <a:r>
               <a:rPr sz="2250" b="1">
                 <a:solidFill>
-                  <a:srgbClr val="2D9B72"/>
+                  <a:srgbClr val="0B6B4F"/>
                 </a:solidFill>
                 <a:latin typeface="PingFang SC"/>
                 <a:ea typeface="PingFang SC"/>
@@ -5910,7 +6102,7 @@
           <p:cNvPr id="10" name="core-body-1">
             <a:extLst xmlns:a="http://schemas.openxmlformats.org/drawingml/2006/main">
               <a:ext uri="{FF2B5EF4-FFF2-40B4-BE49-F238E27FC236}">
-                <a16:creationId xmlns:a16="http://schemas.microsoft.com/office/drawing/2014/main" id="{F35B156A-236D-4C0B-A24A-A2373A8E5451}"/>
+                <a16:creationId xmlns:a16="http://schemas.microsoft.com/office/drawing/2014/main" id="{D1A58A99-EBDE-4877-8640-0C2BF5A7D5A2}"/>
               </a:ext>
             </a:extLst>
           </p:cNvPr>
@@ -5974,7 +6166,7 @@
           <p:cNvPr id="11" name="s5-takeaway-rule">
             <a:extLst xmlns:a="http://schemas.openxmlformats.org/drawingml/2006/main">
               <a:ext uri="{FF2B5EF4-FFF2-40B4-BE49-F238E27FC236}">
-                <a16:creationId xmlns:a16="http://schemas.microsoft.com/office/drawing/2014/main" id="{EB370206-861C-449A-A6DA-F62C221B1330}"/>
+                <a16:creationId xmlns:a16="http://schemas.microsoft.com/office/drawing/2014/main" id="{0E418006-DAC5-4146-B5FF-6A2E060E01E5}"/>
               </a:ext>
             </a:extLst>
           </p:cNvPr>
@@ -6007,7 +6199,7 @@
           <p:cNvPr id="12" name="s5-takeaway">
             <a:extLst xmlns:a="http://schemas.openxmlformats.org/drawingml/2006/main">
               <a:ext uri="{FF2B5EF4-FFF2-40B4-BE49-F238E27FC236}">
-                <a16:creationId xmlns:a16="http://schemas.microsoft.com/office/drawing/2014/main" id="{87F8B216-C545-40E8-845C-3DC6000DB4C9}"/>
+                <a16:creationId xmlns:a16="http://schemas.microsoft.com/office/drawing/2014/main" id="{37C89DDC-7ABF-44F6-A11D-FAE8F9AD3468}"/>
               </a:ext>
             </a:extLst>
           </p:cNvPr>
@@ -6063,7 +6255,7 @@
     </p:spTree>
     <p:extLst>
       <p:ext uri="{BB962C8B-B14F-4D97-AF65-F5344CB8AC3E}">
-        <p14:creationId xmlns:p14="http://schemas.microsoft.com/office/powerpoint/2010/main" val="1884219724"/>
+        <p14:creationId xmlns:p14="http://schemas.microsoft.com/office/powerpoint/2010/main" val="1138999137"/>
       </p:ext>
     </p:extLst>
   </p:cSld>
@@ -6094,7 +6286,7 @@
           <p:cNvPr id="1" name="s6-rule">
             <a:extLst xmlns:a="http://schemas.openxmlformats.org/drawingml/2006/main">
               <a:ext uri="{FF2B5EF4-FFF2-40B4-BE49-F238E27FC236}">
-                <a16:creationId xmlns:a16="http://schemas.microsoft.com/office/drawing/2014/main" id="{AAB04EFE-6E29-483C-8B24-D4BCDFA0A313}"/>
+                <a16:creationId xmlns:a16="http://schemas.microsoft.com/office/drawing/2014/main" id="{790F9007-F297-44C3-8850-C526F8086369}"/>
               </a:ext>
             </a:extLst>
           </p:cNvPr>
@@ -6127,7 +6319,7 @@
           <p:cNvPr id="2" name="s6-eyebrow">
             <a:extLst xmlns:a="http://schemas.openxmlformats.org/drawingml/2006/main">
               <a:ext uri="{FF2B5EF4-FFF2-40B4-BE49-F238E27FC236}">
-                <a16:creationId xmlns:a16="http://schemas.microsoft.com/office/drawing/2014/main" id="{2DFD153C-18F8-478E-97C4-F916840D3433}"/>
+                <a16:creationId xmlns:a16="http://schemas.microsoft.com/office/drawing/2014/main" id="{E65B209D-80BB-43B3-95F3-BDD7069E7790}"/>
               </a:ext>
             </a:extLst>
           </p:cNvPr>
@@ -6185,7 +6377,7 @@
           <p:cNvPr id="3" name="s6-title">
             <a:extLst xmlns:a="http://schemas.openxmlformats.org/drawingml/2006/main">
               <a:ext uri="{FF2B5EF4-FFF2-40B4-BE49-F238E27FC236}">
-                <a16:creationId xmlns:a16="http://schemas.microsoft.com/office/drawing/2014/main" id="{0C4199F3-0660-400E-B449-C9893DBA276D}"/>
+                <a16:creationId xmlns:a16="http://schemas.microsoft.com/office/drawing/2014/main" id="{74970A21-4449-4363-AA4F-BFD8367F25F0}"/>
               </a:ext>
             </a:extLst>
           </p:cNvPr>
@@ -6243,7 +6435,7 @@
           <p:cNvPr id="4" name="s6-footer">
             <a:extLst xmlns:a="http://schemas.openxmlformats.org/drawingml/2006/main">
               <a:ext uri="{FF2B5EF4-FFF2-40B4-BE49-F238E27FC236}">
-                <a16:creationId xmlns:a16="http://schemas.microsoft.com/office/drawing/2014/main" id="{37CDCEA8-4C36-4E3E-9D93-1AB7093572CC}"/>
+                <a16:creationId xmlns:a16="http://schemas.microsoft.com/office/drawing/2014/main" id="{F618B24B-1B1D-494B-AF93-0E7FAEB55AAF}"/>
               </a:ext>
             </a:extLst>
           </p:cNvPr>
@@ -6274,7 +6466,7 @@
           <p:cNvPr id="5" name="s6-identity">
             <a:extLst xmlns:a="http://schemas.openxmlformats.org/drawingml/2006/main">
               <a:ext uri="{FF2B5EF4-FFF2-40B4-BE49-F238E27FC236}">
-                <a16:creationId xmlns:a16="http://schemas.microsoft.com/office/drawing/2014/main" id="{1FDA7EDA-C020-4C5B-8FE9-400EF19EDF52}"/>
+                <a16:creationId xmlns:a16="http://schemas.microsoft.com/office/drawing/2014/main" id="{0DF9DF54-B70E-4D98-9C90-F9BC49D2D1CE}"/>
               </a:ext>
             </a:extLst>
           </p:cNvPr>
@@ -6332,7 +6524,7 @@
           <p:cNvPr id="6" name="core-no-0">
             <a:extLst xmlns:a="http://schemas.openxmlformats.org/drawingml/2006/main">
               <a:ext uri="{FF2B5EF4-FFF2-40B4-BE49-F238E27FC236}">
-                <a16:creationId xmlns:a16="http://schemas.microsoft.com/office/drawing/2014/main" id="{1CA2767B-BC88-4F7D-8368-BE2A71FFD5A0}"/>
+                <a16:creationId xmlns:a16="http://schemas.microsoft.com/office/drawing/2014/main" id="{F9920A68-2EEE-43F3-964F-F6D898820DAA}"/>
               </a:ext>
             </a:extLst>
           </p:cNvPr>
@@ -6364,7 +6556,7 @@
             <a:pPr algn="l">
               <a:defRPr sz="2250" b="1">
                 <a:solidFill>
-                  <a:srgbClr val="2D9B72"/>
+                  <a:srgbClr val="0B6B4F"/>
                 </a:solidFill>
                 <a:latin typeface="PingFang SC"/>
                 <a:ea typeface="PingFang SC"/>
@@ -6374,7 +6566,7 @@
             <a:r>
               <a:rPr sz="2250" b="1">
                 <a:solidFill>
-                  <a:srgbClr val="2D9B72"/>
+                  <a:srgbClr val="0B6B4F"/>
                 </a:solidFill>
                 <a:latin typeface="PingFang SC"/>
                 <a:ea typeface="PingFang SC"/>
@@ -6390,7 +6582,7 @@
           <p:cNvPr id="7" name="core-label-0">
             <a:extLst xmlns:a="http://schemas.openxmlformats.org/drawingml/2006/main">
               <a:ext uri="{FF2B5EF4-FFF2-40B4-BE49-F238E27FC236}">
-                <a16:creationId xmlns:a16="http://schemas.microsoft.com/office/drawing/2014/main" id="{E523D38E-53FF-43B2-BBB6-847CBE653B57}"/>
+                <a16:creationId xmlns:a16="http://schemas.microsoft.com/office/drawing/2014/main" id="{7EB6ED6E-8E76-4B8A-9EE7-B72F199ECE60}"/>
               </a:ext>
             </a:extLst>
           </p:cNvPr>
@@ -6448,7 +6640,7 @@
           <p:cNvPr id="8" name="core-body-0">
             <a:extLst xmlns:a="http://schemas.openxmlformats.org/drawingml/2006/main">
               <a:ext uri="{FF2B5EF4-FFF2-40B4-BE49-F238E27FC236}">
-                <a16:creationId xmlns:a16="http://schemas.microsoft.com/office/drawing/2014/main" id="{98687063-BF16-48AB-8E87-F433FE336281}"/>
+                <a16:creationId xmlns:a16="http://schemas.microsoft.com/office/drawing/2014/main" id="{022CF044-3217-45D7-90D7-2266B5FAF5C9}"/>
               </a:ext>
             </a:extLst>
           </p:cNvPr>
@@ -6472,7 +6664,7 @@
           </a:solidFill>
           <a:ln xmlns:a="http://schemas.openxmlformats.org/drawingml/2006/main" w="19050">
             <a:solidFill>
-              <a:srgbClr val="2D9B72"/>
+              <a:srgbClr val="0B6B4F"/>
             </a:solidFill>
             <a:prstDash val="solid"/>
           </a:ln>
@@ -6512,7 +6704,7 @@
           <p:cNvPr id="9" name="core-no-1">
             <a:extLst xmlns:a="http://schemas.openxmlformats.org/drawingml/2006/main">
               <a:ext uri="{FF2B5EF4-FFF2-40B4-BE49-F238E27FC236}">
-                <a16:creationId xmlns:a16="http://schemas.microsoft.com/office/drawing/2014/main" id="{B3958D8E-5E30-4255-82BB-659CF5877A3F}"/>
+                <a16:creationId xmlns:a16="http://schemas.microsoft.com/office/drawing/2014/main" id="{8025E188-6549-4E4F-AAE1-C21DDF4FFB55}"/>
               </a:ext>
             </a:extLst>
           </p:cNvPr>
@@ -6544,7 +6736,7 @@
             <a:pPr algn="l">
               <a:defRPr sz="2250" b="1">
                 <a:solidFill>
-                  <a:srgbClr val="2D9B72"/>
+                  <a:srgbClr val="0B6B4F"/>
                 </a:solidFill>
                 <a:latin typeface="PingFang SC"/>
                 <a:ea typeface="PingFang SC"/>
@@ -6554,7 +6746,7 @@
             <a:r>
               <a:rPr sz="2250" b="1">
                 <a:solidFill>
-                  <a:srgbClr val="2D9B72"/>
+                  <a:srgbClr val="0B6B4F"/>
                 </a:solidFill>
                 <a:latin typeface="PingFang SC"/>
                 <a:ea typeface="PingFang SC"/>
@@ -6570,7 +6762,7 @@
           <p:cNvPr id="10" name="core-body-1">
             <a:extLst xmlns:a="http://schemas.openxmlformats.org/drawingml/2006/main">
               <a:ext uri="{FF2B5EF4-FFF2-40B4-BE49-F238E27FC236}">
-                <a16:creationId xmlns:a16="http://schemas.microsoft.com/office/drawing/2014/main" id="{0960E7E8-F7DE-4768-889E-2064F26D5C65}"/>
+                <a16:creationId xmlns:a16="http://schemas.microsoft.com/office/drawing/2014/main" id="{51A818FB-2BB4-454D-8E49-3ED7B142E2D1}"/>
               </a:ext>
             </a:extLst>
           </p:cNvPr>
@@ -6634,7 +6826,7 @@
           <p:cNvPr id="11" name="s6-takeaway-rule">
             <a:extLst xmlns:a="http://schemas.openxmlformats.org/drawingml/2006/main">
               <a:ext uri="{FF2B5EF4-FFF2-40B4-BE49-F238E27FC236}">
-                <a16:creationId xmlns:a16="http://schemas.microsoft.com/office/drawing/2014/main" id="{10E3477E-60AD-4054-95BE-50872CC9E388}"/>
+                <a16:creationId xmlns:a16="http://schemas.microsoft.com/office/drawing/2014/main" id="{B23677FE-BD43-4E3F-B0EC-6D9B513D9132}"/>
               </a:ext>
             </a:extLst>
           </p:cNvPr>
@@ -6667,7 +6859,7 @@
           <p:cNvPr id="12" name="s6-takeaway">
             <a:extLst xmlns:a="http://schemas.openxmlformats.org/drawingml/2006/main">
               <a:ext uri="{FF2B5EF4-FFF2-40B4-BE49-F238E27FC236}">
-                <a16:creationId xmlns:a16="http://schemas.microsoft.com/office/drawing/2014/main" id="{15BC0840-C282-4E91-9B20-8E6C7C509577}"/>
+                <a16:creationId xmlns:a16="http://schemas.microsoft.com/office/drawing/2014/main" id="{211336D5-A057-4B62-9CC1-09E212D12684}"/>
               </a:ext>
             </a:extLst>
           </p:cNvPr>
@@ -6723,7 +6915,7 @@
     </p:spTree>
     <p:extLst>
       <p:ext uri="{BB962C8B-B14F-4D97-AF65-F5344CB8AC3E}">
-        <p14:creationId xmlns:p14="http://schemas.microsoft.com/office/powerpoint/2010/main" val="975799868"/>
+        <p14:creationId xmlns:p14="http://schemas.microsoft.com/office/powerpoint/2010/main" val="1683213846"/>
       </p:ext>
     </p:extLst>
   </p:cSld>
@@ -6754,7 +6946,7 @@
           <p:cNvPr id="1" name="s7-rule">
             <a:extLst xmlns:a="http://schemas.openxmlformats.org/drawingml/2006/main">
               <a:ext uri="{FF2B5EF4-FFF2-40B4-BE49-F238E27FC236}">
-                <a16:creationId xmlns:a16="http://schemas.microsoft.com/office/drawing/2014/main" id="{6D295B62-EFF4-4234-93D5-70707E77C4BA}"/>
+                <a16:creationId xmlns:a16="http://schemas.microsoft.com/office/drawing/2014/main" id="{93CF2717-5ECC-4E0C-8481-569E9AF08389}"/>
               </a:ext>
             </a:extLst>
           </p:cNvPr>
@@ -6787,7 +6979,7 @@
           <p:cNvPr id="2" name="s7-eyebrow">
             <a:extLst xmlns:a="http://schemas.openxmlformats.org/drawingml/2006/main">
               <a:ext uri="{FF2B5EF4-FFF2-40B4-BE49-F238E27FC236}">
-                <a16:creationId xmlns:a16="http://schemas.microsoft.com/office/drawing/2014/main" id="{8986F2BC-59D3-4A7A-9A6D-7C04E01A7566}"/>
+                <a16:creationId xmlns:a16="http://schemas.microsoft.com/office/drawing/2014/main" id="{6F2D6541-415A-4CDD-8A52-8C4060E80519}"/>
               </a:ext>
             </a:extLst>
           </p:cNvPr>
@@ -6845,7 +7037,7 @@
           <p:cNvPr id="3" name="s7-title">
             <a:extLst xmlns:a="http://schemas.openxmlformats.org/drawingml/2006/main">
               <a:ext uri="{FF2B5EF4-FFF2-40B4-BE49-F238E27FC236}">
-                <a16:creationId xmlns:a16="http://schemas.microsoft.com/office/drawing/2014/main" id="{E9A69B25-ED5C-4420-948D-7C0A5BBE0656}"/>
+                <a16:creationId xmlns:a16="http://schemas.microsoft.com/office/drawing/2014/main" id="{611E138F-1943-4B05-896F-20E8D575BDB5}"/>
               </a:ext>
             </a:extLst>
           </p:cNvPr>
@@ -6870,7 +7062,7 @@
         </p:spPr>
         <p:txBody>
           <a:bodyPr xmlns:a="http://schemas.openxmlformats.org/drawingml/2006/main" lIns="0" tIns="0" rIns="0" bIns="0" anchor="ctr">
-            <a:normAutofit fontScale="86983"/>
+            <a:normAutofit fontScale="100000"/>
           </a:bodyPr>
           <a:lstStyle xmlns:a="http://schemas.openxmlformats.org/drawingml/2006/main"/>
           <a:p xmlns:a="http://schemas.openxmlformats.org/drawingml/2006/main">
@@ -6893,7 +7085,7 @@
                 <a:ea typeface="PingFang SC"/>
                 <a:cs typeface="PingFang SC"/>
               </a:rPr>
-              <a:t>仿真环境可以先验证传感器挂载、坐标系、话题命名和可视化链路</a:t>
+              <a:t>仿真先验证接口链路，真机再验证物理差异</a:t>
             </a:r>
           </a:p>
         </p:txBody>
@@ -6903,7 +7095,7 @@
           <p:cNvPr id="4" name="s7-footer">
             <a:extLst xmlns:a="http://schemas.openxmlformats.org/drawingml/2006/main">
               <a:ext uri="{FF2B5EF4-FFF2-40B4-BE49-F238E27FC236}">
-                <a16:creationId xmlns:a16="http://schemas.microsoft.com/office/drawing/2014/main" id="{B2525E39-B547-4DEA-AD98-824BFD24E7EC}"/>
+                <a16:creationId xmlns:a16="http://schemas.microsoft.com/office/drawing/2014/main" id="{E5BF872E-83B8-417B-A8CE-DA5DB497C05B}"/>
               </a:ext>
             </a:extLst>
           </p:cNvPr>
@@ -6934,7 +7126,7 @@
           <p:cNvPr id="5" name="s7-identity">
             <a:extLst xmlns:a="http://schemas.openxmlformats.org/drawingml/2006/main">
               <a:ext uri="{FF2B5EF4-FFF2-40B4-BE49-F238E27FC236}">
-                <a16:creationId xmlns:a16="http://schemas.microsoft.com/office/drawing/2014/main" id="{A7E59C85-3DB2-4C98-8313-6EAF34C0D219}"/>
+                <a16:creationId xmlns:a16="http://schemas.microsoft.com/office/drawing/2014/main" id="{030A3F3A-109C-4253-A3C2-2E44D220BF22}"/>
               </a:ext>
             </a:extLst>
           </p:cNvPr>
@@ -6992,7 +7184,7 @@
           <p:cNvPr id="6" name="core-no-0">
             <a:extLst xmlns:a="http://schemas.openxmlformats.org/drawingml/2006/main">
               <a:ext uri="{FF2B5EF4-FFF2-40B4-BE49-F238E27FC236}">
-                <a16:creationId xmlns:a16="http://schemas.microsoft.com/office/drawing/2014/main" id="{45F94C5E-DA1B-4934-8D5E-A9B039BBF7AF}"/>
+                <a16:creationId xmlns:a16="http://schemas.microsoft.com/office/drawing/2014/main" id="{684C5771-14E6-4CC2-981E-6363471AAF48}"/>
               </a:ext>
             </a:extLst>
           </p:cNvPr>
@@ -7024,7 +7216,7 @@
             <a:pPr algn="l">
               <a:defRPr sz="2250" b="1">
                 <a:solidFill>
-                  <a:srgbClr val="2D9B72"/>
+                  <a:srgbClr val="0B6B4F"/>
                 </a:solidFill>
                 <a:latin typeface="PingFang SC"/>
                 <a:ea typeface="PingFang SC"/>
@@ -7034,7 +7226,7 @@
             <a:r>
               <a:rPr sz="2250" b="1">
                 <a:solidFill>
-                  <a:srgbClr val="2D9B72"/>
+                  <a:srgbClr val="0B6B4F"/>
                 </a:solidFill>
                 <a:latin typeface="PingFang SC"/>
                 <a:ea typeface="PingFang SC"/>
@@ -7050,7 +7242,7 @@
           <p:cNvPr id="7" name="core-label-0">
             <a:extLst xmlns:a="http://schemas.openxmlformats.org/drawingml/2006/main">
               <a:ext uri="{FF2B5EF4-FFF2-40B4-BE49-F238E27FC236}">
-                <a16:creationId xmlns:a16="http://schemas.microsoft.com/office/drawing/2014/main" id="{17EEBC71-3331-45E4-883D-16BFB89F2CA3}"/>
+                <a16:creationId xmlns:a16="http://schemas.microsoft.com/office/drawing/2014/main" id="{279C7D19-E0DD-4FA9-BB49-CDDCA4BCFA92}"/>
               </a:ext>
             </a:extLst>
           </p:cNvPr>
@@ -7108,7 +7300,7 @@
           <p:cNvPr id="8" name="core-body-0">
             <a:extLst xmlns:a="http://schemas.openxmlformats.org/drawingml/2006/main">
               <a:ext uri="{FF2B5EF4-FFF2-40B4-BE49-F238E27FC236}">
-                <a16:creationId xmlns:a16="http://schemas.microsoft.com/office/drawing/2014/main" id="{FB0F952A-F3AE-470B-AB90-530B0455F303}"/>
+                <a16:creationId xmlns:a16="http://schemas.microsoft.com/office/drawing/2014/main" id="{38C79694-F10C-45F3-9BB7-1C27DCAF104A}"/>
               </a:ext>
             </a:extLst>
           </p:cNvPr>
@@ -7132,7 +7324,7 @@
           </a:solidFill>
           <a:ln xmlns:a="http://schemas.openxmlformats.org/drawingml/2006/main" w="19050">
             <a:solidFill>
-              <a:srgbClr val="2D9B72"/>
+              <a:srgbClr val="0B6B4F"/>
             </a:solidFill>
             <a:prstDash val="solid"/>
           </a:ln>
@@ -7172,7 +7364,7 @@
           <p:cNvPr id="9" name="core-no-1">
             <a:extLst xmlns:a="http://schemas.openxmlformats.org/drawingml/2006/main">
               <a:ext uri="{FF2B5EF4-FFF2-40B4-BE49-F238E27FC236}">
-                <a16:creationId xmlns:a16="http://schemas.microsoft.com/office/drawing/2014/main" id="{C12B4722-3387-4991-8B37-362504BF0D50}"/>
+                <a16:creationId xmlns:a16="http://schemas.microsoft.com/office/drawing/2014/main" id="{5340DA50-3A30-4F8C-BB5D-8BF5648B04AE}"/>
               </a:ext>
             </a:extLst>
           </p:cNvPr>
@@ -7204,7 +7396,7 @@
             <a:pPr algn="l">
               <a:defRPr sz="2250" b="1">
                 <a:solidFill>
-                  <a:srgbClr val="2D9B72"/>
+                  <a:srgbClr val="0B6B4F"/>
                 </a:solidFill>
                 <a:latin typeface="PingFang SC"/>
                 <a:ea typeface="PingFang SC"/>
@@ -7214,7 +7406,7 @@
             <a:r>
               <a:rPr sz="2250" b="1">
                 <a:solidFill>
-                  <a:srgbClr val="2D9B72"/>
+                  <a:srgbClr val="0B6B4F"/>
                 </a:solidFill>
                 <a:latin typeface="PingFang SC"/>
                 <a:ea typeface="PingFang SC"/>
@@ -7230,7 +7422,7 @@
           <p:cNvPr id="10" name="core-body-1">
             <a:extLst xmlns:a="http://schemas.openxmlformats.org/drawingml/2006/main">
               <a:ext uri="{FF2B5EF4-FFF2-40B4-BE49-F238E27FC236}">
-                <a16:creationId xmlns:a16="http://schemas.microsoft.com/office/drawing/2014/main" id="{E7C37855-63BA-4354-9A22-222BB95ED947}"/>
+                <a16:creationId xmlns:a16="http://schemas.microsoft.com/office/drawing/2014/main" id="{FAC73444-BFE5-4DF8-B9F3-E6EA02348308}"/>
               </a:ext>
             </a:extLst>
           </p:cNvPr>
@@ -7294,7 +7486,7 @@
           <p:cNvPr id="11" name="s7-takeaway-rule">
             <a:extLst xmlns:a="http://schemas.openxmlformats.org/drawingml/2006/main">
               <a:ext uri="{FF2B5EF4-FFF2-40B4-BE49-F238E27FC236}">
-                <a16:creationId xmlns:a16="http://schemas.microsoft.com/office/drawing/2014/main" id="{99788DFA-AB50-4E8A-AE7A-1A2144D02DB3}"/>
+                <a16:creationId xmlns:a16="http://schemas.microsoft.com/office/drawing/2014/main" id="{EBCEACD6-C789-4A10-8FD0-32B2AECD5C7D}"/>
               </a:ext>
             </a:extLst>
           </p:cNvPr>
@@ -7327,7 +7519,7 @@
           <p:cNvPr id="12" name="s7-takeaway">
             <a:extLst xmlns:a="http://schemas.openxmlformats.org/drawingml/2006/main">
               <a:ext uri="{FF2B5EF4-FFF2-40B4-BE49-F238E27FC236}">
-                <a16:creationId xmlns:a16="http://schemas.microsoft.com/office/drawing/2014/main" id="{531BD393-248E-4001-9519-DBEA443EE623}"/>
+                <a16:creationId xmlns:a16="http://schemas.microsoft.com/office/drawing/2014/main" id="{4D02180D-3442-4E86-B509-42A85FF6B0B7}"/>
               </a:ext>
             </a:extLst>
           </p:cNvPr>
@@ -7375,7 +7567,7 @@
                 <a:ea typeface="PingFang SC"/>
                 <a:cs typeface="PingFang SC"/>
               </a:rPr>
-              <a:t>仿真环境可以先验证传感器挂载、坐标系、话题命名和可视化链路</a:t>
+              <a:t>仿真先验证接口链路，真机再验证物理差异</a:t>
             </a:r>
           </a:p>
         </p:txBody>
@@ -7383,7 +7575,7 @@
     </p:spTree>
     <p:extLst>
       <p:ext uri="{BB962C8B-B14F-4D97-AF65-F5344CB8AC3E}">
-        <p14:creationId xmlns:p14="http://schemas.microsoft.com/office/powerpoint/2010/main" val="681160505"/>
+        <p14:creationId xmlns:p14="http://schemas.microsoft.com/office/powerpoint/2010/main" val="1361776541"/>
       </p:ext>
     </p:extLst>
   </p:cSld>
@@ -7414,7 +7606,7 @@
           <p:cNvPr id="1" name="s8-rule">
             <a:extLst xmlns:a="http://schemas.openxmlformats.org/drawingml/2006/main">
               <a:ext uri="{FF2B5EF4-FFF2-40B4-BE49-F238E27FC236}">
-                <a16:creationId xmlns:a16="http://schemas.microsoft.com/office/drawing/2014/main" id="{2B70BFCE-C30C-4216-8C69-F251C42A0DEA}"/>
+                <a16:creationId xmlns:a16="http://schemas.microsoft.com/office/drawing/2014/main" id="{4575C424-5F31-4DE8-ADC7-31181B73F916}"/>
               </a:ext>
             </a:extLst>
           </p:cNvPr>
@@ -7447,7 +7639,7 @@
           <p:cNvPr id="2" name="s8-eyebrow">
             <a:extLst xmlns:a="http://schemas.openxmlformats.org/drawingml/2006/main">
               <a:ext uri="{FF2B5EF4-FFF2-40B4-BE49-F238E27FC236}">
-                <a16:creationId xmlns:a16="http://schemas.microsoft.com/office/drawing/2014/main" id="{B07F008A-2BC1-4204-835F-96392F2DF994}"/>
+                <a16:creationId xmlns:a16="http://schemas.microsoft.com/office/drawing/2014/main" id="{A693496B-106F-455E-BEFF-28D518310D40}"/>
               </a:ext>
             </a:extLst>
           </p:cNvPr>
@@ -7505,7 +7697,7 @@
           <p:cNvPr id="3" name="s8-title">
             <a:extLst xmlns:a="http://schemas.openxmlformats.org/drawingml/2006/main">
               <a:ext uri="{FF2B5EF4-FFF2-40B4-BE49-F238E27FC236}">
-                <a16:creationId xmlns:a16="http://schemas.microsoft.com/office/drawing/2014/main" id="{E74E0127-280D-4BA8-93D2-366FB1D340D7}"/>
+                <a16:creationId xmlns:a16="http://schemas.microsoft.com/office/drawing/2014/main" id="{1C69B514-0C62-4CDB-9AFD-AFDD63171581}"/>
               </a:ext>
             </a:extLst>
           </p:cNvPr>
@@ -7563,7 +7755,7 @@
           <p:cNvPr id="4" name="s8-footer">
             <a:extLst xmlns:a="http://schemas.openxmlformats.org/drawingml/2006/main">
               <a:ext uri="{FF2B5EF4-FFF2-40B4-BE49-F238E27FC236}">
-                <a16:creationId xmlns:a16="http://schemas.microsoft.com/office/drawing/2014/main" id="{2E2482BE-90CA-4ECF-8000-162907119B0B}"/>
+                <a16:creationId xmlns:a16="http://schemas.microsoft.com/office/drawing/2014/main" id="{4E559A45-D89C-4405-89D5-1DE25BB4F847}"/>
               </a:ext>
             </a:extLst>
           </p:cNvPr>
@@ -7594,7 +7786,7 @@
           <p:cNvPr id="5" name="s8-identity">
             <a:extLst xmlns:a="http://schemas.openxmlformats.org/drawingml/2006/main">
               <a:ext uri="{FF2B5EF4-FFF2-40B4-BE49-F238E27FC236}">
-                <a16:creationId xmlns:a16="http://schemas.microsoft.com/office/drawing/2014/main" id="{CE358358-7B79-4332-9C2F-483590676E10}"/>
+                <a16:creationId xmlns:a16="http://schemas.microsoft.com/office/drawing/2014/main" id="{46A1448B-55C5-4EBC-8820-4D1B13392899}"/>
               </a:ext>
             </a:extLst>
           </p:cNvPr>
@@ -7652,7 +7844,7 @@
           <p:cNvPr id="6" name="case-title">
             <a:extLst xmlns:a="http://schemas.openxmlformats.org/drawingml/2006/main">
               <a:ext uri="{FF2B5EF4-FFF2-40B4-BE49-F238E27FC236}">
-                <a16:creationId xmlns:a16="http://schemas.microsoft.com/office/drawing/2014/main" id="{981A86ED-CE69-4444-AC23-D8A8A1BF5736}"/>
+                <a16:creationId xmlns:a16="http://schemas.microsoft.com/office/drawing/2014/main" id="{0C285EE9-16E1-4260-AEEE-8A14046D63F7}"/>
               </a:ext>
             </a:extLst>
           </p:cNvPr>
@@ -7716,7 +7908,7 @@
           <p:cNvPr id="7" name="case-row-0">
             <a:extLst xmlns:a="http://schemas.openxmlformats.org/drawingml/2006/main">
               <a:ext uri="{FF2B5EF4-FFF2-40B4-BE49-F238E27FC236}">
-                <a16:creationId xmlns:a16="http://schemas.microsoft.com/office/drawing/2014/main" id="{1BED4764-3C94-411F-8B1B-B264B3332067}"/>
+                <a16:creationId xmlns:a16="http://schemas.microsoft.com/office/drawing/2014/main" id="{DF4A2717-2416-4B58-97AC-C063FC96050B}"/>
               </a:ext>
             </a:extLst>
           </p:cNvPr>
@@ -7780,7 +7972,7 @@
           <p:cNvPr id="8" name="case-row-1">
             <a:extLst xmlns:a="http://schemas.openxmlformats.org/drawingml/2006/main">
               <a:ext uri="{FF2B5EF4-FFF2-40B4-BE49-F238E27FC236}">
-                <a16:creationId xmlns:a16="http://schemas.microsoft.com/office/drawing/2014/main" id="{1D9CDA4B-F5F8-4EC9-966C-0B9DC9663256}"/>
+                <a16:creationId xmlns:a16="http://schemas.microsoft.com/office/drawing/2014/main" id="{05B9D5C9-1B0F-4394-8A38-14D7D3B73AA2}"/>
               </a:ext>
             </a:extLst>
           </p:cNvPr>
@@ -7844,7 +8036,7 @@
           <p:cNvPr id="9" name="case-row-2">
             <a:extLst xmlns:a="http://schemas.openxmlformats.org/drawingml/2006/main">
               <a:ext uri="{FF2B5EF4-FFF2-40B4-BE49-F238E27FC236}">
-                <a16:creationId xmlns:a16="http://schemas.microsoft.com/office/drawing/2014/main" id="{59A5714F-DBB0-43F1-AE3E-F9CA2E3B483F}"/>
+                <a16:creationId xmlns:a16="http://schemas.microsoft.com/office/drawing/2014/main" id="{C854A3CC-030C-4390-A222-1904D0B387B6}"/>
               </a:ext>
             </a:extLst>
           </p:cNvPr>
@@ -7908,7 +8100,7 @@
           <p:cNvPr id="10" name="case-row-3">
             <a:extLst xmlns:a="http://schemas.openxmlformats.org/drawingml/2006/main">
               <a:ext uri="{FF2B5EF4-FFF2-40B4-BE49-F238E27FC236}">
-                <a16:creationId xmlns:a16="http://schemas.microsoft.com/office/drawing/2014/main" id="{F0E091E6-2115-47C5-8928-6D941A8105E2}"/>
+                <a16:creationId xmlns:a16="http://schemas.microsoft.com/office/drawing/2014/main" id="{9BAB1027-1853-43E1-8A1E-9A549280C7C0}"/>
               </a:ext>
             </a:extLst>
           </p:cNvPr>
@@ -7972,7 +8164,7 @@
           <p:cNvPr id="11" name="case-row-4">
             <a:extLst xmlns:a="http://schemas.openxmlformats.org/drawingml/2006/main">
               <a:ext uri="{FF2B5EF4-FFF2-40B4-BE49-F238E27FC236}">
-                <a16:creationId xmlns:a16="http://schemas.microsoft.com/office/drawing/2014/main" id="{7768846D-AF59-4C24-80D0-2637EE5DE59D}"/>
+                <a16:creationId xmlns:a16="http://schemas.microsoft.com/office/drawing/2014/main" id="{289D0799-F579-4A16-AB93-D65B9D9BFAEE}"/>
               </a:ext>
             </a:extLst>
           </p:cNvPr>
@@ -7996,7 +8188,7 @@
           </a:solidFill>
           <a:ln xmlns:a="http://schemas.openxmlformats.org/drawingml/2006/main" w="9525">
             <a:solidFill>
-              <a:srgbClr val="2D9B72"/>
+              <a:srgbClr val="0B6B4F"/>
             </a:solidFill>
             <a:prstDash val="solid"/>
           </a:ln>
@@ -8036,7 +8228,7 @@
           <p:cNvPr id="12" name="s8-takeaway-rule">
             <a:extLst xmlns:a="http://schemas.openxmlformats.org/drawingml/2006/main">
               <a:ext uri="{FF2B5EF4-FFF2-40B4-BE49-F238E27FC236}">
-                <a16:creationId xmlns:a16="http://schemas.microsoft.com/office/drawing/2014/main" id="{197AE50B-C2ED-4330-BDE1-AE40368EE0B2}"/>
+                <a16:creationId xmlns:a16="http://schemas.microsoft.com/office/drawing/2014/main" id="{F2E07655-8098-4F80-888A-D63DFBD52D5B}"/>
               </a:ext>
             </a:extLst>
           </p:cNvPr>
@@ -8069,7 +8261,7 @@
           <p:cNvPr id="13" name="s8-takeaway">
             <a:extLst xmlns:a="http://schemas.openxmlformats.org/drawingml/2006/main">
               <a:ext uri="{FF2B5EF4-FFF2-40B4-BE49-F238E27FC236}">
-                <a16:creationId xmlns:a16="http://schemas.microsoft.com/office/drawing/2014/main" id="{BA3CE1F4-7F05-44D4-80CE-F561413B4F20}"/>
+                <a16:creationId xmlns:a16="http://schemas.microsoft.com/office/drawing/2014/main" id="{95AD7050-AB6E-4495-A66E-9AA44A8FB9F9}"/>
               </a:ext>
             </a:extLst>
           </p:cNvPr>
@@ -8125,7 +8317,7 @@
     </p:spTree>
     <p:extLst>
       <p:ext uri="{BB962C8B-B14F-4D97-AF65-F5344CB8AC3E}">
-        <p14:creationId xmlns:p14="http://schemas.microsoft.com/office/powerpoint/2010/main" val="540797083"/>
+        <p14:creationId xmlns:p14="http://schemas.microsoft.com/office/powerpoint/2010/main" val="1983731954"/>
       </p:ext>
     </p:extLst>
   </p:cSld>
@@ -8156,7 +8348,7 @@
           <p:cNvPr id="1" name="s9-rule">
             <a:extLst xmlns:a="http://schemas.openxmlformats.org/drawingml/2006/main">
               <a:ext uri="{FF2B5EF4-FFF2-40B4-BE49-F238E27FC236}">
-                <a16:creationId xmlns:a16="http://schemas.microsoft.com/office/drawing/2014/main" id="{A5878E95-7D02-4C6E-AE3F-0771668EB95E}"/>
+                <a16:creationId xmlns:a16="http://schemas.microsoft.com/office/drawing/2014/main" id="{09ED3ADF-319D-46A2-AD3C-C95305AD074B}"/>
               </a:ext>
             </a:extLst>
           </p:cNvPr>
@@ -8189,7 +8381,7 @@
           <p:cNvPr id="2" name="s9-eyebrow">
             <a:extLst xmlns:a="http://schemas.openxmlformats.org/drawingml/2006/main">
               <a:ext uri="{FF2B5EF4-FFF2-40B4-BE49-F238E27FC236}">
-                <a16:creationId xmlns:a16="http://schemas.microsoft.com/office/drawing/2014/main" id="{FFE95A3A-946D-4CB6-8E4C-2E399FAE79D9}"/>
+                <a16:creationId xmlns:a16="http://schemas.microsoft.com/office/drawing/2014/main" id="{C7EAB9BB-706F-49C3-99BB-E5A4A75C2BED}"/>
               </a:ext>
             </a:extLst>
           </p:cNvPr>
@@ -8247,7 +8439,7 @@
           <p:cNvPr id="3" name="s9-title">
             <a:extLst xmlns:a="http://schemas.openxmlformats.org/drawingml/2006/main">
               <a:ext uri="{FF2B5EF4-FFF2-40B4-BE49-F238E27FC236}">
-                <a16:creationId xmlns:a16="http://schemas.microsoft.com/office/drawing/2014/main" id="{C6824545-6708-4895-882D-59F5929F220B}"/>
+                <a16:creationId xmlns:a16="http://schemas.microsoft.com/office/drawing/2014/main" id="{503370A4-94E5-487C-8CDD-656B130E1EA4}"/>
               </a:ext>
             </a:extLst>
           </p:cNvPr>
@@ -8295,7 +8487,7 @@
                 <a:ea typeface="PingFang SC"/>
                 <a:cs typeface="PingFang SC"/>
               </a:rPr>
-              <a:t>把方法落实为可验证的行动</a:t>
+              <a:t>多模态感知：一次可验收练习</a:t>
             </a:r>
           </a:p>
         </p:txBody>
@@ -8305,7 +8497,7 @@
           <p:cNvPr id="4" name="s9-footer">
             <a:extLst xmlns:a="http://schemas.openxmlformats.org/drawingml/2006/main">
               <a:ext uri="{FF2B5EF4-FFF2-40B4-BE49-F238E27FC236}">
-                <a16:creationId xmlns:a16="http://schemas.microsoft.com/office/drawing/2014/main" id="{79581FB4-5732-498A-8BDD-5F9E5631ECA3}"/>
+                <a16:creationId xmlns:a16="http://schemas.microsoft.com/office/drawing/2014/main" id="{EED57A60-C0EE-4B8D-A540-A07063BB24A9}"/>
               </a:ext>
             </a:extLst>
           </p:cNvPr>
@@ -8336,7 +8528,7 @@
           <p:cNvPr id="5" name="s9-identity">
             <a:extLst xmlns:a="http://schemas.openxmlformats.org/drawingml/2006/main">
               <a:ext uri="{FF2B5EF4-FFF2-40B4-BE49-F238E27FC236}">
-                <a16:creationId xmlns:a16="http://schemas.microsoft.com/office/drawing/2014/main" id="{AC7D866F-D3DC-4EF6-98C8-A48BD8478ACF}"/>
+                <a16:creationId xmlns:a16="http://schemas.microsoft.com/office/drawing/2014/main" id="{D9132D1D-15AF-4C2F-9DE6-833AB7DEBCAF}"/>
               </a:ext>
             </a:extLst>
           </p:cNvPr>
@@ -8394,7 +8586,7 @@
           <p:cNvPr id="6" name="practice-circle-0">
             <a:extLst xmlns:a="http://schemas.openxmlformats.org/drawingml/2006/main">
               <a:ext uri="{FF2B5EF4-FFF2-40B4-BE49-F238E27FC236}">
-                <a16:creationId xmlns:a16="http://schemas.microsoft.com/office/drawing/2014/main" id="{8A3FACC3-7B77-48CF-A8D8-B6079FA5215D}"/>
+                <a16:creationId xmlns:a16="http://schemas.microsoft.com/office/drawing/2014/main" id="{863752BC-D313-4DF9-8282-AFF39CB3E097}"/>
               </a:ext>
             </a:extLst>
           </p:cNvPr>
@@ -8427,7 +8619,7 @@
           <p:cNvPr id="7" name="practice-number-0">
             <a:extLst xmlns:a="http://schemas.openxmlformats.org/drawingml/2006/main">
               <a:ext uri="{FF2B5EF4-FFF2-40B4-BE49-F238E27FC236}">
-                <a16:creationId xmlns:a16="http://schemas.microsoft.com/office/drawing/2014/main" id="{A377C65B-C7ED-44F3-A569-FEFC76131BB0}"/>
+                <a16:creationId xmlns:a16="http://schemas.microsoft.com/office/drawing/2014/main" id="{5DD256D2-BD26-4A08-BE52-3F00F8D60DCB}"/>
               </a:ext>
             </a:extLst>
           </p:cNvPr>
@@ -8485,7 +8677,7 @@
           <p:cNvPr id="8" name="practice-item-0">
             <a:extLst xmlns:a="http://schemas.openxmlformats.org/drawingml/2006/main">
               <a:ext uri="{FF2B5EF4-FFF2-40B4-BE49-F238E27FC236}">
-                <a16:creationId xmlns:a16="http://schemas.microsoft.com/office/drawing/2014/main" id="{4D5BA613-5465-45C8-8407-4585E323526E}"/>
+                <a16:creationId xmlns:a16="http://schemas.microsoft.com/office/drawing/2014/main" id="{C8112793-C0F4-46D7-8C4A-5846555DE842}"/>
               </a:ext>
             </a:extLst>
           </p:cNvPr>
@@ -8549,7 +8741,7 @@
           <p:cNvPr id="9" name="practice-connector-0">
             <a:extLst xmlns:a="http://schemas.openxmlformats.org/drawingml/2006/main">
               <a:ext uri="{FF2B5EF4-FFF2-40B4-BE49-F238E27FC236}">
-                <a16:creationId xmlns:a16="http://schemas.microsoft.com/office/drawing/2014/main" id="{B4CC1A3E-E938-4404-8068-DCEDD8481A9A}"/>
+                <a16:creationId xmlns:a16="http://schemas.microsoft.com/office/drawing/2014/main" id="{5134E50C-BDE3-4347-AA68-E54BD6EE3F6A}"/>
               </a:ext>
             </a:extLst>
           </p:cNvPr>
@@ -8569,7 +8761,7 @@
           <a:noFill xmlns:a="http://schemas.openxmlformats.org/drawingml/2006/main"/>
           <a:ln xmlns:a="http://schemas.openxmlformats.org/drawingml/2006/main" w="28575">
             <a:solidFill>
-              <a:srgbClr val="2D9B72"/>
+              <a:srgbClr val="0B6B4F"/>
             </a:solidFill>
             <a:prstDash val="solid"/>
           </a:ln>
@@ -8580,7 +8772,7 @@
           <p:cNvPr id="10" name="practice-circle-1">
             <a:extLst xmlns:a="http://schemas.openxmlformats.org/drawingml/2006/main">
               <a:ext uri="{FF2B5EF4-FFF2-40B4-BE49-F238E27FC236}">
-                <a16:creationId xmlns:a16="http://schemas.microsoft.com/office/drawing/2014/main" id="{EAACC3B0-BB8A-49F8-89BC-EC228E97051F}"/>
+                <a16:creationId xmlns:a16="http://schemas.microsoft.com/office/drawing/2014/main" id="{61AEDCCC-BFE2-4B09-B452-73C21CA420F9}"/>
               </a:ext>
             </a:extLst>
           </p:cNvPr>
@@ -8613,7 +8805,7 @@
           <p:cNvPr id="11" name="practice-number-1">
             <a:extLst xmlns:a="http://schemas.openxmlformats.org/drawingml/2006/main">
               <a:ext uri="{FF2B5EF4-FFF2-40B4-BE49-F238E27FC236}">
-                <a16:creationId xmlns:a16="http://schemas.microsoft.com/office/drawing/2014/main" id="{DADC0864-1D3C-4416-BC5A-B073C2D59300}"/>
+                <a16:creationId xmlns:a16="http://schemas.microsoft.com/office/drawing/2014/main" id="{AE7B1EC6-096D-4DCF-9E00-0408230BEDAA}"/>
               </a:ext>
             </a:extLst>
           </p:cNvPr>
@@ -8671,7 +8863,7 @@
           <p:cNvPr id="12" name="practice-item-1">
             <a:extLst xmlns:a="http://schemas.openxmlformats.org/drawingml/2006/main">
               <a:ext uri="{FF2B5EF4-FFF2-40B4-BE49-F238E27FC236}">
-                <a16:creationId xmlns:a16="http://schemas.microsoft.com/office/drawing/2014/main" id="{95F7B80F-9415-443C-8A64-37E17A491DB8}"/>
+                <a16:creationId xmlns:a16="http://schemas.microsoft.com/office/drawing/2014/main" id="{B5A107D3-C65C-450B-89E2-8FE5C3E878D1}"/>
               </a:ext>
             </a:extLst>
           </p:cNvPr>
@@ -8735,7 +8927,7 @@
           <p:cNvPr id="13" name="practice-connector-1">
             <a:extLst xmlns:a="http://schemas.openxmlformats.org/drawingml/2006/main">
               <a:ext uri="{FF2B5EF4-FFF2-40B4-BE49-F238E27FC236}">
-                <a16:creationId xmlns:a16="http://schemas.microsoft.com/office/drawing/2014/main" id="{C55CFB49-2725-4791-ABB5-BA87146A32F7}"/>
+                <a16:creationId xmlns:a16="http://schemas.microsoft.com/office/drawing/2014/main" id="{0591181D-67CB-4BF7-82CC-EEC9AB8CA01F}"/>
               </a:ext>
             </a:extLst>
           </p:cNvPr>
@@ -8755,7 +8947,7 @@
           <a:noFill xmlns:a="http://schemas.openxmlformats.org/drawingml/2006/main"/>
           <a:ln xmlns:a="http://schemas.openxmlformats.org/drawingml/2006/main" w="28575">
             <a:solidFill>
-              <a:srgbClr val="2D9B72"/>
+              <a:srgbClr val="0B6B4F"/>
             </a:solidFill>
             <a:prstDash val="solid"/>
           </a:ln>
@@ -8766,7 +8958,7 @@
           <p:cNvPr id="14" name="practice-circle-2">
             <a:extLst xmlns:a="http://schemas.openxmlformats.org/drawingml/2006/main">
               <a:ext uri="{FF2B5EF4-FFF2-40B4-BE49-F238E27FC236}">
-                <a16:creationId xmlns:a16="http://schemas.microsoft.com/office/drawing/2014/main" id="{AD9C99D8-53AA-4B8A-8487-B14024BAD299}"/>
+                <a16:creationId xmlns:a16="http://schemas.microsoft.com/office/drawing/2014/main" id="{A5D27D76-DFB3-4FC7-B6AB-F4E58B85EFC9}"/>
               </a:ext>
             </a:extLst>
           </p:cNvPr>
@@ -8784,7 +8976,7 @@
             <a:avLst/>
           </a:prstGeom>
           <a:solidFill xmlns:a="http://schemas.openxmlformats.org/drawingml/2006/main">
-            <a:srgbClr val="2D9B72"/>
+            <a:srgbClr val="0B6B4F"/>
           </a:solidFill>
           <a:ln xmlns:a="http://schemas.openxmlformats.org/drawingml/2006/main" w="28575">
             <a:solidFill>
@@ -8799,7 +8991,7 @@
           <p:cNvPr id="15" name="practice-number-2">
             <a:extLst xmlns:a="http://schemas.openxmlformats.org/drawingml/2006/main">
               <a:ext uri="{FF2B5EF4-FFF2-40B4-BE49-F238E27FC236}">
-                <a16:creationId xmlns:a16="http://schemas.microsoft.com/office/drawing/2014/main" id="{A302E098-C570-4405-8969-D5E04D8137E6}"/>
+                <a16:creationId xmlns:a16="http://schemas.microsoft.com/office/drawing/2014/main" id="{13365813-F7D6-45CE-B806-E7B2AE574984}"/>
               </a:ext>
             </a:extLst>
           </p:cNvPr>
@@ -8857,7 +9049,7 @@
           <p:cNvPr id="16" name="practice-item-2">
             <a:extLst xmlns:a="http://schemas.openxmlformats.org/drawingml/2006/main">
               <a:ext uri="{FF2B5EF4-FFF2-40B4-BE49-F238E27FC236}">
-                <a16:creationId xmlns:a16="http://schemas.microsoft.com/office/drawing/2014/main" id="{621BE4EA-5A98-4518-8263-62C1806D5B52}"/>
+                <a16:creationId xmlns:a16="http://schemas.microsoft.com/office/drawing/2014/main" id="{098CB56C-9ADE-4A4E-819A-2339E4FD0A04}"/>
               </a:ext>
             </a:extLst>
           </p:cNvPr>
@@ -8881,7 +9073,7 @@
           </a:solidFill>
           <a:ln xmlns:a="http://schemas.openxmlformats.org/drawingml/2006/main" w="19050">
             <a:solidFill>
-              <a:srgbClr val="2D9B72"/>
+              <a:srgbClr val="0B6B4F"/>
             </a:solidFill>
             <a:prstDash val="solid"/>
           </a:ln>
@@ -8919,7 +9111,7 @@
     </p:spTree>
     <p:extLst>
       <p:ext uri="{BB962C8B-B14F-4D97-AF65-F5344CB8AC3E}">
-        <p14:creationId xmlns:p14="http://schemas.microsoft.com/office/powerpoint/2010/main" val="1680635816"/>
+        <p14:creationId xmlns:p14="http://schemas.microsoft.com/office/powerpoint/2010/main" val="1968956447"/>
       </p:ext>
     </p:extLst>
   </p:cSld>

--- a/docs/public/course-assets/course-pptx/em-003.pptx
+++ b/docs/public/course-assets/course-pptx/em-003.pptx
@@ -2,23 +2,23 @@
 <file path=ppt/presentation.xml><?xml version="1.0" encoding="utf-8"?>
 <p:presentation xmlns:p="http://schemas.openxmlformats.org/presentationml/2006/main">
   <p:sldMasterIdLst>
-    <p:sldMasterId xmlns:r="http://schemas.openxmlformats.org/officeDocument/2006/relationships" id="2147483648" r:id="R2d7e61cbc644443f"/>
+    <p:sldMasterId xmlns:r="http://schemas.openxmlformats.org/officeDocument/2006/relationships" id="2147483648" r:id="Raff68dedb6314df6"/>
   </p:sldMasterIdLst>
   <p:notesMasterIdLst>
-    <p:notesMasterId xmlns:r="http://schemas.openxmlformats.org/officeDocument/2006/relationships" r:id="R2a0571a31991468b"/>
+    <p:notesMasterId xmlns:r="http://schemas.openxmlformats.org/officeDocument/2006/relationships" r:id="Rd7c6f65248b14c2d"/>
   </p:notesMasterIdLst>
   <p:sldIdLst>
-    <p:sldId xmlns:r="http://schemas.openxmlformats.org/officeDocument/2006/relationships" id="256" r:id="Rfea824a5afbf4701"/>
-    <p:sldId xmlns:r="http://schemas.openxmlformats.org/officeDocument/2006/relationships" id="257" r:id="Ra9841ef635494e96"/>
-    <p:sldId xmlns:r="http://schemas.openxmlformats.org/officeDocument/2006/relationships" id="258" r:id="R97e6482ea3db4b0c"/>
-    <p:sldId xmlns:r="http://schemas.openxmlformats.org/officeDocument/2006/relationships" id="259" r:id="Rdf2e501f04674b59"/>
-    <p:sldId xmlns:r="http://schemas.openxmlformats.org/officeDocument/2006/relationships" id="260" r:id="Rbb282b57c31c4ddb"/>
-    <p:sldId xmlns:r="http://schemas.openxmlformats.org/officeDocument/2006/relationships" id="261" r:id="R99570578a003466d"/>
-    <p:sldId xmlns:r="http://schemas.openxmlformats.org/officeDocument/2006/relationships" id="262" r:id="R5feec7b2e64c4559"/>
-    <p:sldId xmlns:r="http://schemas.openxmlformats.org/officeDocument/2006/relationships" id="263" r:id="R18446510c05540bd"/>
-    <p:sldId xmlns:r="http://schemas.openxmlformats.org/officeDocument/2006/relationships" id="264" r:id="R174940c3c95f4bab"/>
-    <p:sldId xmlns:r="http://schemas.openxmlformats.org/officeDocument/2006/relationships" id="265" r:id="Rf143655fcd1e4813"/>
-    <p:sldId xmlns:r="http://schemas.openxmlformats.org/officeDocument/2006/relationships" id="266" r:id="Rfa4596fcb85e483e"/>
+    <p:sldId xmlns:r="http://schemas.openxmlformats.org/officeDocument/2006/relationships" id="256" r:id="Ra3efe9b3bceb4630"/>
+    <p:sldId xmlns:r="http://schemas.openxmlformats.org/officeDocument/2006/relationships" id="257" r:id="Rc9960636e41b4de5"/>
+    <p:sldId xmlns:r="http://schemas.openxmlformats.org/officeDocument/2006/relationships" id="258" r:id="Rededd0d4baf24e47"/>
+    <p:sldId xmlns:r="http://schemas.openxmlformats.org/officeDocument/2006/relationships" id="259" r:id="Rfaccec73569f4b51"/>
+    <p:sldId xmlns:r="http://schemas.openxmlformats.org/officeDocument/2006/relationships" id="260" r:id="R17a4c402bcfc4b2f"/>
+    <p:sldId xmlns:r="http://schemas.openxmlformats.org/officeDocument/2006/relationships" id="261" r:id="R7757a02767b34795"/>
+    <p:sldId xmlns:r="http://schemas.openxmlformats.org/officeDocument/2006/relationships" id="262" r:id="Rc377eafa2658418a"/>
+    <p:sldId xmlns:r="http://schemas.openxmlformats.org/officeDocument/2006/relationships" id="263" r:id="Re7b62e88815348aa"/>
+    <p:sldId xmlns:r="http://schemas.openxmlformats.org/officeDocument/2006/relationships" id="264" r:id="R2ab8ecd5020e4c99"/>
+    <p:sldId xmlns:r="http://schemas.openxmlformats.org/officeDocument/2006/relationships" id="265" r:id="R4a90011c9d954ffa"/>
+    <p:sldId xmlns:r="http://schemas.openxmlformats.org/officeDocument/2006/relationships" id="266" r:id="R7a1abe912fe14048"/>
   </p:sldIdLst>
   <p:sldSz cx="12192000" cy="6858000"/>
   <p:notesSz cx="6858000" cy="9144000"/>
@@ -1271,7 +1271,7 @@
   </p:cSld>
   <p:clrMap bg1="lt1" tx1="dk1" bg2="lt2" tx2="dk2" accent1="accent1" accent2="accent2" accent3="accent3" accent4="accent4" accent5="accent5" accent6="accent6" hlink="hlink" folHlink="folHlink"/>
   <p:sldLayoutIdLst>
-    <p:sldLayoutId xmlns:r="http://schemas.openxmlformats.org/officeDocument/2006/relationships" id="2147483649" r:id="R20576943557e4123"/>
+    <p:sldLayoutId xmlns:r="http://schemas.openxmlformats.org/officeDocument/2006/relationships" id="2147483649" r:id="R5ff033ed175f4186"/>
   </p:sldLayoutIdLst>
   <p:txStyles>
     <p:titleStyle>
@@ -1822,7 +1822,7 @@
           <p:cNvPr id="1" name="cover-rule">
             <a:extLst xmlns:a="http://schemas.openxmlformats.org/drawingml/2006/main">
               <a:ext uri="{FF2B5EF4-FFF2-40B4-BE49-F238E27FC236}">
-                <a16:creationId xmlns:a16="http://schemas.microsoft.com/office/drawing/2014/main" id="{1D539EED-70E1-4540-867C-01552943542B}"/>
+                <a16:creationId xmlns:a16="http://schemas.microsoft.com/office/drawing/2014/main" id="{526F9FFD-3FA1-4B95-9B38-C3B457720677}"/>
               </a:ext>
             </a:extLst>
           </p:cNvPr>
@@ -1855,7 +1855,7 @@
           <p:cNvPr id="2" name="cover-ring-1">
             <a:extLst xmlns:a="http://schemas.openxmlformats.org/drawingml/2006/main">
               <a:ext uri="{FF2B5EF4-FFF2-40B4-BE49-F238E27FC236}">
-                <a16:creationId xmlns:a16="http://schemas.microsoft.com/office/drawing/2014/main" id="{A60B4DF4-1B0B-48AD-A8C8-F0A8EDEFC87A}"/>
+                <a16:creationId xmlns:a16="http://schemas.microsoft.com/office/drawing/2014/main" id="{30CDAC5D-622E-4D1D-8049-147920736844}"/>
               </a:ext>
             </a:extLst>
           </p:cNvPr>
@@ -1886,7 +1886,7 @@
           <p:cNvPr id="3" name="cover-ring-2">
             <a:extLst xmlns:a="http://schemas.openxmlformats.org/drawingml/2006/main">
               <a:ext uri="{FF2B5EF4-FFF2-40B4-BE49-F238E27FC236}">
-                <a16:creationId xmlns:a16="http://schemas.microsoft.com/office/drawing/2014/main" id="{F3C21325-2D73-43DF-BF6C-7F1D6C64C82A}"/>
+                <a16:creationId xmlns:a16="http://schemas.microsoft.com/office/drawing/2014/main" id="{EA7AFDA3-6A9F-40B9-A916-EB27637DE979}"/>
               </a:ext>
             </a:extLst>
           </p:cNvPr>
@@ -1917,7 +1917,7 @@
           <p:cNvPr id="4" name="cover-core">
             <a:extLst xmlns:a="http://schemas.openxmlformats.org/drawingml/2006/main">
               <a:ext uri="{FF2B5EF4-FFF2-40B4-BE49-F238E27FC236}">
-                <a16:creationId xmlns:a16="http://schemas.microsoft.com/office/drawing/2014/main" id="{2C975E3E-CFEE-4765-9191-B38257A60061}"/>
+                <a16:creationId xmlns:a16="http://schemas.microsoft.com/office/drawing/2014/main" id="{D9AC73C1-CC48-46F2-A284-E56BC9743094}"/>
               </a:ext>
             </a:extLst>
           </p:cNvPr>
@@ -1950,7 +1950,7 @@
           <p:cNvPr id="5" name="cover-line-1">
             <a:extLst xmlns:a="http://schemas.openxmlformats.org/drawingml/2006/main">
               <a:ext uri="{FF2B5EF4-FFF2-40B4-BE49-F238E27FC236}">
-                <a16:creationId xmlns:a16="http://schemas.microsoft.com/office/drawing/2014/main" id="{6385C555-5D4D-45DE-926F-759F5843B8BA}"/>
+                <a16:creationId xmlns:a16="http://schemas.microsoft.com/office/drawing/2014/main" id="{880A467C-F029-4AE3-A00F-F79649FF5082}"/>
               </a:ext>
             </a:extLst>
           </p:cNvPr>
@@ -1981,7 +1981,7 @@
           <p:cNvPr id="6" name="cover-line-2">
             <a:extLst xmlns:a="http://schemas.openxmlformats.org/drawingml/2006/main">
               <a:ext uri="{FF2B5EF4-FFF2-40B4-BE49-F238E27FC236}">
-                <a16:creationId xmlns:a16="http://schemas.microsoft.com/office/drawing/2014/main" id="{01E42A76-17F0-4200-8241-C52BD0A8CB5E}"/>
+                <a16:creationId xmlns:a16="http://schemas.microsoft.com/office/drawing/2014/main" id="{17ACFC39-FB5D-4513-ADE6-D1E2F7D181C8}"/>
               </a:ext>
             </a:extLst>
           </p:cNvPr>
@@ -2012,7 +2012,7 @@
           <p:cNvPr id="7" name="cover-eyebrow">
             <a:extLst xmlns:a="http://schemas.openxmlformats.org/drawingml/2006/main">
               <a:ext uri="{FF2B5EF4-FFF2-40B4-BE49-F238E27FC236}">
-                <a16:creationId xmlns:a16="http://schemas.microsoft.com/office/drawing/2014/main" id="{13531B7C-C83E-43BD-B853-BF41643BCCF7}"/>
+                <a16:creationId xmlns:a16="http://schemas.microsoft.com/office/drawing/2014/main" id="{7118A723-F9EA-49F8-BF5D-31BAD58BD52C}"/>
               </a:ext>
             </a:extLst>
           </p:cNvPr>
@@ -2070,7 +2070,7 @@
           <p:cNvPr id="8" name="cover-title">
             <a:extLst xmlns:a="http://schemas.openxmlformats.org/drawingml/2006/main">
               <a:ext uri="{FF2B5EF4-FFF2-40B4-BE49-F238E27FC236}">
-                <a16:creationId xmlns:a16="http://schemas.microsoft.com/office/drawing/2014/main" id="{D3A80B7D-7E3D-4F45-8C20-AAD1B5F5693F}"/>
+                <a16:creationId xmlns:a16="http://schemas.microsoft.com/office/drawing/2014/main" id="{6ABF9B06-4502-4036-91E0-CAEE3273E8B4}"/>
               </a:ext>
             </a:extLst>
           </p:cNvPr>
@@ -2128,7 +2128,7 @@
           <p:cNvPr id="9" name="cover-subtitle">
             <a:extLst xmlns:a="http://schemas.openxmlformats.org/drawingml/2006/main">
               <a:ext uri="{FF2B5EF4-FFF2-40B4-BE49-F238E27FC236}">
-                <a16:creationId xmlns:a16="http://schemas.microsoft.com/office/drawing/2014/main" id="{9C21CA9B-A439-4458-9B47-5BBB2CF6FB05}"/>
+                <a16:creationId xmlns:a16="http://schemas.microsoft.com/office/drawing/2014/main" id="{7F97193B-FE48-43F3-A2B5-FC2AD969D401}"/>
               </a:ext>
             </a:extLst>
           </p:cNvPr>
@@ -2190,7 +2190,7 @@
           <p:cNvPr id="10" name="cover-lead">
             <a:extLst xmlns:a="http://schemas.openxmlformats.org/drawingml/2006/main">
               <a:ext uri="{FF2B5EF4-FFF2-40B4-BE49-F238E27FC236}">
-                <a16:creationId xmlns:a16="http://schemas.microsoft.com/office/drawing/2014/main" id="{765F4E61-5CA4-422F-AA3F-4211B20267FA}"/>
+                <a16:creationId xmlns:a16="http://schemas.microsoft.com/office/drawing/2014/main" id="{968E685C-A89E-4724-9192-283E784771FB}"/>
               </a:ext>
             </a:extLst>
           </p:cNvPr>
@@ -2248,7 +2248,7 @@
           <p:cNvPr id="11" name="cover-course">
             <a:extLst xmlns:a="http://schemas.openxmlformats.org/drawingml/2006/main">
               <a:ext uri="{FF2B5EF4-FFF2-40B4-BE49-F238E27FC236}">
-                <a16:creationId xmlns:a16="http://schemas.microsoft.com/office/drawing/2014/main" id="{5C4A99AF-DFA2-4CBA-B30F-21EB82BBCB85}"/>
+                <a16:creationId xmlns:a16="http://schemas.microsoft.com/office/drawing/2014/main" id="{C9E9AE27-028F-4428-ACAA-AD7BE0CD5EF7}"/>
               </a:ext>
             </a:extLst>
           </p:cNvPr>
@@ -2306,7 +2306,7 @@
           <p:cNvPr id="12" name="cover-id">
             <a:extLst xmlns:a="http://schemas.openxmlformats.org/drawingml/2006/main">
               <a:ext uri="{FF2B5EF4-FFF2-40B4-BE49-F238E27FC236}">
-                <a16:creationId xmlns:a16="http://schemas.microsoft.com/office/drawing/2014/main" id="{766E7BFD-25AF-488E-AA8B-D84CA4C25B6B}"/>
+                <a16:creationId xmlns:a16="http://schemas.microsoft.com/office/drawing/2014/main" id="{C0864D8C-B045-4E76-9D10-413FAD97D570}"/>
               </a:ext>
             </a:extLst>
           </p:cNvPr>
@@ -2362,7 +2362,7 @@
     </p:spTree>
     <p:extLst>
       <p:ext uri="{BB962C8B-B14F-4D97-AF65-F5344CB8AC3E}">
-        <p14:creationId xmlns:p14="http://schemas.microsoft.com/office/powerpoint/2010/main" val="286805585"/>
+        <p14:creationId xmlns:p14="http://schemas.microsoft.com/office/powerpoint/2010/main" val="1625541651"/>
       </p:ext>
     </p:extLst>
   </p:cSld>
@@ -2393,7 +2393,7 @@
           <p:cNvPr id="1" name="s10-rule">
             <a:extLst xmlns:a="http://schemas.openxmlformats.org/drawingml/2006/main">
               <a:ext uri="{FF2B5EF4-FFF2-40B4-BE49-F238E27FC236}">
-                <a16:creationId xmlns:a16="http://schemas.microsoft.com/office/drawing/2014/main" id="{D117703A-DCAB-4922-8918-69D2A8FDDD51}"/>
+                <a16:creationId xmlns:a16="http://schemas.microsoft.com/office/drawing/2014/main" id="{3480666F-7F51-452B-A0E8-C5A7624760A2}"/>
               </a:ext>
             </a:extLst>
           </p:cNvPr>
@@ -2426,7 +2426,7 @@
           <p:cNvPr id="2" name="s10-eyebrow">
             <a:extLst xmlns:a="http://schemas.openxmlformats.org/drawingml/2006/main">
               <a:ext uri="{FF2B5EF4-FFF2-40B4-BE49-F238E27FC236}">
-                <a16:creationId xmlns:a16="http://schemas.microsoft.com/office/drawing/2014/main" id="{10FD2698-9122-43FA-BCFC-DC1B4AAAA4D1}"/>
+                <a16:creationId xmlns:a16="http://schemas.microsoft.com/office/drawing/2014/main" id="{35070C51-3554-4E40-ACBA-201EF977F77E}"/>
               </a:ext>
             </a:extLst>
           </p:cNvPr>
@@ -2484,7 +2484,7 @@
           <p:cNvPr id="3" name="s10-title">
             <a:extLst xmlns:a="http://schemas.openxmlformats.org/drawingml/2006/main">
               <a:ext uri="{FF2B5EF4-FFF2-40B4-BE49-F238E27FC236}">
-                <a16:creationId xmlns:a16="http://schemas.microsoft.com/office/drawing/2014/main" id="{735899EC-0FA8-4D86-B70A-49B0B5BA456D}"/>
+                <a16:creationId xmlns:a16="http://schemas.microsoft.com/office/drawing/2014/main" id="{ECD113E0-BD47-4C58-8AB5-EC99D45D125B}"/>
               </a:ext>
             </a:extLst>
           </p:cNvPr>
@@ -2542,7 +2542,7 @@
           <p:cNvPr id="4" name="s10-footer">
             <a:extLst xmlns:a="http://schemas.openxmlformats.org/drawingml/2006/main">
               <a:ext uri="{FF2B5EF4-FFF2-40B4-BE49-F238E27FC236}">
-                <a16:creationId xmlns:a16="http://schemas.microsoft.com/office/drawing/2014/main" id="{63542485-0BB4-4E03-A09E-8DB7C69D64E4}"/>
+                <a16:creationId xmlns:a16="http://schemas.microsoft.com/office/drawing/2014/main" id="{7F9B5D4A-6D4F-420B-AEBE-174CA25D3CDA}"/>
               </a:ext>
             </a:extLst>
           </p:cNvPr>
@@ -2573,7 +2573,7 @@
           <p:cNvPr id="5" name="s10-identity">
             <a:extLst xmlns:a="http://schemas.openxmlformats.org/drawingml/2006/main">
               <a:ext uri="{FF2B5EF4-FFF2-40B4-BE49-F238E27FC236}">
-                <a16:creationId xmlns:a16="http://schemas.microsoft.com/office/drawing/2014/main" id="{87018438-0C81-48FD-A26A-365CB2BFE495}"/>
+                <a16:creationId xmlns:a16="http://schemas.microsoft.com/office/drawing/2014/main" id="{3865527F-02D0-460F-B778-0985ACE83570}"/>
               </a:ext>
             </a:extLst>
           </p:cNvPr>
@@ -2631,7 +2631,7 @@
           <p:cNvPr id="6" name="recap-circle-0">
             <a:extLst xmlns:a="http://schemas.openxmlformats.org/drawingml/2006/main">
               <a:ext uri="{FF2B5EF4-FFF2-40B4-BE49-F238E27FC236}">
-                <a16:creationId xmlns:a16="http://schemas.microsoft.com/office/drawing/2014/main" id="{ECE70CA8-33A2-46FB-B38E-8CD980FA3DB5}"/>
+                <a16:creationId xmlns:a16="http://schemas.microsoft.com/office/drawing/2014/main" id="{2679947B-C125-4164-9323-104A46C5B666}"/>
               </a:ext>
             </a:extLst>
           </p:cNvPr>
@@ -2664,7 +2664,7 @@
           <p:cNvPr id="7" name="recap-number-0">
             <a:extLst xmlns:a="http://schemas.openxmlformats.org/drawingml/2006/main">
               <a:ext uri="{FF2B5EF4-FFF2-40B4-BE49-F238E27FC236}">
-                <a16:creationId xmlns:a16="http://schemas.microsoft.com/office/drawing/2014/main" id="{A678AC21-7395-4D40-B559-0C7702103FD5}"/>
+                <a16:creationId xmlns:a16="http://schemas.microsoft.com/office/drawing/2014/main" id="{91008790-514D-4981-8F11-74CDABAA2F3A}"/>
               </a:ext>
             </a:extLst>
           </p:cNvPr>
@@ -2722,7 +2722,7 @@
           <p:cNvPr id="8" name="recap-item-0">
             <a:extLst xmlns:a="http://schemas.openxmlformats.org/drawingml/2006/main">
               <a:ext uri="{FF2B5EF4-FFF2-40B4-BE49-F238E27FC236}">
-                <a16:creationId xmlns:a16="http://schemas.microsoft.com/office/drawing/2014/main" id="{30496382-C908-4138-A2BC-64632910F4AE}"/>
+                <a16:creationId xmlns:a16="http://schemas.microsoft.com/office/drawing/2014/main" id="{BADF19E1-32EC-47CC-861B-B11A4BC9364E}"/>
               </a:ext>
             </a:extLst>
           </p:cNvPr>
@@ -2786,7 +2786,7 @@
           <p:cNvPr id="9" name="recap-connector-0">
             <a:extLst xmlns:a="http://schemas.openxmlformats.org/drawingml/2006/main">
               <a:ext uri="{FF2B5EF4-FFF2-40B4-BE49-F238E27FC236}">
-                <a16:creationId xmlns:a16="http://schemas.microsoft.com/office/drawing/2014/main" id="{CCD0BDC6-9C30-456C-928A-74AFA1AFCC25}"/>
+                <a16:creationId xmlns:a16="http://schemas.microsoft.com/office/drawing/2014/main" id="{D867A54E-9EEF-4678-AED2-3B9A73CF3C81}"/>
               </a:ext>
             </a:extLst>
           </p:cNvPr>
@@ -2817,7 +2817,7 @@
           <p:cNvPr id="10" name="recap-circle-1">
             <a:extLst xmlns:a="http://schemas.openxmlformats.org/drawingml/2006/main">
               <a:ext uri="{FF2B5EF4-FFF2-40B4-BE49-F238E27FC236}">
-                <a16:creationId xmlns:a16="http://schemas.microsoft.com/office/drawing/2014/main" id="{6882F559-FC2E-4B64-A34F-0CE50E3BD62E}"/>
+                <a16:creationId xmlns:a16="http://schemas.microsoft.com/office/drawing/2014/main" id="{5CE336C5-2127-4DA7-9A7E-77A93DA29388}"/>
               </a:ext>
             </a:extLst>
           </p:cNvPr>
@@ -2850,7 +2850,7 @@
           <p:cNvPr id="11" name="recap-number-1">
             <a:extLst xmlns:a="http://schemas.openxmlformats.org/drawingml/2006/main">
               <a:ext uri="{FF2B5EF4-FFF2-40B4-BE49-F238E27FC236}">
-                <a16:creationId xmlns:a16="http://schemas.microsoft.com/office/drawing/2014/main" id="{77B8E565-D606-41BF-B147-1E7EDDCD6901}"/>
+                <a16:creationId xmlns:a16="http://schemas.microsoft.com/office/drawing/2014/main" id="{C77D84BD-0087-4A42-A67D-AB3035FF993F}"/>
               </a:ext>
             </a:extLst>
           </p:cNvPr>
@@ -2908,7 +2908,7 @@
           <p:cNvPr id="12" name="recap-item-1">
             <a:extLst xmlns:a="http://schemas.openxmlformats.org/drawingml/2006/main">
               <a:ext uri="{FF2B5EF4-FFF2-40B4-BE49-F238E27FC236}">
-                <a16:creationId xmlns:a16="http://schemas.microsoft.com/office/drawing/2014/main" id="{6107A597-58CD-4954-90D5-8B5A5567218D}"/>
+                <a16:creationId xmlns:a16="http://schemas.microsoft.com/office/drawing/2014/main" id="{208027E4-8D02-4703-8E10-241FE846469A}"/>
               </a:ext>
             </a:extLst>
           </p:cNvPr>
@@ -2972,7 +2972,7 @@
           <p:cNvPr id="13" name="recap-connector-1">
             <a:extLst xmlns:a="http://schemas.openxmlformats.org/drawingml/2006/main">
               <a:ext uri="{FF2B5EF4-FFF2-40B4-BE49-F238E27FC236}">
-                <a16:creationId xmlns:a16="http://schemas.microsoft.com/office/drawing/2014/main" id="{0B660D01-AC8D-4CFA-A12A-8EAB595777E5}"/>
+                <a16:creationId xmlns:a16="http://schemas.microsoft.com/office/drawing/2014/main" id="{E4D349EE-185E-46AB-97D5-D2B1A6EDA88C}"/>
               </a:ext>
             </a:extLst>
           </p:cNvPr>
@@ -3003,7 +3003,7 @@
           <p:cNvPr id="14" name="recap-circle-2">
             <a:extLst xmlns:a="http://schemas.openxmlformats.org/drawingml/2006/main">
               <a:ext uri="{FF2B5EF4-FFF2-40B4-BE49-F238E27FC236}">
-                <a16:creationId xmlns:a16="http://schemas.microsoft.com/office/drawing/2014/main" id="{1E06E025-EBBF-4624-8E16-A64BFAD4FE5D}"/>
+                <a16:creationId xmlns:a16="http://schemas.microsoft.com/office/drawing/2014/main" id="{E3776E55-D1D7-4694-A47B-6F4B3B1EA44E}"/>
               </a:ext>
             </a:extLst>
           </p:cNvPr>
@@ -3036,7 +3036,7 @@
           <p:cNvPr id="15" name="recap-number-2">
             <a:extLst xmlns:a="http://schemas.openxmlformats.org/drawingml/2006/main">
               <a:ext uri="{FF2B5EF4-FFF2-40B4-BE49-F238E27FC236}">
-                <a16:creationId xmlns:a16="http://schemas.microsoft.com/office/drawing/2014/main" id="{CD418E3D-72C0-4ADC-8091-021A5B7E425A}"/>
+                <a16:creationId xmlns:a16="http://schemas.microsoft.com/office/drawing/2014/main" id="{E69508BA-B1DF-45AC-AD81-4BA0D67F19AC}"/>
               </a:ext>
             </a:extLst>
           </p:cNvPr>
@@ -3094,7 +3094,7 @@
           <p:cNvPr id="16" name="recap-item-2">
             <a:extLst xmlns:a="http://schemas.openxmlformats.org/drawingml/2006/main">
               <a:ext uri="{FF2B5EF4-FFF2-40B4-BE49-F238E27FC236}">
-                <a16:creationId xmlns:a16="http://schemas.microsoft.com/office/drawing/2014/main" id="{939972EA-56C7-429D-B35C-CC45A35FDD31}"/>
+                <a16:creationId xmlns:a16="http://schemas.microsoft.com/office/drawing/2014/main" id="{A4E10220-7315-446F-A66B-C3902914216C}"/>
               </a:ext>
             </a:extLst>
           </p:cNvPr>
@@ -3156,7 +3156,7 @@
     </p:spTree>
     <p:extLst>
       <p:ext uri="{BB962C8B-B14F-4D97-AF65-F5344CB8AC3E}">
-        <p14:creationId xmlns:p14="http://schemas.microsoft.com/office/powerpoint/2010/main" val="693886316"/>
+        <p14:creationId xmlns:p14="http://schemas.microsoft.com/office/powerpoint/2010/main" val="2092988317"/>
       </p:ext>
     </p:extLst>
   </p:cSld>
@@ -3187,7 +3187,7 @@
           <p:cNvPr id="1" name="s11-rule">
             <a:extLst xmlns:a="http://schemas.openxmlformats.org/drawingml/2006/main">
               <a:ext uri="{FF2B5EF4-FFF2-40B4-BE49-F238E27FC236}">
-                <a16:creationId xmlns:a16="http://schemas.microsoft.com/office/drawing/2014/main" id="{36007D13-C7E3-4388-9D08-84FA294C35CC}"/>
+                <a16:creationId xmlns:a16="http://schemas.microsoft.com/office/drawing/2014/main" id="{656D472F-1835-4102-961B-F420CDE33767}"/>
               </a:ext>
             </a:extLst>
           </p:cNvPr>
@@ -3220,7 +3220,7 @@
           <p:cNvPr id="2" name="s11-eyebrow">
             <a:extLst xmlns:a="http://schemas.openxmlformats.org/drawingml/2006/main">
               <a:ext uri="{FF2B5EF4-FFF2-40B4-BE49-F238E27FC236}">
-                <a16:creationId xmlns:a16="http://schemas.microsoft.com/office/drawing/2014/main" id="{65A2905C-BDCF-4395-835D-EEBA59FB43D8}"/>
+                <a16:creationId xmlns:a16="http://schemas.microsoft.com/office/drawing/2014/main" id="{4B5DC32D-957C-4DA6-8821-B40D4D3AC82B}"/>
               </a:ext>
             </a:extLst>
           </p:cNvPr>
@@ -3278,7 +3278,7 @@
           <p:cNvPr id="3" name="s11-title">
             <a:extLst xmlns:a="http://schemas.openxmlformats.org/drawingml/2006/main">
               <a:ext uri="{FF2B5EF4-FFF2-40B4-BE49-F238E27FC236}">
-                <a16:creationId xmlns:a16="http://schemas.microsoft.com/office/drawing/2014/main" id="{01BCAAF4-0C70-479C-B9A1-48EBD8B014C3}"/>
+                <a16:creationId xmlns:a16="http://schemas.microsoft.com/office/drawing/2014/main" id="{9AF5A4D9-11A3-4345-A99E-0FB35B9F2882}"/>
               </a:ext>
             </a:extLst>
           </p:cNvPr>
@@ -3336,7 +3336,7 @@
           <p:cNvPr id="4" name="s11-footer">
             <a:extLst xmlns:a="http://schemas.openxmlformats.org/drawingml/2006/main">
               <a:ext uri="{FF2B5EF4-FFF2-40B4-BE49-F238E27FC236}">
-                <a16:creationId xmlns:a16="http://schemas.microsoft.com/office/drawing/2014/main" id="{3C09740A-948E-42C2-BBB8-C049467228C5}"/>
+                <a16:creationId xmlns:a16="http://schemas.microsoft.com/office/drawing/2014/main" id="{FE8F7EF7-2A7D-4684-AA1F-5732EF79A5E6}"/>
               </a:ext>
             </a:extLst>
           </p:cNvPr>
@@ -3367,7 +3367,7 @@
           <p:cNvPr id="5" name="s11-identity">
             <a:extLst xmlns:a="http://schemas.openxmlformats.org/drawingml/2006/main">
               <a:ext uri="{FF2B5EF4-FFF2-40B4-BE49-F238E27FC236}">
-                <a16:creationId xmlns:a16="http://schemas.microsoft.com/office/drawing/2014/main" id="{EB5FD40E-C963-42C8-8715-B3563590C0F3}"/>
+                <a16:creationId xmlns:a16="http://schemas.microsoft.com/office/drawing/2014/main" id="{63F8441A-3CE0-4533-BFA3-8C83BFDE7002}"/>
               </a:ext>
             </a:extLst>
           </p:cNvPr>
@@ -3425,7 +3425,7 @@
           <p:cNvPr id="6" name="source-0">
             <a:extLst xmlns:a="http://schemas.openxmlformats.org/drawingml/2006/main">
               <a:ext uri="{FF2B5EF4-FFF2-40B4-BE49-F238E27FC236}">
-                <a16:creationId xmlns:a16="http://schemas.microsoft.com/office/drawing/2014/main" id="{2A5B96A9-A95C-4F6B-998F-2D182C3A58E8}"/>
+                <a16:creationId xmlns:a16="http://schemas.microsoft.com/office/drawing/2014/main" id="{969DC4A7-C448-4AC3-89AE-0D2C7916B76E}"/>
               </a:ext>
             </a:extLst>
           </p:cNvPr>
@@ -3489,7 +3489,7 @@
           <p:cNvPr id="7" name="source-1">
             <a:extLst xmlns:a="http://schemas.openxmlformats.org/drawingml/2006/main">
               <a:ext uri="{FF2B5EF4-FFF2-40B4-BE49-F238E27FC236}">
-                <a16:creationId xmlns:a16="http://schemas.microsoft.com/office/drawing/2014/main" id="{EFE37FBC-3D5C-4E84-8C98-758C1A45B652}"/>
+                <a16:creationId xmlns:a16="http://schemas.microsoft.com/office/drawing/2014/main" id="{DEA7EE08-65A0-470D-AB1B-53E2BB205B72}"/>
               </a:ext>
             </a:extLst>
           </p:cNvPr>
@@ -3553,7 +3553,7 @@
           <p:cNvPr id="8" name="source-2">
             <a:extLst xmlns:a="http://schemas.openxmlformats.org/drawingml/2006/main">
               <a:ext uri="{FF2B5EF4-FFF2-40B4-BE49-F238E27FC236}">
-                <a16:creationId xmlns:a16="http://schemas.microsoft.com/office/drawing/2014/main" id="{ECCC2033-7054-4E5E-8D67-0D778B49CC04}"/>
+                <a16:creationId xmlns:a16="http://schemas.microsoft.com/office/drawing/2014/main" id="{95397A61-DA21-4E9D-BA70-E6436182C649}"/>
               </a:ext>
             </a:extLst>
           </p:cNvPr>
@@ -3617,7 +3617,7 @@
           <p:cNvPr id="9" name="source-3">
             <a:extLst xmlns:a="http://schemas.openxmlformats.org/drawingml/2006/main">
               <a:ext uri="{FF2B5EF4-FFF2-40B4-BE49-F238E27FC236}">
-                <a16:creationId xmlns:a16="http://schemas.microsoft.com/office/drawing/2014/main" id="{A11FF8C1-2D8D-4EF9-8AC6-2330F8DBAD40}"/>
+                <a16:creationId xmlns:a16="http://schemas.microsoft.com/office/drawing/2014/main" id="{51CD2BA9-29AB-4D52-ACDC-A4287C5A7E0F}"/>
               </a:ext>
             </a:extLst>
           </p:cNvPr>
@@ -3681,7 +3681,7 @@
           <p:cNvPr id="10" name="source-4">
             <a:extLst xmlns:a="http://schemas.openxmlformats.org/drawingml/2006/main">
               <a:ext uri="{FF2B5EF4-FFF2-40B4-BE49-F238E27FC236}">
-                <a16:creationId xmlns:a16="http://schemas.microsoft.com/office/drawing/2014/main" id="{C9479E3A-FF01-444B-862C-0E831B94DB8B}"/>
+                <a16:creationId xmlns:a16="http://schemas.microsoft.com/office/drawing/2014/main" id="{CC02F487-B665-4174-A7AE-C262D59F2684}"/>
               </a:ext>
             </a:extLst>
           </p:cNvPr>
@@ -3745,7 +3745,7 @@
           <p:cNvPr id="11" name="s11-takeaway-rule">
             <a:extLst xmlns:a="http://schemas.openxmlformats.org/drawingml/2006/main">
               <a:ext uri="{FF2B5EF4-FFF2-40B4-BE49-F238E27FC236}">
-                <a16:creationId xmlns:a16="http://schemas.microsoft.com/office/drawing/2014/main" id="{16D902E2-1BE9-4834-9065-E7446556FC82}"/>
+                <a16:creationId xmlns:a16="http://schemas.microsoft.com/office/drawing/2014/main" id="{287CD484-52C4-4195-928A-59330FF48DC1}"/>
               </a:ext>
             </a:extLst>
           </p:cNvPr>
@@ -3778,7 +3778,7 @@
           <p:cNvPr id="12" name="s11-takeaway">
             <a:extLst xmlns:a="http://schemas.openxmlformats.org/drawingml/2006/main">
               <a:ext uri="{FF2B5EF4-FFF2-40B4-BE49-F238E27FC236}">
-                <a16:creationId xmlns:a16="http://schemas.microsoft.com/office/drawing/2014/main" id="{163508B6-5D23-45AC-90D2-309DF59B2C7C}"/>
+                <a16:creationId xmlns:a16="http://schemas.microsoft.com/office/drawing/2014/main" id="{FBDE6E50-CC1F-417B-9815-568C1471F43D}"/>
               </a:ext>
             </a:extLst>
           </p:cNvPr>
@@ -3803,7 +3803,7 @@
         </p:spPr>
         <p:txBody>
           <a:bodyPr xmlns:a="http://schemas.openxmlformats.org/drawingml/2006/main" lIns="0" tIns="0" rIns="0" bIns="0" anchor="ctr">
-            <a:normAutofit fontScale="100000"/>
+            <a:normAutofit fontScale="95911"/>
           </a:bodyPr>
           <a:lstStyle xmlns:a="http://schemas.openxmlformats.org/drawingml/2006/main"/>
           <a:p xmlns:a="http://schemas.openxmlformats.org/drawingml/2006/main">
@@ -3826,7 +3826,7 @@
                 <a:ea typeface="PingFang SC"/>
                 <a:cs typeface="PingFang SC"/>
               </a:rPr>
-              <a:t>公开幻灯片只使用课程原创文字与原生图形；完整论证、链接和事实边界请见本节讲义。</a:t>
+              <a:t>课程精编页用于讲授主线；播放器中的“原课件”模式保留团队 PowerPoint 精选页、真实图片和可播放视频。</a:t>
             </a:r>
           </a:p>
         </p:txBody>
@@ -3834,7 +3834,7 @@
     </p:spTree>
     <p:extLst>
       <p:ext uri="{BB962C8B-B14F-4D97-AF65-F5344CB8AC3E}">
-        <p14:creationId xmlns:p14="http://schemas.microsoft.com/office/powerpoint/2010/main" val="1392358053"/>
+        <p14:creationId xmlns:p14="http://schemas.microsoft.com/office/powerpoint/2010/main" val="1317444091"/>
       </p:ext>
     </p:extLst>
   </p:cSld>
@@ -3865,7 +3865,7 @@
           <p:cNvPr id="1" name="s2-rule">
             <a:extLst xmlns:a="http://schemas.openxmlformats.org/drawingml/2006/main">
               <a:ext uri="{FF2B5EF4-FFF2-40B4-BE49-F238E27FC236}">
-                <a16:creationId xmlns:a16="http://schemas.microsoft.com/office/drawing/2014/main" id="{DD6AA188-6AAA-4EFA-95F7-46E3AB416264}"/>
+                <a16:creationId xmlns:a16="http://schemas.microsoft.com/office/drawing/2014/main" id="{32F4B65A-0AB1-47DD-8117-F88FB31EA1C9}"/>
               </a:ext>
             </a:extLst>
           </p:cNvPr>
@@ -3898,7 +3898,7 @@
           <p:cNvPr id="2" name="s2-eyebrow">
             <a:extLst xmlns:a="http://schemas.openxmlformats.org/drawingml/2006/main">
               <a:ext uri="{FF2B5EF4-FFF2-40B4-BE49-F238E27FC236}">
-                <a16:creationId xmlns:a16="http://schemas.microsoft.com/office/drawing/2014/main" id="{751CF830-50D7-4FA8-8CE9-E0B05BE06CFB}"/>
+                <a16:creationId xmlns:a16="http://schemas.microsoft.com/office/drawing/2014/main" id="{5D650551-F429-421F-BEF9-18E9C0B11142}"/>
               </a:ext>
             </a:extLst>
           </p:cNvPr>
@@ -3956,7 +3956,7 @@
           <p:cNvPr id="3" name="s2-title">
             <a:extLst xmlns:a="http://schemas.openxmlformats.org/drawingml/2006/main">
               <a:ext uri="{FF2B5EF4-FFF2-40B4-BE49-F238E27FC236}">
-                <a16:creationId xmlns:a16="http://schemas.microsoft.com/office/drawing/2014/main" id="{CB146A99-40B3-45D2-A869-47D425E0BD99}"/>
+                <a16:creationId xmlns:a16="http://schemas.microsoft.com/office/drawing/2014/main" id="{D4EAD3F6-71D2-46A1-A7C1-04806B213923}"/>
               </a:ext>
             </a:extLst>
           </p:cNvPr>
@@ -4014,7 +4014,7 @@
           <p:cNvPr id="4" name="s2-footer">
             <a:extLst xmlns:a="http://schemas.openxmlformats.org/drawingml/2006/main">
               <a:ext uri="{FF2B5EF4-FFF2-40B4-BE49-F238E27FC236}">
-                <a16:creationId xmlns:a16="http://schemas.microsoft.com/office/drawing/2014/main" id="{435B6F4F-5C01-43FF-AAF7-B5C723A0AEF7}"/>
+                <a16:creationId xmlns:a16="http://schemas.microsoft.com/office/drawing/2014/main" id="{6159FEAB-6F49-4DD6-9E29-78310998E71A}"/>
               </a:ext>
             </a:extLst>
           </p:cNvPr>
@@ -4045,7 +4045,7 @@
           <p:cNvPr id="5" name="s2-identity">
             <a:extLst xmlns:a="http://schemas.openxmlformats.org/drawingml/2006/main">
               <a:ext uri="{FF2B5EF4-FFF2-40B4-BE49-F238E27FC236}">
-                <a16:creationId xmlns:a16="http://schemas.microsoft.com/office/drawing/2014/main" id="{C370844D-2E5A-4015-BE83-5CA751C4970C}"/>
+                <a16:creationId xmlns:a16="http://schemas.microsoft.com/office/drawing/2014/main" id="{5A316A33-B197-4490-A71F-231E607B34C0}"/>
               </a:ext>
             </a:extLst>
           </p:cNvPr>
@@ -4103,7 +4103,7 @@
           <p:cNvPr id="6" name="objective-1">
             <a:extLst xmlns:a="http://schemas.openxmlformats.org/drawingml/2006/main">
               <a:ext uri="{FF2B5EF4-FFF2-40B4-BE49-F238E27FC236}">
-                <a16:creationId xmlns:a16="http://schemas.microsoft.com/office/drawing/2014/main" id="{A4CCBB43-EE74-431D-BA34-E32A6441BE30}"/>
+                <a16:creationId xmlns:a16="http://schemas.microsoft.com/office/drawing/2014/main" id="{4D7B525D-B2EF-4B1D-8F14-15257838F4B8}"/>
               </a:ext>
             </a:extLst>
           </p:cNvPr>
@@ -4190,7 +4190,7 @@
           <p:cNvPr id="7" name="objective-2">
             <a:extLst xmlns:a="http://schemas.openxmlformats.org/drawingml/2006/main">
               <a:ext uri="{FF2B5EF4-FFF2-40B4-BE49-F238E27FC236}">
-                <a16:creationId xmlns:a16="http://schemas.microsoft.com/office/drawing/2014/main" id="{DCBD51DE-922D-492D-BBF6-D13181125F35}"/>
+                <a16:creationId xmlns:a16="http://schemas.microsoft.com/office/drawing/2014/main" id="{A0108423-95FB-4A27-86A1-21C97CA94C69}"/>
               </a:ext>
             </a:extLst>
           </p:cNvPr>
@@ -4275,7 +4275,7 @@
     </p:spTree>
     <p:extLst>
       <p:ext uri="{BB962C8B-B14F-4D97-AF65-F5344CB8AC3E}">
-        <p14:creationId xmlns:p14="http://schemas.microsoft.com/office/powerpoint/2010/main" val="285881198"/>
+        <p14:creationId xmlns:p14="http://schemas.microsoft.com/office/powerpoint/2010/main" val="962895261"/>
       </p:ext>
     </p:extLst>
   </p:cSld>
@@ -4306,7 +4306,7 @@
           <p:cNvPr id="1" name="s3-rule">
             <a:extLst xmlns:a="http://schemas.openxmlformats.org/drawingml/2006/main">
               <a:ext uri="{FF2B5EF4-FFF2-40B4-BE49-F238E27FC236}">
-                <a16:creationId xmlns:a16="http://schemas.microsoft.com/office/drawing/2014/main" id="{0BA96C45-5BB6-4427-A50F-12E36A0615B6}"/>
+                <a16:creationId xmlns:a16="http://schemas.microsoft.com/office/drawing/2014/main" id="{37F86142-21B7-41A0-9927-1464707C57D8}"/>
               </a:ext>
             </a:extLst>
           </p:cNvPr>
@@ -4339,7 +4339,7 @@
           <p:cNvPr id="2" name="s3-eyebrow">
             <a:extLst xmlns:a="http://schemas.openxmlformats.org/drawingml/2006/main">
               <a:ext uri="{FF2B5EF4-FFF2-40B4-BE49-F238E27FC236}">
-                <a16:creationId xmlns:a16="http://schemas.microsoft.com/office/drawing/2014/main" id="{C4C00570-3359-4022-A65E-75513680B43E}"/>
+                <a16:creationId xmlns:a16="http://schemas.microsoft.com/office/drawing/2014/main" id="{66585011-D401-47AD-9268-F4B4BB93B0FD}"/>
               </a:ext>
             </a:extLst>
           </p:cNvPr>
@@ -4397,7 +4397,7 @@
           <p:cNvPr id="3" name="s3-title">
             <a:extLst xmlns:a="http://schemas.openxmlformats.org/drawingml/2006/main">
               <a:ext uri="{FF2B5EF4-FFF2-40B4-BE49-F238E27FC236}">
-                <a16:creationId xmlns:a16="http://schemas.microsoft.com/office/drawing/2014/main" id="{9BE8B40F-3665-40B7-8381-8C07A42A2FD1}"/>
+                <a16:creationId xmlns:a16="http://schemas.microsoft.com/office/drawing/2014/main" id="{999A59B2-71FE-4806-B343-87657588270C}"/>
               </a:ext>
             </a:extLst>
           </p:cNvPr>
@@ -4455,7 +4455,7 @@
           <p:cNvPr id="4" name="s3-footer">
             <a:extLst xmlns:a="http://schemas.openxmlformats.org/drawingml/2006/main">
               <a:ext uri="{FF2B5EF4-FFF2-40B4-BE49-F238E27FC236}">
-                <a16:creationId xmlns:a16="http://schemas.microsoft.com/office/drawing/2014/main" id="{65312B9B-2C6A-4906-9144-095A12808036}"/>
+                <a16:creationId xmlns:a16="http://schemas.microsoft.com/office/drawing/2014/main" id="{5188A599-C177-4531-9FEB-19F4A3485623}"/>
               </a:ext>
             </a:extLst>
           </p:cNvPr>
@@ -4486,7 +4486,7 @@
           <p:cNvPr id="5" name="s3-identity">
             <a:extLst xmlns:a="http://schemas.openxmlformats.org/drawingml/2006/main">
               <a:ext uri="{FF2B5EF4-FFF2-40B4-BE49-F238E27FC236}">
-                <a16:creationId xmlns:a16="http://schemas.microsoft.com/office/drawing/2014/main" id="{116B4AA8-E6DD-4F92-B07B-AE37DFAE6955}"/>
+                <a16:creationId xmlns:a16="http://schemas.microsoft.com/office/drawing/2014/main" id="{9BAFFD3B-75ED-41CA-B9DE-0F5682882B7C}"/>
               </a:ext>
             </a:extLst>
           </p:cNvPr>
@@ -4544,7 +4544,7 @@
           <p:cNvPr id="6" name="core-no-0">
             <a:extLst xmlns:a="http://schemas.openxmlformats.org/drawingml/2006/main">
               <a:ext uri="{FF2B5EF4-FFF2-40B4-BE49-F238E27FC236}">
-                <a16:creationId xmlns:a16="http://schemas.microsoft.com/office/drawing/2014/main" id="{D940E7D2-7E16-4DBD-B3D4-698B1A113B44}"/>
+                <a16:creationId xmlns:a16="http://schemas.microsoft.com/office/drawing/2014/main" id="{4C18D3E1-AC86-43E2-8196-B346F5DEBB73}"/>
               </a:ext>
             </a:extLst>
           </p:cNvPr>
@@ -4602,7 +4602,7 @@
           <p:cNvPr id="7" name="core-label-0">
             <a:extLst xmlns:a="http://schemas.openxmlformats.org/drawingml/2006/main">
               <a:ext uri="{FF2B5EF4-FFF2-40B4-BE49-F238E27FC236}">
-                <a16:creationId xmlns:a16="http://schemas.microsoft.com/office/drawing/2014/main" id="{57B79D92-BE4F-4A38-83D8-93FC6CB8CF2D}"/>
+                <a16:creationId xmlns:a16="http://schemas.microsoft.com/office/drawing/2014/main" id="{02D5CC58-9A41-44CC-B97B-1B922FAE9BA7}"/>
               </a:ext>
             </a:extLst>
           </p:cNvPr>
@@ -4660,7 +4660,7 @@
           <p:cNvPr id="8" name="core-body-0">
             <a:extLst xmlns:a="http://schemas.openxmlformats.org/drawingml/2006/main">
               <a:ext uri="{FF2B5EF4-FFF2-40B4-BE49-F238E27FC236}">
-                <a16:creationId xmlns:a16="http://schemas.microsoft.com/office/drawing/2014/main" id="{4F3E9F31-5420-43C3-8345-9F23E2E2F906}"/>
+                <a16:creationId xmlns:a16="http://schemas.microsoft.com/office/drawing/2014/main" id="{8B219BB8-3FA3-4AF2-8A6E-B5D5CA76D072}"/>
               </a:ext>
             </a:extLst>
           </p:cNvPr>
@@ -4724,7 +4724,7 @@
           <p:cNvPr id="9" name="core-no-1">
             <a:extLst xmlns:a="http://schemas.openxmlformats.org/drawingml/2006/main">
               <a:ext uri="{FF2B5EF4-FFF2-40B4-BE49-F238E27FC236}">
-                <a16:creationId xmlns:a16="http://schemas.microsoft.com/office/drawing/2014/main" id="{E0A04847-1906-4BDC-B56E-E2A18E53A3BA}"/>
+                <a16:creationId xmlns:a16="http://schemas.microsoft.com/office/drawing/2014/main" id="{D0988487-1740-4EB3-B976-5041ECA402AC}"/>
               </a:ext>
             </a:extLst>
           </p:cNvPr>
@@ -4782,7 +4782,7 @@
           <p:cNvPr id="10" name="core-body-1">
             <a:extLst xmlns:a="http://schemas.openxmlformats.org/drawingml/2006/main">
               <a:ext uri="{FF2B5EF4-FFF2-40B4-BE49-F238E27FC236}">
-                <a16:creationId xmlns:a16="http://schemas.microsoft.com/office/drawing/2014/main" id="{5F763B0D-EF65-49BB-99D3-50B4B4DE305A}"/>
+                <a16:creationId xmlns:a16="http://schemas.microsoft.com/office/drawing/2014/main" id="{AF097C0F-983D-431D-A3D5-A5275E82F013}"/>
               </a:ext>
             </a:extLst>
           </p:cNvPr>
@@ -4846,7 +4846,7 @@
           <p:cNvPr id="11" name="s3-takeaway-rule">
             <a:extLst xmlns:a="http://schemas.openxmlformats.org/drawingml/2006/main">
               <a:ext uri="{FF2B5EF4-FFF2-40B4-BE49-F238E27FC236}">
-                <a16:creationId xmlns:a16="http://schemas.microsoft.com/office/drawing/2014/main" id="{8C30C8AA-189F-4C7F-A21A-4F86F727424D}"/>
+                <a16:creationId xmlns:a16="http://schemas.microsoft.com/office/drawing/2014/main" id="{DDD86718-4B84-4C4F-8DC5-EF8BFFB97213}"/>
               </a:ext>
             </a:extLst>
           </p:cNvPr>
@@ -4879,7 +4879,7 @@
           <p:cNvPr id="12" name="s3-takeaway">
             <a:extLst xmlns:a="http://schemas.openxmlformats.org/drawingml/2006/main">
               <a:ext uri="{FF2B5EF4-FFF2-40B4-BE49-F238E27FC236}">
-                <a16:creationId xmlns:a16="http://schemas.microsoft.com/office/drawing/2014/main" id="{4FE7EFA7-0CF4-45EE-933C-157588077FED}"/>
+                <a16:creationId xmlns:a16="http://schemas.microsoft.com/office/drawing/2014/main" id="{7C210936-3984-4319-A4B5-6DF83DA51CE7}"/>
               </a:ext>
             </a:extLst>
           </p:cNvPr>
@@ -4935,7 +4935,7 @@
     </p:spTree>
     <p:extLst>
       <p:ext uri="{BB962C8B-B14F-4D97-AF65-F5344CB8AC3E}">
-        <p14:creationId xmlns:p14="http://schemas.microsoft.com/office/powerpoint/2010/main" val="918397333"/>
+        <p14:creationId xmlns:p14="http://schemas.microsoft.com/office/powerpoint/2010/main" val="329291641"/>
       </p:ext>
     </p:extLst>
   </p:cSld>
@@ -4966,7 +4966,7 @@
           <p:cNvPr id="1" name="s4-rule">
             <a:extLst xmlns:a="http://schemas.openxmlformats.org/drawingml/2006/main">
               <a:ext uri="{FF2B5EF4-FFF2-40B4-BE49-F238E27FC236}">
-                <a16:creationId xmlns:a16="http://schemas.microsoft.com/office/drawing/2014/main" id="{4FA199B0-1E10-4C77-9F01-7698FE29815A}"/>
+                <a16:creationId xmlns:a16="http://schemas.microsoft.com/office/drawing/2014/main" id="{BFF21D3C-C979-41E2-A646-63B6BA7D7F74}"/>
               </a:ext>
             </a:extLst>
           </p:cNvPr>
@@ -4999,7 +4999,7 @@
           <p:cNvPr id="2" name="s4-eyebrow">
             <a:extLst xmlns:a="http://schemas.openxmlformats.org/drawingml/2006/main">
               <a:ext uri="{FF2B5EF4-FFF2-40B4-BE49-F238E27FC236}">
-                <a16:creationId xmlns:a16="http://schemas.microsoft.com/office/drawing/2014/main" id="{A9940BA9-7F7B-4623-B3C2-522F0D91B1FB}"/>
+                <a16:creationId xmlns:a16="http://schemas.microsoft.com/office/drawing/2014/main" id="{5771C7A8-F943-4C81-BE7A-D44FC9912434}"/>
               </a:ext>
             </a:extLst>
           </p:cNvPr>
@@ -5057,7 +5057,7 @@
           <p:cNvPr id="3" name="s4-title">
             <a:extLst xmlns:a="http://schemas.openxmlformats.org/drawingml/2006/main">
               <a:ext uri="{FF2B5EF4-FFF2-40B4-BE49-F238E27FC236}">
-                <a16:creationId xmlns:a16="http://schemas.microsoft.com/office/drawing/2014/main" id="{649AC77A-0961-4158-B74B-01ADE5C7239A}"/>
+                <a16:creationId xmlns:a16="http://schemas.microsoft.com/office/drawing/2014/main" id="{B68429CF-4D20-4322-9806-CCA5CD774D18}"/>
               </a:ext>
             </a:extLst>
           </p:cNvPr>
@@ -5115,7 +5115,7 @@
           <p:cNvPr id="4" name="s4-footer">
             <a:extLst xmlns:a="http://schemas.openxmlformats.org/drawingml/2006/main">
               <a:ext uri="{FF2B5EF4-FFF2-40B4-BE49-F238E27FC236}">
-                <a16:creationId xmlns:a16="http://schemas.microsoft.com/office/drawing/2014/main" id="{F1D9B16E-5185-4E0E-9690-CFED0CCF5A66}"/>
+                <a16:creationId xmlns:a16="http://schemas.microsoft.com/office/drawing/2014/main" id="{18D0B160-1EBB-4D1F-8606-EB5C213B3908}"/>
               </a:ext>
             </a:extLst>
           </p:cNvPr>
@@ -5146,7 +5146,7 @@
           <p:cNvPr id="5" name="s4-identity">
             <a:extLst xmlns:a="http://schemas.openxmlformats.org/drawingml/2006/main">
               <a:ext uri="{FF2B5EF4-FFF2-40B4-BE49-F238E27FC236}">
-                <a16:creationId xmlns:a16="http://schemas.microsoft.com/office/drawing/2014/main" id="{BCBBE04E-E912-47A2-BB00-9FBC839BD0B7}"/>
+                <a16:creationId xmlns:a16="http://schemas.microsoft.com/office/drawing/2014/main" id="{98734E62-A9C2-4BB6-BA64-3DB61D3ECF6A}"/>
               </a:ext>
             </a:extLst>
           </p:cNvPr>
@@ -5204,7 +5204,7 @@
           <p:cNvPr id="6" name="core-no-0">
             <a:extLst xmlns:a="http://schemas.openxmlformats.org/drawingml/2006/main">
               <a:ext uri="{FF2B5EF4-FFF2-40B4-BE49-F238E27FC236}">
-                <a16:creationId xmlns:a16="http://schemas.microsoft.com/office/drawing/2014/main" id="{EC56A202-EBC5-4CAB-A03E-EA040D054C68}"/>
+                <a16:creationId xmlns:a16="http://schemas.microsoft.com/office/drawing/2014/main" id="{9695E48D-1A02-4F44-88BA-1D81827C093B}"/>
               </a:ext>
             </a:extLst>
           </p:cNvPr>
@@ -5262,7 +5262,7 @@
           <p:cNvPr id="7" name="core-label-0">
             <a:extLst xmlns:a="http://schemas.openxmlformats.org/drawingml/2006/main">
               <a:ext uri="{FF2B5EF4-FFF2-40B4-BE49-F238E27FC236}">
-                <a16:creationId xmlns:a16="http://schemas.microsoft.com/office/drawing/2014/main" id="{D5A3DD87-092A-450C-A74F-A5CB10CB86D1}"/>
+                <a16:creationId xmlns:a16="http://schemas.microsoft.com/office/drawing/2014/main" id="{CD62081C-DBFA-4445-96AD-C1A00F3E7860}"/>
               </a:ext>
             </a:extLst>
           </p:cNvPr>
@@ -5320,7 +5320,7 @@
           <p:cNvPr id="8" name="core-body-0">
             <a:extLst xmlns:a="http://schemas.openxmlformats.org/drawingml/2006/main">
               <a:ext uri="{FF2B5EF4-FFF2-40B4-BE49-F238E27FC236}">
-                <a16:creationId xmlns:a16="http://schemas.microsoft.com/office/drawing/2014/main" id="{3A5E7F29-F068-4271-868A-EA8AC51456FA}"/>
+                <a16:creationId xmlns:a16="http://schemas.microsoft.com/office/drawing/2014/main" id="{A810A9DF-160E-4BB4-B056-FC88B42D532C}"/>
               </a:ext>
             </a:extLst>
           </p:cNvPr>
@@ -5384,7 +5384,7 @@
           <p:cNvPr id="9" name="core-no-1">
             <a:extLst xmlns:a="http://schemas.openxmlformats.org/drawingml/2006/main">
               <a:ext uri="{FF2B5EF4-FFF2-40B4-BE49-F238E27FC236}">
-                <a16:creationId xmlns:a16="http://schemas.microsoft.com/office/drawing/2014/main" id="{86DE56A7-87F8-4969-BB67-731926575180}"/>
+                <a16:creationId xmlns:a16="http://schemas.microsoft.com/office/drawing/2014/main" id="{985E15A1-0574-49CF-9ECA-16571848AB56}"/>
               </a:ext>
             </a:extLst>
           </p:cNvPr>
@@ -5442,7 +5442,7 @@
           <p:cNvPr id="10" name="core-body-1">
             <a:extLst xmlns:a="http://schemas.openxmlformats.org/drawingml/2006/main">
               <a:ext uri="{FF2B5EF4-FFF2-40B4-BE49-F238E27FC236}">
-                <a16:creationId xmlns:a16="http://schemas.microsoft.com/office/drawing/2014/main" id="{3A035543-299A-44BC-9755-88C4366BFA77}"/>
+                <a16:creationId xmlns:a16="http://schemas.microsoft.com/office/drawing/2014/main" id="{7768B647-7AC0-4402-8A91-8B3D4CF8E059}"/>
               </a:ext>
             </a:extLst>
           </p:cNvPr>
@@ -5506,7 +5506,7 @@
           <p:cNvPr id="11" name="s4-takeaway-rule">
             <a:extLst xmlns:a="http://schemas.openxmlformats.org/drawingml/2006/main">
               <a:ext uri="{FF2B5EF4-FFF2-40B4-BE49-F238E27FC236}">
-                <a16:creationId xmlns:a16="http://schemas.microsoft.com/office/drawing/2014/main" id="{5EA9BF9E-79A4-4004-A22F-4ADE74DB5D8D}"/>
+                <a16:creationId xmlns:a16="http://schemas.microsoft.com/office/drawing/2014/main" id="{40BA5CA1-52B6-4C9C-85F3-0ADA81FA4E3E}"/>
               </a:ext>
             </a:extLst>
           </p:cNvPr>
@@ -5539,7 +5539,7 @@
           <p:cNvPr id="12" name="s4-takeaway">
             <a:extLst xmlns:a="http://schemas.openxmlformats.org/drawingml/2006/main">
               <a:ext uri="{FF2B5EF4-FFF2-40B4-BE49-F238E27FC236}">
-                <a16:creationId xmlns:a16="http://schemas.microsoft.com/office/drawing/2014/main" id="{9F596421-5DEA-4054-AF4A-0C315CA71948}"/>
+                <a16:creationId xmlns:a16="http://schemas.microsoft.com/office/drawing/2014/main" id="{26D44369-EEFC-4116-85CE-77B76EBB1D16}"/>
               </a:ext>
             </a:extLst>
           </p:cNvPr>
@@ -5595,7 +5595,7 @@
     </p:spTree>
     <p:extLst>
       <p:ext uri="{BB962C8B-B14F-4D97-AF65-F5344CB8AC3E}">
-        <p14:creationId xmlns:p14="http://schemas.microsoft.com/office/powerpoint/2010/main" val="1269148891"/>
+        <p14:creationId xmlns:p14="http://schemas.microsoft.com/office/powerpoint/2010/main" val="1968675893"/>
       </p:ext>
     </p:extLst>
   </p:cSld>
@@ -5626,7 +5626,7 @@
           <p:cNvPr id="1" name="s5-rule">
             <a:extLst xmlns:a="http://schemas.openxmlformats.org/drawingml/2006/main">
               <a:ext uri="{FF2B5EF4-FFF2-40B4-BE49-F238E27FC236}">
-                <a16:creationId xmlns:a16="http://schemas.microsoft.com/office/drawing/2014/main" id="{D971AD88-1D30-4181-BEF9-65EA4EFEDA7F}"/>
+                <a16:creationId xmlns:a16="http://schemas.microsoft.com/office/drawing/2014/main" id="{FF81CD65-9FCD-4B43-89C2-B2C668AF785D}"/>
               </a:ext>
             </a:extLst>
           </p:cNvPr>
@@ -5659,7 +5659,7 @@
           <p:cNvPr id="2" name="s5-eyebrow">
             <a:extLst xmlns:a="http://schemas.openxmlformats.org/drawingml/2006/main">
               <a:ext uri="{FF2B5EF4-FFF2-40B4-BE49-F238E27FC236}">
-                <a16:creationId xmlns:a16="http://schemas.microsoft.com/office/drawing/2014/main" id="{F5F39DA3-D57B-4C59-AA3F-EC289466572D}"/>
+                <a16:creationId xmlns:a16="http://schemas.microsoft.com/office/drawing/2014/main" id="{C236C867-DF67-4BFC-91A4-9D60ED212AD7}"/>
               </a:ext>
             </a:extLst>
           </p:cNvPr>
@@ -5717,7 +5717,7 @@
           <p:cNvPr id="3" name="s5-title">
             <a:extLst xmlns:a="http://schemas.openxmlformats.org/drawingml/2006/main">
               <a:ext uri="{FF2B5EF4-FFF2-40B4-BE49-F238E27FC236}">
-                <a16:creationId xmlns:a16="http://schemas.microsoft.com/office/drawing/2014/main" id="{CB79060C-6595-4263-87B4-A1CE8ED06C56}"/>
+                <a16:creationId xmlns:a16="http://schemas.microsoft.com/office/drawing/2014/main" id="{FDE3C6F6-84BF-482F-A718-75E955115061}"/>
               </a:ext>
             </a:extLst>
           </p:cNvPr>
@@ -5775,7 +5775,7 @@
           <p:cNvPr id="4" name="s5-footer">
             <a:extLst xmlns:a="http://schemas.openxmlformats.org/drawingml/2006/main">
               <a:ext uri="{FF2B5EF4-FFF2-40B4-BE49-F238E27FC236}">
-                <a16:creationId xmlns:a16="http://schemas.microsoft.com/office/drawing/2014/main" id="{3EDB5789-EE62-49AC-9E18-533ED5113475}"/>
+                <a16:creationId xmlns:a16="http://schemas.microsoft.com/office/drawing/2014/main" id="{2AE19937-9D1B-4A5B-98C7-64BBDEE4EADD}"/>
               </a:ext>
             </a:extLst>
           </p:cNvPr>
@@ -5806,7 +5806,7 @@
           <p:cNvPr id="5" name="s5-identity">
             <a:extLst xmlns:a="http://schemas.openxmlformats.org/drawingml/2006/main">
               <a:ext uri="{FF2B5EF4-FFF2-40B4-BE49-F238E27FC236}">
-                <a16:creationId xmlns:a16="http://schemas.microsoft.com/office/drawing/2014/main" id="{E8498011-B38F-4E8B-91D9-323E05D5608E}"/>
+                <a16:creationId xmlns:a16="http://schemas.microsoft.com/office/drawing/2014/main" id="{42EAC9C6-55F3-4567-AF11-F8CC38855743}"/>
               </a:ext>
             </a:extLst>
           </p:cNvPr>
@@ -5864,7 +5864,7 @@
           <p:cNvPr id="6" name="core-no-0">
             <a:extLst xmlns:a="http://schemas.openxmlformats.org/drawingml/2006/main">
               <a:ext uri="{FF2B5EF4-FFF2-40B4-BE49-F238E27FC236}">
-                <a16:creationId xmlns:a16="http://schemas.microsoft.com/office/drawing/2014/main" id="{76A3B898-826A-4E34-92E8-1E8428FC74BF}"/>
+                <a16:creationId xmlns:a16="http://schemas.microsoft.com/office/drawing/2014/main" id="{AB405B56-A479-4916-A469-90560E6EE1D8}"/>
               </a:ext>
             </a:extLst>
           </p:cNvPr>
@@ -5922,7 +5922,7 @@
           <p:cNvPr id="7" name="core-label-0">
             <a:extLst xmlns:a="http://schemas.openxmlformats.org/drawingml/2006/main">
               <a:ext uri="{FF2B5EF4-FFF2-40B4-BE49-F238E27FC236}">
-                <a16:creationId xmlns:a16="http://schemas.microsoft.com/office/drawing/2014/main" id="{B3ADBF75-A229-4AD8-B2A0-F379C0B81906}"/>
+                <a16:creationId xmlns:a16="http://schemas.microsoft.com/office/drawing/2014/main" id="{51CD0237-321C-434F-BDA3-A2588FA08738}"/>
               </a:ext>
             </a:extLst>
           </p:cNvPr>
@@ -5980,7 +5980,7 @@
           <p:cNvPr id="8" name="core-body-0">
             <a:extLst xmlns:a="http://schemas.openxmlformats.org/drawingml/2006/main">
               <a:ext uri="{FF2B5EF4-FFF2-40B4-BE49-F238E27FC236}">
-                <a16:creationId xmlns:a16="http://schemas.microsoft.com/office/drawing/2014/main" id="{933490D8-9172-4C9D-9B75-BF7A0F255635}"/>
+                <a16:creationId xmlns:a16="http://schemas.microsoft.com/office/drawing/2014/main" id="{40C974A3-6D22-4C44-ACBF-FC47F5258C84}"/>
               </a:ext>
             </a:extLst>
           </p:cNvPr>
@@ -6044,7 +6044,7 @@
           <p:cNvPr id="9" name="core-no-1">
             <a:extLst xmlns:a="http://schemas.openxmlformats.org/drawingml/2006/main">
               <a:ext uri="{FF2B5EF4-FFF2-40B4-BE49-F238E27FC236}">
-                <a16:creationId xmlns:a16="http://schemas.microsoft.com/office/drawing/2014/main" id="{FCDFA741-8943-4491-8ACC-D5422166AC2A}"/>
+                <a16:creationId xmlns:a16="http://schemas.microsoft.com/office/drawing/2014/main" id="{DA99C9DC-4606-4D91-BC44-C72D83C8BC01}"/>
               </a:ext>
             </a:extLst>
           </p:cNvPr>
@@ -6102,7 +6102,7 @@
           <p:cNvPr id="10" name="core-body-1">
             <a:extLst xmlns:a="http://schemas.openxmlformats.org/drawingml/2006/main">
               <a:ext uri="{FF2B5EF4-FFF2-40B4-BE49-F238E27FC236}">
-                <a16:creationId xmlns:a16="http://schemas.microsoft.com/office/drawing/2014/main" id="{D1A58A99-EBDE-4877-8640-0C2BF5A7D5A2}"/>
+                <a16:creationId xmlns:a16="http://schemas.microsoft.com/office/drawing/2014/main" id="{3A250F00-3D29-4462-8B53-91E86660A8AE}"/>
               </a:ext>
             </a:extLst>
           </p:cNvPr>
@@ -6166,7 +6166,7 @@
           <p:cNvPr id="11" name="s5-takeaway-rule">
             <a:extLst xmlns:a="http://schemas.openxmlformats.org/drawingml/2006/main">
               <a:ext uri="{FF2B5EF4-FFF2-40B4-BE49-F238E27FC236}">
-                <a16:creationId xmlns:a16="http://schemas.microsoft.com/office/drawing/2014/main" id="{0E418006-DAC5-4146-B5FF-6A2E060E01E5}"/>
+                <a16:creationId xmlns:a16="http://schemas.microsoft.com/office/drawing/2014/main" id="{C772782A-6BCE-4C51-AD6B-FE43F49B8D05}"/>
               </a:ext>
             </a:extLst>
           </p:cNvPr>
@@ -6199,7 +6199,7 @@
           <p:cNvPr id="12" name="s5-takeaway">
             <a:extLst xmlns:a="http://schemas.openxmlformats.org/drawingml/2006/main">
               <a:ext uri="{FF2B5EF4-FFF2-40B4-BE49-F238E27FC236}">
-                <a16:creationId xmlns:a16="http://schemas.microsoft.com/office/drawing/2014/main" id="{37C89DDC-7ABF-44F6-A11D-FAE8F9AD3468}"/>
+                <a16:creationId xmlns:a16="http://schemas.microsoft.com/office/drawing/2014/main" id="{CAEB14AD-F73D-435A-A2AD-7DF00F62E71E}"/>
               </a:ext>
             </a:extLst>
           </p:cNvPr>
@@ -6255,7 +6255,7 @@
     </p:spTree>
     <p:extLst>
       <p:ext uri="{BB962C8B-B14F-4D97-AF65-F5344CB8AC3E}">
-        <p14:creationId xmlns:p14="http://schemas.microsoft.com/office/powerpoint/2010/main" val="1138999137"/>
+        <p14:creationId xmlns:p14="http://schemas.microsoft.com/office/powerpoint/2010/main" val="1412171232"/>
       </p:ext>
     </p:extLst>
   </p:cSld>
@@ -6286,7 +6286,7 @@
           <p:cNvPr id="1" name="s6-rule">
             <a:extLst xmlns:a="http://schemas.openxmlformats.org/drawingml/2006/main">
               <a:ext uri="{FF2B5EF4-FFF2-40B4-BE49-F238E27FC236}">
-                <a16:creationId xmlns:a16="http://schemas.microsoft.com/office/drawing/2014/main" id="{790F9007-F297-44C3-8850-C526F8086369}"/>
+                <a16:creationId xmlns:a16="http://schemas.microsoft.com/office/drawing/2014/main" id="{E878FA18-19C7-4B7A-AFA6-035A6B942E34}"/>
               </a:ext>
             </a:extLst>
           </p:cNvPr>
@@ -6319,7 +6319,7 @@
           <p:cNvPr id="2" name="s6-eyebrow">
             <a:extLst xmlns:a="http://schemas.openxmlformats.org/drawingml/2006/main">
               <a:ext uri="{FF2B5EF4-FFF2-40B4-BE49-F238E27FC236}">
-                <a16:creationId xmlns:a16="http://schemas.microsoft.com/office/drawing/2014/main" id="{E65B209D-80BB-43B3-95F3-BDD7069E7790}"/>
+                <a16:creationId xmlns:a16="http://schemas.microsoft.com/office/drawing/2014/main" id="{5322CCD1-97A6-4604-A4FE-63550D252CFD}"/>
               </a:ext>
             </a:extLst>
           </p:cNvPr>
@@ -6377,7 +6377,7 @@
           <p:cNvPr id="3" name="s6-title">
             <a:extLst xmlns:a="http://schemas.openxmlformats.org/drawingml/2006/main">
               <a:ext uri="{FF2B5EF4-FFF2-40B4-BE49-F238E27FC236}">
-                <a16:creationId xmlns:a16="http://schemas.microsoft.com/office/drawing/2014/main" id="{74970A21-4449-4363-AA4F-BFD8367F25F0}"/>
+                <a16:creationId xmlns:a16="http://schemas.microsoft.com/office/drawing/2014/main" id="{A32DE0B8-4F23-4D5A-8365-1E0197C7CBD6}"/>
               </a:ext>
             </a:extLst>
           </p:cNvPr>
@@ -6435,7 +6435,7 @@
           <p:cNvPr id="4" name="s6-footer">
             <a:extLst xmlns:a="http://schemas.openxmlformats.org/drawingml/2006/main">
               <a:ext uri="{FF2B5EF4-FFF2-40B4-BE49-F238E27FC236}">
-                <a16:creationId xmlns:a16="http://schemas.microsoft.com/office/drawing/2014/main" id="{F618B24B-1B1D-494B-AF93-0E7FAEB55AAF}"/>
+                <a16:creationId xmlns:a16="http://schemas.microsoft.com/office/drawing/2014/main" id="{BB0398AD-7D8A-4D13-AA09-E8D4A1EC87C8}"/>
               </a:ext>
             </a:extLst>
           </p:cNvPr>
@@ -6466,7 +6466,7 @@
           <p:cNvPr id="5" name="s6-identity">
             <a:extLst xmlns:a="http://schemas.openxmlformats.org/drawingml/2006/main">
               <a:ext uri="{FF2B5EF4-FFF2-40B4-BE49-F238E27FC236}">
-                <a16:creationId xmlns:a16="http://schemas.microsoft.com/office/drawing/2014/main" id="{0DF9DF54-B70E-4D98-9C90-F9BC49D2D1CE}"/>
+                <a16:creationId xmlns:a16="http://schemas.microsoft.com/office/drawing/2014/main" id="{2A97ABA6-45CF-4687-9451-3CEC872E994E}"/>
               </a:ext>
             </a:extLst>
           </p:cNvPr>
@@ -6524,7 +6524,7 @@
           <p:cNvPr id="6" name="core-no-0">
             <a:extLst xmlns:a="http://schemas.openxmlformats.org/drawingml/2006/main">
               <a:ext uri="{FF2B5EF4-FFF2-40B4-BE49-F238E27FC236}">
-                <a16:creationId xmlns:a16="http://schemas.microsoft.com/office/drawing/2014/main" id="{F9920A68-2EEE-43F3-964F-F6D898820DAA}"/>
+                <a16:creationId xmlns:a16="http://schemas.microsoft.com/office/drawing/2014/main" id="{732C03D1-9628-427F-A1BE-F2D4B6529CDA}"/>
               </a:ext>
             </a:extLst>
           </p:cNvPr>
@@ -6582,7 +6582,7 @@
           <p:cNvPr id="7" name="core-label-0">
             <a:extLst xmlns:a="http://schemas.openxmlformats.org/drawingml/2006/main">
               <a:ext uri="{FF2B5EF4-FFF2-40B4-BE49-F238E27FC236}">
-                <a16:creationId xmlns:a16="http://schemas.microsoft.com/office/drawing/2014/main" id="{7EB6ED6E-8E76-4B8A-9EE7-B72F199ECE60}"/>
+                <a16:creationId xmlns:a16="http://schemas.microsoft.com/office/drawing/2014/main" id="{B805009A-DEF1-4500-8382-A086CCB089DA}"/>
               </a:ext>
             </a:extLst>
           </p:cNvPr>
@@ -6640,7 +6640,7 @@
           <p:cNvPr id="8" name="core-body-0">
             <a:extLst xmlns:a="http://schemas.openxmlformats.org/drawingml/2006/main">
               <a:ext uri="{FF2B5EF4-FFF2-40B4-BE49-F238E27FC236}">
-                <a16:creationId xmlns:a16="http://schemas.microsoft.com/office/drawing/2014/main" id="{022CF044-3217-45D7-90D7-2266B5FAF5C9}"/>
+                <a16:creationId xmlns:a16="http://schemas.microsoft.com/office/drawing/2014/main" id="{38E7C64C-A1BF-41B2-98E2-57918E8ADEE2}"/>
               </a:ext>
             </a:extLst>
           </p:cNvPr>
@@ -6704,7 +6704,7 @@
           <p:cNvPr id="9" name="core-no-1">
             <a:extLst xmlns:a="http://schemas.openxmlformats.org/drawingml/2006/main">
               <a:ext uri="{FF2B5EF4-FFF2-40B4-BE49-F238E27FC236}">
-                <a16:creationId xmlns:a16="http://schemas.microsoft.com/office/drawing/2014/main" id="{8025E188-6549-4E4F-AAE1-C21DDF4FFB55}"/>
+                <a16:creationId xmlns:a16="http://schemas.microsoft.com/office/drawing/2014/main" id="{9B682F21-8487-4EEA-967C-A0A7B6C69E61}"/>
               </a:ext>
             </a:extLst>
           </p:cNvPr>
@@ -6762,7 +6762,7 @@
           <p:cNvPr id="10" name="core-body-1">
             <a:extLst xmlns:a="http://schemas.openxmlformats.org/drawingml/2006/main">
               <a:ext uri="{FF2B5EF4-FFF2-40B4-BE49-F238E27FC236}">
-                <a16:creationId xmlns:a16="http://schemas.microsoft.com/office/drawing/2014/main" id="{51A818FB-2BB4-454D-8E49-3ED7B142E2D1}"/>
+                <a16:creationId xmlns:a16="http://schemas.microsoft.com/office/drawing/2014/main" id="{3F306568-0BF3-45D8-950F-15E12F920AF8}"/>
               </a:ext>
             </a:extLst>
           </p:cNvPr>
@@ -6826,7 +6826,7 @@
           <p:cNvPr id="11" name="s6-takeaway-rule">
             <a:extLst xmlns:a="http://schemas.openxmlformats.org/drawingml/2006/main">
               <a:ext uri="{FF2B5EF4-FFF2-40B4-BE49-F238E27FC236}">
-                <a16:creationId xmlns:a16="http://schemas.microsoft.com/office/drawing/2014/main" id="{B23677FE-BD43-4E3F-B0EC-6D9B513D9132}"/>
+                <a16:creationId xmlns:a16="http://schemas.microsoft.com/office/drawing/2014/main" id="{1D9127EA-A7E9-4996-B946-5BE658175E02}"/>
               </a:ext>
             </a:extLst>
           </p:cNvPr>
@@ -6859,7 +6859,7 @@
           <p:cNvPr id="12" name="s6-takeaway">
             <a:extLst xmlns:a="http://schemas.openxmlformats.org/drawingml/2006/main">
               <a:ext uri="{FF2B5EF4-FFF2-40B4-BE49-F238E27FC236}">
-                <a16:creationId xmlns:a16="http://schemas.microsoft.com/office/drawing/2014/main" id="{211336D5-A057-4B62-9CC1-09E212D12684}"/>
+                <a16:creationId xmlns:a16="http://schemas.microsoft.com/office/drawing/2014/main" id="{EAE7FD21-2155-4DE6-8DA0-119BBEBFD8CA}"/>
               </a:ext>
             </a:extLst>
           </p:cNvPr>
@@ -6915,7 +6915,7 @@
     </p:spTree>
     <p:extLst>
       <p:ext uri="{BB962C8B-B14F-4D97-AF65-F5344CB8AC3E}">
-        <p14:creationId xmlns:p14="http://schemas.microsoft.com/office/powerpoint/2010/main" val="1683213846"/>
+        <p14:creationId xmlns:p14="http://schemas.microsoft.com/office/powerpoint/2010/main" val="4497211"/>
       </p:ext>
     </p:extLst>
   </p:cSld>
@@ -6946,7 +6946,7 @@
           <p:cNvPr id="1" name="s7-rule">
             <a:extLst xmlns:a="http://schemas.openxmlformats.org/drawingml/2006/main">
               <a:ext uri="{FF2B5EF4-FFF2-40B4-BE49-F238E27FC236}">
-                <a16:creationId xmlns:a16="http://schemas.microsoft.com/office/drawing/2014/main" id="{93CF2717-5ECC-4E0C-8481-569E9AF08389}"/>
+                <a16:creationId xmlns:a16="http://schemas.microsoft.com/office/drawing/2014/main" id="{5035E310-1FD2-4ADA-9982-E0F29FA78A94}"/>
               </a:ext>
             </a:extLst>
           </p:cNvPr>
@@ -6979,7 +6979,7 @@
           <p:cNvPr id="2" name="s7-eyebrow">
             <a:extLst xmlns:a="http://schemas.openxmlformats.org/drawingml/2006/main">
               <a:ext uri="{FF2B5EF4-FFF2-40B4-BE49-F238E27FC236}">
-                <a16:creationId xmlns:a16="http://schemas.microsoft.com/office/drawing/2014/main" id="{6F2D6541-415A-4CDD-8A52-8C4060E80519}"/>
+                <a16:creationId xmlns:a16="http://schemas.microsoft.com/office/drawing/2014/main" id="{C2398F72-6DE5-4988-B318-434404F89442}"/>
               </a:ext>
             </a:extLst>
           </p:cNvPr>
@@ -7037,7 +7037,7 @@
           <p:cNvPr id="3" name="s7-title">
             <a:extLst xmlns:a="http://schemas.openxmlformats.org/drawingml/2006/main">
               <a:ext uri="{FF2B5EF4-FFF2-40B4-BE49-F238E27FC236}">
-                <a16:creationId xmlns:a16="http://schemas.microsoft.com/office/drawing/2014/main" id="{611E138F-1943-4B05-896F-20E8D575BDB5}"/>
+                <a16:creationId xmlns:a16="http://schemas.microsoft.com/office/drawing/2014/main" id="{37B30E5C-399C-4CF8-80DB-D5931E67F691}"/>
               </a:ext>
             </a:extLst>
           </p:cNvPr>
@@ -7095,7 +7095,7 @@
           <p:cNvPr id="4" name="s7-footer">
             <a:extLst xmlns:a="http://schemas.openxmlformats.org/drawingml/2006/main">
               <a:ext uri="{FF2B5EF4-FFF2-40B4-BE49-F238E27FC236}">
-                <a16:creationId xmlns:a16="http://schemas.microsoft.com/office/drawing/2014/main" id="{E5BF872E-83B8-417B-A8CE-DA5DB497C05B}"/>
+                <a16:creationId xmlns:a16="http://schemas.microsoft.com/office/drawing/2014/main" id="{99C08192-4940-403E-9A3F-4694A5DCFC24}"/>
               </a:ext>
             </a:extLst>
           </p:cNvPr>
@@ -7126,7 +7126,7 @@
           <p:cNvPr id="5" name="s7-identity">
             <a:extLst xmlns:a="http://schemas.openxmlformats.org/drawingml/2006/main">
               <a:ext uri="{FF2B5EF4-FFF2-40B4-BE49-F238E27FC236}">
-                <a16:creationId xmlns:a16="http://schemas.microsoft.com/office/drawing/2014/main" id="{030A3F3A-109C-4253-A3C2-2E44D220BF22}"/>
+                <a16:creationId xmlns:a16="http://schemas.microsoft.com/office/drawing/2014/main" id="{B3111D9B-0A56-43C4-B68B-A8A4116F3513}"/>
               </a:ext>
             </a:extLst>
           </p:cNvPr>
@@ -7184,7 +7184,7 @@
           <p:cNvPr id="6" name="core-no-0">
             <a:extLst xmlns:a="http://schemas.openxmlformats.org/drawingml/2006/main">
               <a:ext uri="{FF2B5EF4-FFF2-40B4-BE49-F238E27FC236}">
-                <a16:creationId xmlns:a16="http://schemas.microsoft.com/office/drawing/2014/main" id="{684C5771-14E6-4CC2-981E-6363471AAF48}"/>
+                <a16:creationId xmlns:a16="http://schemas.microsoft.com/office/drawing/2014/main" id="{3FF990FF-1741-4392-8851-5CAA243204C8}"/>
               </a:ext>
             </a:extLst>
           </p:cNvPr>
@@ -7242,7 +7242,7 @@
           <p:cNvPr id="7" name="core-label-0">
             <a:extLst xmlns:a="http://schemas.openxmlformats.org/drawingml/2006/main">
               <a:ext uri="{FF2B5EF4-FFF2-40B4-BE49-F238E27FC236}">
-                <a16:creationId xmlns:a16="http://schemas.microsoft.com/office/drawing/2014/main" id="{279C7D19-E0DD-4FA9-BB49-CDDCA4BCFA92}"/>
+                <a16:creationId xmlns:a16="http://schemas.microsoft.com/office/drawing/2014/main" id="{38B64B12-1BFD-4BC7-9C11-BC6E3ACA845F}"/>
               </a:ext>
             </a:extLst>
           </p:cNvPr>
@@ -7300,7 +7300,7 @@
           <p:cNvPr id="8" name="core-body-0">
             <a:extLst xmlns:a="http://schemas.openxmlformats.org/drawingml/2006/main">
               <a:ext uri="{FF2B5EF4-FFF2-40B4-BE49-F238E27FC236}">
-                <a16:creationId xmlns:a16="http://schemas.microsoft.com/office/drawing/2014/main" id="{38C79694-F10C-45F3-9BB7-1C27DCAF104A}"/>
+                <a16:creationId xmlns:a16="http://schemas.microsoft.com/office/drawing/2014/main" id="{7C158CF9-AF7A-4ABD-8C93-A595EB416566}"/>
               </a:ext>
             </a:extLst>
           </p:cNvPr>
@@ -7364,7 +7364,7 @@
           <p:cNvPr id="9" name="core-no-1">
             <a:extLst xmlns:a="http://schemas.openxmlformats.org/drawingml/2006/main">
               <a:ext uri="{FF2B5EF4-FFF2-40B4-BE49-F238E27FC236}">
-                <a16:creationId xmlns:a16="http://schemas.microsoft.com/office/drawing/2014/main" id="{5340DA50-3A30-4F8C-BB5D-8BF5648B04AE}"/>
+                <a16:creationId xmlns:a16="http://schemas.microsoft.com/office/drawing/2014/main" id="{12CD7B85-A304-4DB3-9A6A-2C684A2EEDF1}"/>
               </a:ext>
             </a:extLst>
           </p:cNvPr>
@@ -7422,7 +7422,7 @@
           <p:cNvPr id="10" name="core-body-1">
             <a:extLst xmlns:a="http://schemas.openxmlformats.org/drawingml/2006/main">
               <a:ext uri="{FF2B5EF4-FFF2-40B4-BE49-F238E27FC236}">
-                <a16:creationId xmlns:a16="http://schemas.microsoft.com/office/drawing/2014/main" id="{FAC73444-BFE5-4DF8-B9F3-E6EA02348308}"/>
+                <a16:creationId xmlns:a16="http://schemas.microsoft.com/office/drawing/2014/main" id="{9B15D696-FB76-47EC-937B-B00CA5D97CE7}"/>
               </a:ext>
             </a:extLst>
           </p:cNvPr>
@@ -7486,7 +7486,7 @@
           <p:cNvPr id="11" name="s7-takeaway-rule">
             <a:extLst xmlns:a="http://schemas.openxmlformats.org/drawingml/2006/main">
               <a:ext uri="{FF2B5EF4-FFF2-40B4-BE49-F238E27FC236}">
-                <a16:creationId xmlns:a16="http://schemas.microsoft.com/office/drawing/2014/main" id="{EBCEACD6-C789-4A10-8FD0-32B2AECD5C7D}"/>
+                <a16:creationId xmlns:a16="http://schemas.microsoft.com/office/drawing/2014/main" id="{02496E85-ADD0-4ED6-84C9-D9AB528B75AB}"/>
               </a:ext>
             </a:extLst>
           </p:cNvPr>
@@ -7519,7 +7519,7 @@
           <p:cNvPr id="12" name="s7-takeaway">
             <a:extLst xmlns:a="http://schemas.openxmlformats.org/drawingml/2006/main">
               <a:ext uri="{FF2B5EF4-FFF2-40B4-BE49-F238E27FC236}">
-                <a16:creationId xmlns:a16="http://schemas.microsoft.com/office/drawing/2014/main" id="{4D02180D-3442-4E86-B509-42A85FF6B0B7}"/>
+                <a16:creationId xmlns:a16="http://schemas.microsoft.com/office/drawing/2014/main" id="{808F0192-97CC-4988-AF70-4A3F149BA1CB}"/>
               </a:ext>
             </a:extLst>
           </p:cNvPr>
@@ -7575,7 +7575,7 @@
     </p:spTree>
     <p:extLst>
       <p:ext uri="{BB962C8B-B14F-4D97-AF65-F5344CB8AC3E}">
-        <p14:creationId xmlns:p14="http://schemas.microsoft.com/office/powerpoint/2010/main" val="1361776541"/>
+        <p14:creationId xmlns:p14="http://schemas.microsoft.com/office/powerpoint/2010/main" val="784718333"/>
       </p:ext>
     </p:extLst>
   </p:cSld>
@@ -7606,7 +7606,7 @@
           <p:cNvPr id="1" name="s8-rule">
             <a:extLst xmlns:a="http://schemas.openxmlformats.org/drawingml/2006/main">
               <a:ext uri="{FF2B5EF4-FFF2-40B4-BE49-F238E27FC236}">
-                <a16:creationId xmlns:a16="http://schemas.microsoft.com/office/drawing/2014/main" id="{4575C424-5F31-4DE8-ADC7-31181B73F916}"/>
+                <a16:creationId xmlns:a16="http://schemas.microsoft.com/office/drawing/2014/main" id="{AE64C849-A0E8-47E3-AD0B-29E812D6E9A2}"/>
               </a:ext>
             </a:extLst>
           </p:cNvPr>
@@ -7639,7 +7639,7 @@
           <p:cNvPr id="2" name="s8-eyebrow">
             <a:extLst xmlns:a="http://schemas.openxmlformats.org/drawingml/2006/main">
               <a:ext uri="{FF2B5EF4-FFF2-40B4-BE49-F238E27FC236}">
-                <a16:creationId xmlns:a16="http://schemas.microsoft.com/office/drawing/2014/main" id="{A693496B-106F-455E-BEFF-28D518310D40}"/>
+                <a16:creationId xmlns:a16="http://schemas.microsoft.com/office/drawing/2014/main" id="{EC71160E-EA52-4E69-80A4-ACFFDE1DED88}"/>
               </a:ext>
             </a:extLst>
           </p:cNvPr>
@@ -7697,7 +7697,7 @@
           <p:cNvPr id="3" name="s8-title">
             <a:extLst xmlns:a="http://schemas.openxmlformats.org/drawingml/2006/main">
               <a:ext uri="{FF2B5EF4-FFF2-40B4-BE49-F238E27FC236}">
-                <a16:creationId xmlns:a16="http://schemas.microsoft.com/office/drawing/2014/main" id="{1C69B514-0C62-4CDB-9AFD-AFDD63171581}"/>
+                <a16:creationId xmlns:a16="http://schemas.microsoft.com/office/drawing/2014/main" id="{395E0ABA-CE9E-4861-AF59-56B4B2B8C5E6}"/>
               </a:ext>
             </a:extLst>
           </p:cNvPr>
@@ -7755,7 +7755,7 @@
           <p:cNvPr id="4" name="s8-footer">
             <a:extLst xmlns:a="http://schemas.openxmlformats.org/drawingml/2006/main">
               <a:ext uri="{FF2B5EF4-FFF2-40B4-BE49-F238E27FC236}">
-                <a16:creationId xmlns:a16="http://schemas.microsoft.com/office/drawing/2014/main" id="{4E559A45-D89C-4405-89D5-1DE25BB4F847}"/>
+                <a16:creationId xmlns:a16="http://schemas.microsoft.com/office/drawing/2014/main" id="{D4E85449-BE91-4241-8525-BA6F1498DBDA}"/>
               </a:ext>
             </a:extLst>
           </p:cNvPr>
@@ -7786,7 +7786,7 @@
           <p:cNvPr id="5" name="s8-identity">
             <a:extLst xmlns:a="http://schemas.openxmlformats.org/drawingml/2006/main">
               <a:ext uri="{FF2B5EF4-FFF2-40B4-BE49-F238E27FC236}">
-                <a16:creationId xmlns:a16="http://schemas.microsoft.com/office/drawing/2014/main" id="{46A1448B-55C5-4EBC-8820-4D1B13392899}"/>
+                <a16:creationId xmlns:a16="http://schemas.microsoft.com/office/drawing/2014/main" id="{F78837C0-7975-4D27-B902-DAF9835EF97D}"/>
               </a:ext>
             </a:extLst>
           </p:cNvPr>
@@ -7844,7 +7844,7 @@
           <p:cNvPr id="6" name="case-title">
             <a:extLst xmlns:a="http://schemas.openxmlformats.org/drawingml/2006/main">
               <a:ext uri="{FF2B5EF4-FFF2-40B4-BE49-F238E27FC236}">
-                <a16:creationId xmlns:a16="http://schemas.microsoft.com/office/drawing/2014/main" id="{0C285EE9-16E1-4260-AEEE-8A14046D63F7}"/>
+                <a16:creationId xmlns:a16="http://schemas.microsoft.com/office/drawing/2014/main" id="{AF9044B3-5492-4E4C-ADAF-2EBA094E8E48}"/>
               </a:ext>
             </a:extLst>
           </p:cNvPr>
@@ -7908,7 +7908,7 @@
           <p:cNvPr id="7" name="case-row-0">
             <a:extLst xmlns:a="http://schemas.openxmlformats.org/drawingml/2006/main">
               <a:ext uri="{FF2B5EF4-FFF2-40B4-BE49-F238E27FC236}">
-                <a16:creationId xmlns:a16="http://schemas.microsoft.com/office/drawing/2014/main" id="{DF4A2717-2416-4B58-97AC-C063FC96050B}"/>
+                <a16:creationId xmlns:a16="http://schemas.microsoft.com/office/drawing/2014/main" id="{E3318A72-8786-4F6E-B0EA-A7229EADBEA5}"/>
               </a:ext>
             </a:extLst>
           </p:cNvPr>
@@ -7972,7 +7972,7 @@
           <p:cNvPr id="8" name="case-row-1">
             <a:extLst xmlns:a="http://schemas.openxmlformats.org/drawingml/2006/main">
               <a:ext uri="{FF2B5EF4-FFF2-40B4-BE49-F238E27FC236}">
-                <a16:creationId xmlns:a16="http://schemas.microsoft.com/office/drawing/2014/main" id="{05B9D5C9-1B0F-4394-8A38-14D7D3B73AA2}"/>
+                <a16:creationId xmlns:a16="http://schemas.microsoft.com/office/drawing/2014/main" id="{C344CF08-0A63-4A55-B488-0B909B0632C2}"/>
               </a:ext>
             </a:extLst>
           </p:cNvPr>
@@ -8036,7 +8036,7 @@
           <p:cNvPr id="9" name="case-row-2">
             <a:extLst xmlns:a="http://schemas.openxmlformats.org/drawingml/2006/main">
               <a:ext uri="{FF2B5EF4-FFF2-40B4-BE49-F238E27FC236}">
-                <a16:creationId xmlns:a16="http://schemas.microsoft.com/office/drawing/2014/main" id="{C854A3CC-030C-4390-A222-1904D0B387B6}"/>
+                <a16:creationId xmlns:a16="http://schemas.microsoft.com/office/drawing/2014/main" id="{954796C4-7026-4C4E-A764-8716FC8857A4}"/>
               </a:ext>
             </a:extLst>
           </p:cNvPr>
@@ -8100,7 +8100,7 @@
           <p:cNvPr id="10" name="case-row-3">
             <a:extLst xmlns:a="http://schemas.openxmlformats.org/drawingml/2006/main">
               <a:ext uri="{FF2B5EF4-FFF2-40B4-BE49-F238E27FC236}">
-                <a16:creationId xmlns:a16="http://schemas.microsoft.com/office/drawing/2014/main" id="{9BAB1027-1853-43E1-8A1E-9A549280C7C0}"/>
+                <a16:creationId xmlns:a16="http://schemas.microsoft.com/office/drawing/2014/main" id="{28A4E0ED-0CF6-4B41-8F1B-E463C6626C4D}"/>
               </a:ext>
             </a:extLst>
           </p:cNvPr>
@@ -8164,7 +8164,7 @@
           <p:cNvPr id="11" name="case-row-4">
             <a:extLst xmlns:a="http://schemas.openxmlformats.org/drawingml/2006/main">
               <a:ext uri="{FF2B5EF4-FFF2-40B4-BE49-F238E27FC236}">
-                <a16:creationId xmlns:a16="http://schemas.microsoft.com/office/drawing/2014/main" id="{289D0799-F579-4A16-AB93-D65B9D9BFAEE}"/>
+                <a16:creationId xmlns:a16="http://schemas.microsoft.com/office/drawing/2014/main" id="{AB26A648-A933-41B4-94D0-0573DC74C6D3}"/>
               </a:ext>
             </a:extLst>
           </p:cNvPr>
@@ -8228,7 +8228,7 @@
           <p:cNvPr id="12" name="s8-takeaway-rule">
             <a:extLst xmlns:a="http://schemas.openxmlformats.org/drawingml/2006/main">
               <a:ext uri="{FF2B5EF4-FFF2-40B4-BE49-F238E27FC236}">
-                <a16:creationId xmlns:a16="http://schemas.microsoft.com/office/drawing/2014/main" id="{F2E07655-8098-4F80-888A-D63DFBD52D5B}"/>
+                <a16:creationId xmlns:a16="http://schemas.microsoft.com/office/drawing/2014/main" id="{4A13D0C5-8994-4AAC-A623-1D9DA91B5381}"/>
               </a:ext>
             </a:extLst>
           </p:cNvPr>
@@ -8261,7 +8261,7 @@
           <p:cNvPr id="13" name="s8-takeaway">
             <a:extLst xmlns:a="http://schemas.openxmlformats.org/drawingml/2006/main">
               <a:ext uri="{FF2B5EF4-FFF2-40B4-BE49-F238E27FC236}">
-                <a16:creationId xmlns:a16="http://schemas.microsoft.com/office/drawing/2014/main" id="{95AD7050-AB6E-4495-A66E-9AA44A8FB9F9}"/>
+                <a16:creationId xmlns:a16="http://schemas.microsoft.com/office/drawing/2014/main" id="{92F6AC6E-8BD8-45E7-8981-29F92299EC87}"/>
               </a:ext>
             </a:extLst>
           </p:cNvPr>
@@ -8317,7 +8317,7 @@
     </p:spTree>
     <p:extLst>
       <p:ext uri="{BB962C8B-B14F-4D97-AF65-F5344CB8AC3E}">
-        <p14:creationId xmlns:p14="http://schemas.microsoft.com/office/powerpoint/2010/main" val="1983731954"/>
+        <p14:creationId xmlns:p14="http://schemas.microsoft.com/office/powerpoint/2010/main" val="114930610"/>
       </p:ext>
     </p:extLst>
   </p:cSld>
@@ -8348,7 +8348,7 @@
           <p:cNvPr id="1" name="s9-rule">
             <a:extLst xmlns:a="http://schemas.openxmlformats.org/drawingml/2006/main">
               <a:ext uri="{FF2B5EF4-FFF2-40B4-BE49-F238E27FC236}">
-                <a16:creationId xmlns:a16="http://schemas.microsoft.com/office/drawing/2014/main" id="{09ED3ADF-319D-46A2-AD3C-C95305AD074B}"/>
+                <a16:creationId xmlns:a16="http://schemas.microsoft.com/office/drawing/2014/main" id="{45D5036F-C875-4656-A085-050CC77867D8}"/>
               </a:ext>
             </a:extLst>
           </p:cNvPr>
@@ -8381,7 +8381,7 @@
           <p:cNvPr id="2" name="s9-eyebrow">
             <a:extLst xmlns:a="http://schemas.openxmlformats.org/drawingml/2006/main">
               <a:ext uri="{FF2B5EF4-FFF2-40B4-BE49-F238E27FC236}">
-                <a16:creationId xmlns:a16="http://schemas.microsoft.com/office/drawing/2014/main" id="{C7EAB9BB-706F-49C3-99BB-E5A4A75C2BED}"/>
+                <a16:creationId xmlns:a16="http://schemas.microsoft.com/office/drawing/2014/main" id="{F33BA51C-39C6-4363-9EB2-FC602F32B263}"/>
               </a:ext>
             </a:extLst>
           </p:cNvPr>
@@ -8439,7 +8439,7 @@
           <p:cNvPr id="3" name="s9-title">
             <a:extLst xmlns:a="http://schemas.openxmlformats.org/drawingml/2006/main">
               <a:ext uri="{FF2B5EF4-FFF2-40B4-BE49-F238E27FC236}">
-                <a16:creationId xmlns:a16="http://schemas.microsoft.com/office/drawing/2014/main" id="{503370A4-94E5-487C-8CDD-656B130E1EA4}"/>
+                <a16:creationId xmlns:a16="http://schemas.microsoft.com/office/drawing/2014/main" id="{7AA07E38-C43A-4776-AFC1-993176B9ECF2}"/>
               </a:ext>
             </a:extLst>
           </p:cNvPr>
@@ -8497,7 +8497,7 @@
           <p:cNvPr id="4" name="s9-footer">
             <a:extLst xmlns:a="http://schemas.openxmlformats.org/drawingml/2006/main">
               <a:ext uri="{FF2B5EF4-FFF2-40B4-BE49-F238E27FC236}">
-                <a16:creationId xmlns:a16="http://schemas.microsoft.com/office/drawing/2014/main" id="{EED57A60-C0EE-4B8D-A540-A07063BB24A9}"/>
+                <a16:creationId xmlns:a16="http://schemas.microsoft.com/office/drawing/2014/main" id="{EC4E5427-0F9F-4374-A0B9-B8EB458D3690}"/>
               </a:ext>
             </a:extLst>
           </p:cNvPr>
@@ -8528,7 +8528,7 @@
           <p:cNvPr id="5" name="s9-identity">
             <a:extLst xmlns:a="http://schemas.openxmlformats.org/drawingml/2006/main">
               <a:ext uri="{FF2B5EF4-FFF2-40B4-BE49-F238E27FC236}">
-                <a16:creationId xmlns:a16="http://schemas.microsoft.com/office/drawing/2014/main" id="{D9132D1D-15AF-4C2F-9DE6-833AB7DEBCAF}"/>
+                <a16:creationId xmlns:a16="http://schemas.microsoft.com/office/drawing/2014/main" id="{A6AA5D37-0A0F-4347-A15E-0F75B8BA286A}"/>
               </a:ext>
             </a:extLst>
           </p:cNvPr>
@@ -8586,7 +8586,7 @@
           <p:cNvPr id="6" name="practice-circle-0">
             <a:extLst xmlns:a="http://schemas.openxmlformats.org/drawingml/2006/main">
               <a:ext uri="{FF2B5EF4-FFF2-40B4-BE49-F238E27FC236}">
-                <a16:creationId xmlns:a16="http://schemas.microsoft.com/office/drawing/2014/main" id="{863752BC-D313-4DF9-8282-AFF39CB3E097}"/>
+                <a16:creationId xmlns:a16="http://schemas.microsoft.com/office/drawing/2014/main" id="{1C83980B-B4CC-4D15-97C6-5EED6DD845C1}"/>
               </a:ext>
             </a:extLst>
           </p:cNvPr>
@@ -8619,7 +8619,7 @@
           <p:cNvPr id="7" name="practice-number-0">
             <a:extLst xmlns:a="http://schemas.openxmlformats.org/drawingml/2006/main">
               <a:ext uri="{FF2B5EF4-FFF2-40B4-BE49-F238E27FC236}">
-                <a16:creationId xmlns:a16="http://schemas.microsoft.com/office/drawing/2014/main" id="{5DD256D2-BD26-4A08-BE52-3F00F8D60DCB}"/>
+                <a16:creationId xmlns:a16="http://schemas.microsoft.com/office/drawing/2014/main" id="{C4EB4F14-97C1-4B1E-85E7-3083E5F67BD9}"/>
               </a:ext>
             </a:extLst>
           </p:cNvPr>
@@ -8677,7 +8677,7 @@
           <p:cNvPr id="8" name="practice-item-0">
             <a:extLst xmlns:a="http://schemas.openxmlformats.org/drawingml/2006/main">
               <a:ext uri="{FF2B5EF4-FFF2-40B4-BE49-F238E27FC236}">
-                <a16:creationId xmlns:a16="http://schemas.microsoft.com/office/drawing/2014/main" id="{C8112793-C0F4-46D7-8C4A-5846555DE842}"/>
+                <a16:creationId xmlns:a16="http://schemas.microsoft.com/office/drawing/2014/main" id="{59053F53-D35D-4544-99C5-1C61D640CE02}"/>
               </a:ext>
             </a:extLst>
           </p:cNvPr>
@@ -8741,7 +8741,7 @@
           <p:cNvPr id="9" name="practice-connector-0">
             <a:extLst xmlns:a="http://schemas.openxmlformats.org/drawingml/2006/main">
               <a:ext uri="{FF2B5EF4-FFF2-40B4-BE49-F238E27FC236}">
-                <a16:creationId xmlns:a16="http://schemas.microsoft.com/office/drawing/2014/main" id="{5134E50C-BDE3-4347-AA68-E54BD6EE3F6A}"/>
+                <a16:creationId xmlns:a16="http://schemas.microsoft.com/office/drawing/2014/main" id="{29759D1F-8ECA-48E5-A49A-5FC22F94A8C4}"/>
               </a:ext>
             </a:extLst>
           </p:cNvPr>
@@ -8772,7 +8772,7 @@
           <p:cNvPr id="10" name="practice-circle-1">
             <a:extLst xmlns:a="http://schemas.openxmlformats.org/drawingml/2006/main">
               <a:ext uri="{FF2B5EF4-FFF2-40B4-BE49-F238E27FC236}">
-                <a16:creationId xmlns:a16="http://schemas.microsoft.com/office/drawing/2014/main" id="{61AEDCCC-BFE2-4B09-B452-73C21CA420F9}"/>
+                <a16:creationId xmlns:a16="http://schemas.microsoft.com/office/drawing/2014/main" id="{E7BEB486-AE30-433F-BF0A-4F6F63B12816}"/>
               </a:ext>
             </a:extLst>
           </p:cNvPr>
@@ -8805,7 +8805,7 @@
           <p:cNvPr id="11" name="practice-number-1">
             <a:extLst xmlns:a="http://schemas.openxmlformats.org/drawingml/2006/main">
               <a:ext uri="{FF2B5EF4-FFF2-40B4-BE49-F238E27FC236}">
-                <a16:creationId xmlns:a16="http://schemas.microsoft.com/office/drawing/2014/main" id="{AE7B1EC6-096D-4DCF-9E00-0408230BEDAA}"/>
+                <a16:creationId xmlns:a16="http://schemas.microsoft.com/office/drawing/2014/main" id="{28AD92EE-E1CF-4F69-A3A4-880F8C158119}"/>
               </a:ext>
             </a:extLst>
           </p:cNvPr>
@@ -8863,7 +8863,7 @@
           <p:cNvPr id="12" name="practice-item-1">
             <a:extLst xmlns:a="http://schemas.openxmlformats.org/drawingml/2006/main">
               <a:ext uri="{FF2B5EF4-FFF2-40B4-BE49-F238E27FC236}">
-                <a16:creationId xmlns:a16="http://schemas.microsoft.com/office/drawing/2014/main" id="{B5A107D3-C65C-450B-89E2-8FE5C3E878D1}"/>
+                <a16:creationId xmlns:a16="http://schemas.microsoft.com/office/drawing/2014/main" id="{5A21F307-06E2-4CAB-AE69-3FAB8C32FE93}"/>
               </a:ext>
             </a:extLst>
           </p:cNvPr>
@@ -8927,7 +8927,7 @@
           <p:cNvPr id="13" name="practice-connector-1">
             <a:extLst xmlns:a="http://schemas.openxmlformats.org/drawingml/2006/main">
               <a:ext uri="{FF2B5EF4-FFF2-40B4-BE49-F238E27FC236}">
-                <a16:creationId xmlns:a16="http://schemas.microsoft.com/office/drawing/2014/main" id="{0591181D-67CB-4BF7-82CC-EEC9AB8CA01F}"/>
+                <a16:creationId xmlns:a16="http://schemas.microsoft.com/office/drawing/2014/main" id="{39481BB0-FA3C-48B8-B398-A69F1BF74C90}"/>
               </a:ext>
             </a:extLst>
           </p:cNvPr>
@@ -8958,7 +8958,7 @@
           <p:cNvPr id="14" name="practice-circle-2">
             <a:extLst xmlns:a="http://schemas.openxmlformats.org/drawingml/2006/main">
               <a:ext uri="{FF2B5EF4-FFF2-40B4-BE49-F238E27FC236}">
-                <a16:creationId xmlns:a16="http://schemas.microsoft.com/office/drawing/2014/main" id="{A5D27D76-DFB3-4FC7-B6AB-F4E58B85EFC9}"/>
+                <a16:creationId xmlns:a16="http://schemas.microsoft.com/office/drawing/2014/main" id="{59D0F7FD-C1FF-4D5F-92DC-3EF2770A64AB}"/>
               </a:ext>
             </a:extLst>
           </p:cNvPr>
@@ -8991,7 +8991,7 @@
           <p:cNvPr id="15" name="practice-number-2">
             <a:extLst xmlns:a="http://schemas.openxmlformats.org/drawingml/2006/main">
               <a:ext uri="{FF2B5EF4-FFF2-40B4-BE49-F238E27FC236}">
-                <a16:creationId xmlns:a16="http://schemas.microsoft.com/office/drawing/2014/main" id="{13365813-F7D6-45CE-B806-E7B2AE574984}"/>
+                <a16:creationId xmlns:a16="http://schemas.microsoft.com/office/drawing/2014/main" id="{C6834F26-BA6D-434D-9211-7B98C8057627}"/>
               </a:ext>
             </a:extLst>
           </p:cNvPr>
@@ -9049,7 +9049,7 @@
           <p:cNvPr id="16" name="practice-item-2">
             <a:extLst xmlns:a="http://schemas.openxmlformats.org/drawingml/2006/main">
               <a:ext uri="{FF2B5EF4-FFF2-40B4-BE49-F238E27FC236}">
-                <a16:creationId xmlns:a16="http://schemas.microsoft.com/office/drawing/2014/main" id="{098CB56C-9ADE-4A4E-819A-2339E4FD0A04}"/>
+                <a16:creationId xmlns:a16="http://schemas.microsoft.com/office/drawing/2014/main" id="{78A674E3-AA74-4D50-9327-03B2B49C2398}"/>
               </a:ext>
             </a:extLst>
           </p:cNvPr>
@@ -9111,7 +9111,7 @@
     </p:spTree>
     <p:extLst>
       <p:ext uri="{BB962C8B-B14F-4D97-AF65-F5344CB8AC3E}">
-        <p14:creationId xmlns:p14="http://schemas.microsoft.com/office/powerpoint/2010/main" val="1968956447"/>
+        <p14:creationId xmlns:p14="http://schemas.microsoft.com/office/powerpoint/2010/main" val="808941137"/>
       </p:ext>
     </p:extLst>
   </p:cSld>

--- a/docs/public/course-assets/course-pptx/em-003.pptx
+++ b/docs/public/course-assets/course-pptx/em-003.pptx
@@ -2,23 +2,23 @@
 <file path=ppt/presentation.xml><?xml version="1.0" encoding="utf-8"?>
 <p:presentation xmlns:p="http://schemas.openxmlformats.org/presentationml/2006/main">
   <p:sldMasterIdLst>
-    <p:sldMasterId xmlns:r="http://schemas.openxmlformats.org/officeDocument/2006/relationships" id="2147483648" r:id="Raff68dedb6314df6"/>
+    <p:sldMasterId xmlns:r="http://schemas.openxmlformats.org/officeDocument/2006/relationships" id="2147483648" r:id="R142e50ded0cc4fc1"/>
   </p:sldMasterIdLst>
   <p:notesMasterIdLst>
-    <p:notesMasterId xmlns:r="http://schemas.openxmlformats.org/officeDocument/2006/relationships" r:id="Rd7c6f65248b14c2d"/>
+    <p:notesMasterId xmlns:r="http://schemas.openxmlformats.org/officeDocument/2006/relationships" r:id="R01f5c08b2f594032"/>
   </p:notesMasterIdLst>
   <p:sldIdLst>
-    <p:sldId xmlns:r="http://schemas.openxmlformats.org/officeDocument/2006/relationships" id="256" r:id="Ra3efe9b3bceb4630"/>
-    <p:sldId xmlns:r="http://schemas.openxmlformats.org/officeDocument/2006/relationships" id="257" r:id="Rc9960636e41b4de5"/>
-    <p:sldId xmlns:r="http://schemas.openxmlformats.org/officeDocument/2006/relationships" id="258" r:id="Rededd0d4baf24e47"/>
-    <p:sldId xmlns:r="http://schemas.openxmlformats.org/officeDocument/2006/relationships" id="259" r:id="Rfaccec73569f4b51"/>
-    <p:sldId xmlns:r="http://schemas.openxmlformats.org/officeDocument/2006/relationships" id="260" r:id="R17a4c402bcfc4b2f"/>
-    <p:sldId xmlns:r="http://schemas.openxmlformats.org/officeDocument/2006/relationships" id="261" r:id="R7757a02767b34795"/>
-    <p:sldId xmlns:r="http://schemas.openxmlformats.org/officeDocument/2006/relationships" id="262" r:id="Rc377eafa2658418a"/>
-    <p:sldId xmlns:r="http://schemas.openxmlformats.org/officeDocument/2006/relationships" id="263" r:id="Re7b62e88815348aa"/>
-    <p:sldId xmlns:r="http://schemas.openxmlformats.org/officeDocument/2006/relationships" id="264" r:id="R2ab8ecd5020e4c99"/>
-    <p:sldId xmlns:r="http://schemas.openxmlformats.org/officeDocument/2006/relationships" id="265" r:id="R4a90011c9d954ffa"/>
-    <p:sldId xmlns:r="http://schemas.openxmlformats.org/officeDocument/2006/relationships" id="266" r:id="R7a1abe912fe14048"/>
+    <p:sldId xmlns:r="http://schemas.openxmlformats.org/officeDocument/2006/relationships" id="256" r:id="Ra9eec940586a4a2a"/>
+    <p:sldId xmlns:r="http://schemas.openxmlformats.org/officeDocument/2006/relationships" id="257" r:id="R3a72df981cd04ca9"/>
+    <p:sldId xmlns:r="http://schemas.openxmlformats.org/officeDocument/2006/relationships" id="258" r:id="Refb2d3ff1abf461f"/>
+    <p:sldId xmlns:r="http://schemas.openxmlformats.org/officeDocument/2006/relationships" id="259" r:id="Rc90fca3cdccb40d8"/>
+    <p:sldId xmlns:r="http://schemas.openxmlformats.org/officeDocument/2006/relationships" id="260" r:id="R6fd3185f6e0444e7"/>
+    <p:sldId xmlns:r="http://schemas.openxmlformats.org/officeDocument/2006/relationships" id="261" r:id="Rcc607955a8b64c41"/>
+    <p:sldId xmlns:r="http://schemas.openxmlformats.org/officeDocument/2006/relationships" id="262" r:id="R296399a042014564"/>
+    <p:sldId xmlns:r="http://schemas.openxmlformats.org/officeDocument/2006/relationships" id="263" r:id="R3b318d9e24664578"/>
+    <p:sldId xmlns:r="http://schemas.openxmlformats.org/officeDocument/2006/relationships" id="264" r:id="R08e2db64798b40cf"/>
+    <p:sldId xmlns:r="http://schemas.openxmlformats.org/officeDocument/2006/relationships" id="265" r:id="R738605cdc0c745d2"/>
+    <p:sldId xmlns:r="http://schemas.openxmlformats.org/officeDocument/2006/relationships" id="266" r:id="Rf320588935604867"/>
   </p:sldIdLst>
   <p:sldSz cx="12192000" cy="6858000"/>
   <p:notesSz cx="6858000" cy="9144000"/>
@@ -1271,7 +1271,7 @@
   </p:cSld>
   <p:clrMap bg1="lt1" tx1="dk1" bg2="lt2" tx2="dk2" accent1="accent1" accent2="accent2" accent3="accent3" accent4="accent4" accent5="accent5" accent6="accent6" hlink="hlink" folHlink="folHlink"/>
   <p:sldLayoutIdLst>
-    <p:sldLayoutId xmlns:r="http://schemas.openxmlformats.org/officeDocument/2006/relationships" id="2147483649" r:id="R5ff033ed175f4186"/>
+    <p:sldLayoutId xmlns:r="http://schemas.openxmlformats.org/officeDocument/2006/relationships" id="2147483649" r:id="R7311895f3e994628"/>
   </p:sldLayoutIdLst>
   <p:txStyles>
     <p:titleStyle>
@@ -1822,7 +1822,7 @@
           <p:cNvPr id="1" name="cover-rule">
             <a:extLst xmlns:a="http://schemas.openxmlformats.org/drawingml/2006/main">
               <a:ext uri="{FF2B5EF4-FFF2-40B4-BE49-F238E27FC236}">
-                <a16:creationId xmlns:a16="http://schemas.microsoft.com/office/drawing/2014/main" id="{526F9FFD-3FA1-4B95-9B38-C3B457720677}"/>
+                <a16:creationId xmlns:a16="http://schemas.microsoft.com/office/drawing/2014/main" id="{736E8EC2-02B9-4B7D-BE44-B8ABC0C05F63}"/>
               </a:ext>
             </a:extLst>
           </p:cNvPr>
@@ -1855,7 +1855,7 @@
           <p:cNvPr id="2" name="cover-ring-1">
             <a:extLst xmlns:a="http://schemas.openxmlformats.org/drawingml/2006/main">
               <a:ext uri="{FF2B5EF4-FFF2-40B4-BE49-F238E27FC236}">
-                <a16:creationId xmlns:a16="http://schemas.microsoft.com/office/drawing/2014/main" id="{30CDAC5D-622E-4D1D-8049-147920736844}"/>
+                <a16:creationId xmlns:a16="http://schemas.microsoft.com/office/drawing/2014/main" id="{FC7BEA6D-87C6-4A28-8768-A00DB627E928}"/>
               </a:ext>
             </a:extLst>
           </p:cNvPr>
@@ -1886,7 +1886,7 @@
           <p:cNvPr id="3" name="cover-ring-2">
             <a:extLst xmlns:a="http://schemas.openxmlformats.org/drawingml/2006/main">
               <a:ext uri="{FF2B5EF4-FFF2-40B4-BE49-F238E27FC236}">
-                <a16:creationId xmlns:a16="http://schemas.microsoft.com/office/drawing/2014/main" id="{EA7AFDA3-6A9F-40B9-A916-EB27637DE979}"/>
+                <a16:creationId xmlns:a16="http://schemas.microsoft.com/office/drawing/2014/main" id="{B9CBC5D7-D92D-480F-9098-BE6D786A0D8D}"/>
               </a:ext>
             </a:extLst>
           </p:cNvPr>
@@ -1917,7 +1917,7 @@
           <p:cNvPr id="4" name="cover-core">
             <a:extLst xmlns:a="http://schemas.openxmlformats.org/drawingml/2006/main">
               <a:ext uri="{FF2B5EF4-FFF2-40B4-BE49-F238E27FC236}">
-                <a16:creationId xmlns:a16="http://schemas.microsoft.com/office/drawing/2014/main" id="{D9AC73C1-CC48-46F2-A284-E56BC9743094}"/>
+                <a16:creationId xmlns:a16="http://schemas.microsoft.com/office/drawing/2014/main" id="{C47B9869-D4BE-41A2-A7E5-213BA3D244F6}"/>
               </a:ext>
             </a:extLst>
           </p:cNvPr>
@@ -1950,7 +1950,7 @@
           <p:cNvPr id="5" name="cover-line-1">
             <a:extLst xmlns:a="http://schemas.openxmlformats.org/drawingml/2006/main">
               <a:ext uri="{FF2B5EF4-FFF2-40B4-BE49-F238E27FC236}">
-                <a16:creationId xmlns:a16="http://schemas.microsoft.com/office/drawing/2014/main" id="{880A467C-F029-4AE3-A00F-F79649FF5082}"/>
+                <a16:creationId xmlns:a16="http://schemas.microsoft.com/office/drawing/2014/main" id="{E40C961F-BC5A-4B1E-A457-558408D18177}"/>
               </a:ext>
             </a:extLst>
           </p:cNvPr>
@@ -1981,7 +1981,7 @@
           <p:cNvPr id="6" name="cover-line-2">
             <a:extLst xmlns:a="http://schemas.openxmlformats.org/drawingml/2006/main">
               <a:ext uri="{FF2B5EF4-FFF2-40B4-BE49-F238E27FC236}">
-                <a16:creationId xmlns:a16="http://schemas.microsoft.com/office/drawing/2014/main" id="{17ACFC39-FB5D-4513-ADE6-D1E2F7D181C8}"/>
+                <a16:creationId xmlns:a16="http://schemas.microsoft.com/office/drawing/2014/main" id="{4F02C71B-D8A5-4B0F-9673-014AF772D0F1}"/>
               </a:ext>
             </a:extLst>
           </p:cNvPr>
@@ -2012,7 +2012,7 @@
           <p:cNvPr id="7" name="cover-eyebrow">
             <a:extLst xmlns:a="http://schemas.openxmlformats.org/drawingml/2006/main">
               <a:ext uri="{FF2B5EF4-FFF2-40B4-BE49-F238E27FC236}">
-                <a16:creationId xmlns:a16="http://schemas.microsoft.com/office/drawing/2014/main" id="{7118A723-F9EA-49F8-BF5D-31BAD58BD52C}"/>
+                <a16:creationId xmlns:a16="http://schemas.microsoft.com/office/drawing/2014/main" id="{E05BB230-8CC5-4911-9AC8-2BAA0F8FE055}"/>
               </a:ext>
             </a:extLst>
           </p:cNvPr>
@@ -2070,7 +2070,7 @@
           <p:cNvPr id="8" name="cover-title">
             <a:extLst xmlns:a="http://schemas.openxmlformats.org/drawingml/2006/main">
               <a:ext uri="{FF2B5EF4-FFF2-40B4-BE49-F238E27FC236}">
-                <a16:creationId xmlns:a16="http://schemas.microsoft.com/office/drawing/2014/main" id="{6ABF9B06-4502-4036-91E0-CAEE3273E8B4}"/>
+                <a16:creationId xmlns:a16="http://schemas.microsoft.com/office/drawing/2014/main" id="{77B14654-C7D9-4E19-8AE2-30E2AA3F52AA}"/>
               </a:ext>
             </a:extLst>
           </p:cNvPr>
@@ -2128,7 +2128,7 @@
           <p:cNvPr id="9" name="cover-subtitle">
             <a:extLst xmlns:a="http://schemas.openxmlformats.org/drawingml/2006/main">
               <a:ext uri="{FF2B5EF4-FFF2-40B4-BE49-F238E27FC236}">
-                <a16:creationId xmlns:a16="http://schemas.microsoft.com/office/drawing/2014/main" id="{7F97193B-FE48-43F3-A2B5-FC2AD969D401}"/>
+                <a16:creationId xmlns:a16="http://schemas.microsoft.com/office/drawing/2014/main" id="{41F284D9-6DD9-4104-9E8B-41A67CA1DF91}"/>
               </a:ext>
             </a:extLst>
           </p:cNvPr>
@@ -2190,7 +2190,7 @@
           <p:cNvPr id="10" name="cover-lead">
             <a:extLst xmlns:a="http://schemas.openxmlformats.org/drawingml/2006/main">
               <a:ext uri="{FF2B5EF4-FFF2-40B4-BE49-F238E27FC236}">
-                <a16:creationId xmlns:a16="http://schemas.microsoft.com/office/drawing/2014/main" id="{968E685C-A89E-4724-9192-283E784771FB}"/>
+                <a16:creationId xmlns:a16="http://schemas.microsoft.com/office/drawing/2014/main" id="{BF33C6D0-87A5-489E-9421-878BE6F25907}"/>
               </a:ext>
             </a:extLst>
           </p:cNvPr>
@@ -2248,7 +2248,7 @@
           <p:cNvPr id="11" name="cover-course">
             <a:extLst xmlns:a="http://schemas.openxmlformats.org/drawingml/2006/main">
               <a:ext uri="{FF2B5EF4-FFF2-40B4-BE49-F238E27FC236}">
-                <a16:creationId xmlns:a16="http://schemas.microsoft.com/office/drawing/2014/main" id="{C9E9AE27-028F-4428-ACAA-AD7BE0CD5EF7}"/>
+                <a16:creationId xmlns:a16="http://schemas.microsoft.com/office/drawing/2014/main" id="{6AFBFB52-17F1-4367-A2F2-BD33353CC586}"/>
               </a:ext>
             </a:extLst>
           </p:cNvPr>
@@ -2306,7 +2306,7 @@
           <p:cNvPr id="12" name="cover-id">
             <a:extLst xmlns:a="http://schemas.openxmlformats.org/drawingml/2006/main">
               <a:ext uri="{FF2B5EF4-FFF2-40B4-BE49-F238E27FC236}">
-                <a16:creationId xmlns:a16="http://schemas.microsoft.com/office/drawing/2014/main" id="{C0864D8C-B045-4E76-9D10-413FAD97D570}"/>
+                <a16:creationId xmlns:a16="http://schemas.microsoft.com/office/drawing/2014/main" id="{ABF36CAB-D55B-4D61-B0E6-44DB1B52B914}"/>
               </a:ext>
             </a:extLst>
           </p:cNvPr>
@@ -2362,7 +2362,7 @@
     </p:spTree>
     <p:extLst>
       <p:ext uri="{BB962C8B-B14F-4D97-AF65-F5344CB8AC3E}">
-        <p14:creationId xmlns:p14="http://schemas.microsoft.com/office/powerpoint/2010/main" val="1625541651"/>
+        <p14:creationId xmlns:p14="http://schemas.microsoft.com/office/powerpoint/2010/main" val="2059898216"/>
       </p:ext>
     </p:extLst>
   </p:cSld>
@@ -2393,7 +2393,7 @@
           <p:cNvPr id="1" name="s10-rule">
             <a:extLst xmlns:a="http://schemas.openxmlformats.org/drawingml/2006/main">
               <a:ext uri="{FF2B5EF4-FFF2-40B4-BE49-F238E27FC236}">
-                <a16:creationId xmlns:a16="http://schemas.microsoft.com/office/drawing/2014/main" id="{3480666F-7F51-452B-A0E8-C5A7624760A2}"/>
+                <a16:creationId xmlns:a16="http://schemas.microsoft.com/office/drawing/2014/main" id="{C512B5F0-A551-4AFF-BE7F-EC00FFBED642}"/>
               </a:ext>
             </a:extLst>
           </p:cNvPr>
@@ -2426,7 +2426,7 @@
           <p:cNvPr id="2" name="s10-eyebrow">
             <a:extLst xmlns:a="http://schemas.openxmlformats.org/drawingml/2006/main">
               <a:ext uri="{FF2B5EF4-FFF2-40B4-BE49-F238E27FC236}">
-                <a16:creationId xmlns:a16="http://schemas.microsoft.com/office/drawing/2014/main" id="{35070C51-3554-4E40-ACBA-201EF977F77E}"/>
+                <a16:creationId xmlns:a16="http://schemas.microsoft.com/office/drawing/2014/main" id="{86EF3DAC-02C7-4CBE-A8B5-3A158C4029A8}"/>
               </a:ext>
             </a:extLst>
           </p:cNvPr>
@@ -2484,7 +2484,7 @@
           <p:cNvPr id="3" name="s10-title">
             <a:extLst xmlns:a="http://schemas.openxmlformats.org/drawingml/2006/main">
               <a:ext uri="{FF2B5EF4-FFF2-40B4-BE49-F238E27FC236}">
-                <a16:creationId xmlns:a16="http://schemas.microsoft.com/office/drawing/2014/main" id="{ECD113E0-BD47-4C58-8AB5-EC99D45D125B}"/>
+                <a16:creationId xmlns:a16="http://schemas.microsoft.com/office/drawing/2014/main" id="{C238C4FC-47CB-42F0-929C-29C9C38FE57F}"/>
               </a:ext>
             </a:extLst>
           </p:cNvPr>
@@ -2542,7 +2542,7 @@
           <p:cNvPr id="4" name="s10-footer">
             <a:extLst xmlns:a="http://schemas.openxmlformats.org/drawingml/2006/main">
               <a:ext uri="{FF2B5EF4-FFF2-40B4-BE49-F238E27FC236}">
-                <a16:creationId xmlns:a16="http://schemas.microsoft.com/office/drawing/2014/main" id="{7F9B5D4A-6D4F-420B-AEBE-174CA25D3CDA}"/>
+                <a16:creationId xmlns:a16="http://schemas.microsoft.com/office/drawing/2014/main" id="{4F7A3D43-6FC4-4447-8699-97B7639EA549}"/>
               </a:ext>
             </a:extLst>
           </p:cNvPr>
@@ -2573,7 +2573,7 @@
           <p:cNvPr id="5" name="s10-identity">
             <a:extLst xmlns:a="http://schemas.openxmlformats.org/drawingml/2006/main">
               <a:ext uri="{FF2B5EF4-FFF2-40B4-BE49-F238E27FC236}">
-                <a16:creationId xmlns:a16="http://schemas.microsoft.com/office/drawing/2014/main" id="{3865527F-02D0-460F-B778-0985ACE83570}"/>
+                <a16:creationId xmlns:a16="http://schemas.microsoft.com/office/drawing/2014/main" id="{D2745E4A-9A9A-412E-BD77-F10C6A8F827B}"/>
               </a:ext>
             </a:extLst>
           </p:cNvPr>
@@ -2631,7 +2631,7 @@
           <p:cNvPr id="6" name="recap-circle-0">
             <a:extLst xmlns:a="http://schemas.openxmlformats.org/drawingml/2006/main">
               <a:ext uri="{FF2B5EF4-FFF2-40B4-BE49-F238E27FC236}">
-                <a16:creationId xmlns:a16="http://schemas.microsoft.com/office/drawing/2014/main" id="{2679947B-C125-4164-9323-104A46C5B666}"/>
+                <a16:creationId xmlns:a16="http://schemas.microsoft.com/office/drawing/2014/main" id="{9F627682-B39A-4515-BED1-F16C9D26F93B}"/>
               </a:ext>
             </a:extLst>
           </p:cNvPr>
@@ -2664,7 +2664,7 @@
           <p:cNvPr id="7" name="recap-number-0">
             <a:extLst xmlns:a="http://schemas.openxmlformats.org/drawingml/2006/main">
               <a:ext uri="{FF2B5EF4-FFF2-40B4-BE49-F238E27FC236}">
-                <a16:creationId xmlns:a16="http://schemas.microsoft.com/office/drawing/2014/main" id="{91008790-514D-4981-8F11-74CDABAA2F3A}"/>
+                <a16:creationId xmlns:a16="http://schemas.microsoft.com/office/drawing/2014/main" id="{4C0A63CC-3444-4F8C-BB13-A9777DE9C843}"/>
               </a:ext>
             </a:extLst>
           </p:cNvPr>
@@ -2722,7 +2722,7 @@
           <p:cNvPr id="8" name="recap-item-0">
             <a:extLst xmlns:a="http://schemas.openxmlformats.org/drawingml/2006/main">
               <a:ext uri="{FF2B5EF4-FFF2-40B4-BE49-F238E27FC236}">
-                <a16:creationId xmlns:a16="http://schemas.microsoft.com/office/drawing/2014/main" id="{BADF19E1-32EC-47CC-861B-B11A4BC9364E}"/>
+                <a16:creationId xmlns:a16="http://schemas.microsoft.com/office/drawing/2014/main" id="{7E3D51D2-028C-4974-899A-F5E5DE65CB7B}"/>
               </a:ext>
             </a:extLst>
           </p:cNvPr>
@@ -2786,7 +2786,7 @@
           <p:cNvPr id="9" name="recap-connector-0">
             <a:extLst xmlns:a="http://schemas.openxmlformats.org/drawingml/2006/main">
               <a:ext uri="{FF2B5EF4-FFF2-40B4-BE49-F238E27FC236}">
-                <a16:creationId xmlns:a16="http://schemas.microsoft.com/office/drawing/2014/main" id="{D867A54E-9EEF-4678-AED2-3B9A73CF3C81}"/>
+                <a16:creationId xmlns:a16="http://schemas.microsoft.com/office/drawing/2014/main" id="{812B4957-2BDA-4846-B50B-EC61DE040D42}"/>
               </a:ext>
             </a:extLst>
           </p:cNvPr>
@@ -2817,7 +2817,7 @@
           <p:cNvPr id="10" name="recap-circle-1">
             <a:extLst xmlns:a="http://schemas.openxmlformats.org/drawingml/2006/main">
               <a:ext uri="{FF2B5EF4-FFF2-40B4-BE49-F238E27FC236}">
-                <a16:creationId xmlns:a16="http://schemas.microsoft.com/office/drawing/2014/main" id="{5CE336C5-2127-4DA7-9A7E-77A93DA29388}"/>
+                <a16:creationId xmlns:a16="http://schemas.microsoft.com/office/drawing/2014/main" id="{7107AFDF-CEC4-4271-85B5-B0E86E4B357E}"/>
               </a:ext>
             </a:extLst>
           </p:cNvPr>
@@ -2850,7 +2850,7 @@
           <p:cNvPr id="11" name="recap-number-1">
             <a:extLst xmlns:a="http://schemas.openxmlformats.org/drawingml/2006/main">
               <a:ext uri="{FF2B5EF4-FFF2-40B4-BE49-F238E27FC236}">
-                <a16:creationId xmlns:a16="http://schemas.microsoft.com/office/drawing/2014/main" id="{C77D84BD-0087-4A42-A67D-AB3035FF993F}"/>
+                <a16:creationId xmlns:a16="http://schemas.microsoft.com/office/drawing/2014/main" id="{B83AE486-9375-4D53-BAB9-68E536315835}"/>
               </a:ext>
             </a:extLst>
           </p:cNvPr>
@@ -2908,7 +2908,7 @@
           <p:cNvPr id="12" name="recap-item-1">
             <a:extLst xmlns:a="http://schemas.openxmlformats.org/drawingml/2006/main">
               <a:ext uri="{FF2B5EF4-FFF2-40B4-BE49-F238E27FC236}">
-                <a16:creationId xmlns:a16="http://schemas.microsoft.com/office/drawing/2014/main" id="{208027E4-8D02-4703-8E10-241FE846469A}"/>
+                <a16:creationId xmlns:a16="http://schemas.microsoft.com/office/drawing/2014/main" id="{FE23E62D-16FF-40E0-90C8-7E24C9649B17}"/>
               </a:ext>
             </a:extLst>
           </p:cNvPr>
@@ -2972,7 +2972,7 @@
           <p:cNvPr id="13" name="recap-connector-1">
             <a:extLst xmlns:a="http://schemas.openxmlformats.org/drawingml/2006/main">
               <a:ext uri="{FF2B5EF4-FFF2-40B4-BE49-F238E27FC236}">
-                <a16:creationId xmlns:a16="http://schemas.microsoft.com/office/drawing/2014/main" id="{E4D349EE-185E-46AB-97D5-D2B1A6EDA88C}"/>
+                <a16:creationId xmlns:a16="http://schemas.microsoft.com/office/drawing/2014/main" id="{2E3551A9-5D08-4054-B8BE-BE1D56AAF2FD}"/>
               </a:ext>
             </a:extLst>
           </p:cNvPr>
@@ -3003,7 +3003,7 @@
           <p:cNvPr id="14" name="recap-circle-2">
             <a:extLst xmlns:a="http://schemas.openxmlformats.org/drawingml/2006/main">
               <a:ext uri="{FF2B5EF4-FFF2-40B4-BE49-F238E27FC236}">
-                <a16:creationId xmlns:a16="http://schemas.microsoft.com/office/drawing/2014/main" id="{E3776E55-D1D7-4694-A47B-6F4B3B1EA44E}"/>
+                <a16:creationId xmlns:a16="http://schemas.microsoft.com/office/drawing/2014/main" id="{E0979C43-F7B7-425C-AD41-BE4B0454D156}"/>
               </a:ext>
             </a:extLst>
           </p:cNvPr>
@@ -3036,7 +3036,7 @@
           <p:cNvPr id="15" name="recap-number-2">
             <a:extLst xmlns:a="http://schemas.openxmlformats.org/drawingml/2006/main">
               <a:ext uri="{FF2B5EF4-FFF2-40B4-BE49-F238E27FC236}">
-                <a16:creationId xmlns:a16="http://schemas.microsoft.com/office/drawing/2014/main" id="{E69508BA-B1DF-45AC-AD81-4BA0D67F19AC}"/>
+                <a16:creationId xmlns:a16="http://schemas.microsoft.com/office/drawing/2014/main" id="{92B6A1D3-03A7-4E8C-AE7B-61BE86642027}"/>
               </a:ext>
             </a:extLst>
           </p:cNvPr>
@@ -3094,7 +3094,7 @@
           <p:cNvPr id="16" name="recap-item-2">
             <a:extLst xmlns:a="http://schemas.openxmlformats.org/drawingml/2006/main">
               <a:ext uri="{FF2B5EF4-FFF2-40B4-BE49-F238E27FC236}">
-                <a16:creationId xmlns:a16="http://schemas.microsoft.com/office/drawing/2014/main" id="{A4E10220-7315-446F-A66B-C3902914216C}"/>
+                <a16:creationId xmlns:a16="http://schemas.microsoft.com/office/drawing/2014/main" id="{FEB9C32A-F4D9-40A8-8B33-029980287DF9}"/>
               </a:ext>
             </a:extLst>
           </p:cNvPr>
@@ -3156,7 +3156,7 @@
     </p:spTree>
     <p:extLst>
       <p:ext uri="{BB962C8B-B14F-4D97-AF65-F5344CB8AC3E}">
-        <p14:creationId xmlns:p14="http://schemas.microsoft.com/office/powerpoint/2010/main" val="2092988317"/>
+        <p14:creationId xmlns:p14="http://schemas.microsoft.com/office/powerpoint/2010/main" val="2006367093"/>
       </p:ext>
     </p:extLst>
   </p:cSld>
@@ -3187,7 +3187,7 @@
           <p:cNvPr id="1" name="s11-rule">
             <a:extLst xmlns:a="http://schemas.openxmlformats.org/drawingml/2006/main">
               <a:ext uri="{FF2B5EF4-FFF2-40B4-BE49-F238E27FC236}">
-                <a16:creationId xmlns:a16="http://schemas.microsoft.com/office/drawing/2014/main" id="{656D472F-1835-4102-961B-F420CDE33767}"/>
+                <a16:creationId xmlns:a16="http://schemas.microsoft.com/office/drawing/2014/main" id="{9C6C70B7-C8BB-4F5F-ABD3-A4C9F4015FF8}"/>
               </a:ext>
             </a:extLst>
           </p:cNvPr>
@@ -3220,7 +3220,7 @@
           <p:cNvPr id="2" name="s11-eyebrow">
             <a:extLst xmlns:a="http://schemas.openxmlformats.org/drawingml/2006/main">
               <a:ext uri="{FF2B5EF4-FFF2-40B4-BE49-F238E27FC236}">
-                <a16:creationId xmlns:a16="http://schemas.microsoft.com/office/drawing/2014/main" id="{4B5DC32D-957C-4DA6-8821-B40D4D3AC82B}"/>
+                <a16:creationId xmlns:a16="http://schemas.microsoft.com/office/drawing/2014/main" id="{36062ABF-6E76-423A-B36A-2B42F6FB780E}"/>
               </a:ext>
             </a:extLst>
           </p:cNvPr>
@@ -3278,7 +3278,7 @@
           <p:cNvPr id="3" name="s11-title">
             <a:extLst xmlns:a="http://schemas.openxmlformats.org/drawingml/2006/main">
               <a:ext uri="{FF2B5EF4-FFF2-40B4-BE49-F238E27FC236}">
-                <a16:creationId xmlns:a16="http://schemas.microsoft.com/office/drawing/2014/main" id="{9AF5A4D9-11A3-4345-A99E-0FB35B9F2882}"/>
+                <a16:creationId xmlns:a16="http://schemas.microsoft.com/office/drawing/2014/main" id="{2F47A0D7-D2B3-44C1-A054-01288CD988C4}"/>
               </a:ext>
             </a:extLst>
           </p:cNvPr>
@@ -3336,7 +3336,7 @@
           <p:cNvPr id="4" name="s11-footer">
             <a:extLst xmlns:a="http://schemas.openxmlformats.org/drawingml/2006/main">
               <a:ext uri="{FF2B5EF4-FFF2-40B4-BE49-F238E27FC236}">
-                <a16:creationId xmlns:a16="http://schemas.microsoft.com/office/drawing/2014/main" id="{FE8F7EF7-2A7D-4684-AA1F-5732EF79A5E6}"/>
+                <a16:creationId xmlns:a16="http://schemas.microsoft.com/office/drawing/2014/main" id="{A9A8A114-8290-4A51-A309-0CF1C9CBFBE3}"/>
               </a:ext>
             </a:extLst>
           </p:cNvPr>
@@ -3367,7 +3367,7 @@
           <p:cNvPr id="5" name="s11-identity">
             <a:extLst xmlns:a="http://schemas.openxmlformats.org/drawingml/2006/main">
               <a:ext uri="{FF2B5EF4-FFF2-40B4-BE49-F238E27FC236}">
-                <a16:creationId xmlns:a16="http://schemas.microsoft.com/office/drawing/2014/main" id="{63F8441A-3CE0-4533-BFA3-8C83BFDE7002}"/>
+                <a16:creationId xmlns:a16="http://schemas.microsoft.com/office/drawing/2014/main" id="{79D1AA18-3332-4A77-A92B-DFC936B4FCE3}"/>
               </a:ext>
             </a:extLst>
           </p:cNvPr>
@@ -3425,7 +3425,7 @@
           <p:cNvPr id="6" name="source-0">
             <a:extLst xmlns:a="http://schemas.openxmlformats.org/drawingml/2006/main">
               <a:ext uri="{FF2B5EF4-FFF2-40B4-BE49-F238E27FC236}">
-                <a16:creationId xmlns:a16="http://schemas.microsoft.com/office/drawing/2014/main" id="{969DC4A7-C448-4AC3-89AE-0D2C7916B76E}"/>
+                <a16:creationId xmlns:a16="http://schemas.microsoft.com/office/drawing/2014/main" id="{4A91A4F2-D0F3-4F15-85F8-25583D8E0E28}"/>
               </a:ext>
             </a:extLst>
           </p:cNvPr>
@@ -3489,7 +3489,7 @@
           <p:cNvPr id="7" name="source-1">
             <a:extLst xmlns:a="http://schemas.openxmlformats.org/drawingml/2006/main">
               <a:ext uri="{FF2B5EF4-FFF2-40B4-BE49-F238E27FC236}">
-                <a16:creationId xmlns:a16="http://schemas.microsoft.com/office/drawing/2014/main" id="{DEA7EE08-65A0-470D-AB1B-53E2BB205B72}"/>
+                <a16:creationId xmlns:a16="http://schemas.microsoft.com/office/drawing/2014/main" id="{80EE1434-2473-499D-BC1C-C7C5CCF31108}"/>
               </a:ext>
             </a:extLst>
           </p:cNvPr>
@@ -3553,7 +3553,7 @@
           <p:cNvPr id="8" name="source-2">
             <a:extLst xmlns:a="http://schemas.openxmlformats.org/drawingml/2006/main">
               <a:ext uri="{FF2B5EF4-FFF2-40B4-BE49-F238E27FC236}">
-                <a16:creationId xmlns:a16="http://schemas.microsoft.com/office/drawing/2014/main" id="{95397A61-DA21-4E9D-BA70-E6436182C649}"/>
+                <a16:creationId xmlns:a16="http://schemas.microsoft.com/office/drawing/2014/main" id="{7C41C145-1417-4DC5-AB81-BEA0A881CE11}"/>
               </a:ext>
             </a:extLst>
           </p:cNvPr>
@@ -3617,7 +3617,7 @@
           <p:cNvPr id="9" name="source-3">
             <a:extLst xmlns:a="http://schemas.openxmlformats.org/drawingml/2006/main">
               <a:ext uri="{FF2B5EF4-FFF2-40B4-BE49-F238E27FC236}">
-                <a16:creationId xmlns:a16="http://schemas.microsoft.com/office/drawing/2014/main" id="{51CD2BA9-29AB-4D52-ACDC-A4287C5A7E0F}"/>
+                <a16:creationId xmlns:a16="http://schemas.microsoft.com/office/drawing/2014/main" id="{CC9709E4-3ACE-410C-B379-501F23627B3C}"/>
               </a:ext>
             </a:extLst>
           </p:cNvPr>
@@ -3681,7 +3681,7 @@
           <p:cNvPr id="10" name="source-4">
             <a:extLst xmlns:a="http://schemas.openxmlformats.org/drawingml/2006/main">
               <a:ext uri="{FF2B5EF4-FFF2-40B4-BE49-F238E27FC236}">
-                <a16:creationId xmlns:a16="http://schemas.microsoft.com/office/drawing/2014/main" id="{CC02F487-B665-4174-A7AE-C262D59F2684}"/>
+                <a16:creationId xmlns:a16="http://schemas.microsoft.com/office/drawing/2014/main" id="{86C015C1-E53B-4C37-9484-F5E95763249C}"/>
               </a:ext>
             </a:extLst>
           </p:cNvPr>
@@ -3745,7 +3745,7 @@
           <p:cNvPr id="11" name="s11-takeaway-rule">
             <a:extLst xmlns:a="http://schemas.openxmlformats.org/drawingml/2006/main">
               <a:ext uri="{FF2B5EF4-FFF2-40B4-BE49-F238E27FC236}">
-                <a16:creationId xmlns:a16="http://schemas.microsoft.com/office/drawing/2014/main" id="{287CD484-52C4-4195-928A-59330FF48DC1}"/>
+                <a16:creationId xmlns:a16="http://schemas.microsoft.com/office/drawing/2014/main" id="{8EA805FB-E0A6-482F-A145-5BE93ACEA729}"/>
               </a:ext>
             </a:extLst>
           </p:cNvPr>
@@ -3778,7 +3778,7 @@
           <p:cNvPr id="12" name="s11-takeaway">
             <a:extLst xmlns:a="http://schemas.openxmlformats.org/drawingml/2006/main">
               <a:ext uri="{FF2B5EF4-FFF2-40B4-BE49-F238E27FC236}">
-                <a16:creationId xmlns:a16="http://schemas.microsoft.com/office/drawing/2014/main" id="{FBDE6E50-CC1F-417B-9815-568C1471F43D}"/>
+                <a16:creationId xmlns:a16="http://schemas.microsoft.com/office/drawing/2014/main" id="{81C76278-82A2-4CFD-8B18-3712623FFCAA}"/>
               </a:ext>
             </a:extLst>
           </p:cNvPr>
@@ -3803,7 +3803,7 @@
         </p:spPr>
         <p:txBody>
           <a:bodyPr xmlns:a="http://schemas.openxmlformats.org/drawingml/2006/main" lIns="0" tIns="0" rIns="0" bIns="0" anchor="ctr">
-            <a:normAutofit fontScale="95911"/>
+            <a:normAutofit fontScale="100000"/>
           </a:bodyPr>
           <a:lstStyle xmlns:a="http://schemas.openxmlformats.org/drawingml/2006/main"/>
           <a:p xmlns:a="http://schemas.openxmlformats.org/drawingml/2006/main">
@@ -3826,7 +3826,7 @@
                 <a:ea typeface="PingFang SC"/>
                 <a:cs typeface="PingFang SC"/>
               </a:rPr>
-              <a:t>课程精编页用于讲授主线；播放器中的“原课件”模式保留团队 PowerPoint 精选页、真实图片和可播放视频。</a:t>
+              <a:t>课程正文与幻灯片共享同一知识主线，图片和视频用于帮助理解本节概念与案例。</a:t>
             </a:r>
           </a:p>
         </p:txBody>
@@ -3834,7 +3834,7 @@
     </p:spTree>
     <p:extLst>
       <p:ext uri="{BB962C8B-B14F-4D97-AF65-F5344CB8AC3E}">
-        <p14:creationId xmlns:p14="http://schemas.microsoft.com/office/powerpoint/2010/main" val="1317444091"/>
+        <p14:creationId xmlns:p14="http://schemas.microsoft.com/office/powerpoint/2010/main" val="1521368050"/>
       </p:ext>
     </p:extLst>
   </p:cSld>
@@ -3865,7 +3865,7 @@
           <p:cNvPr id="1" name="s2-rule">
             <a:extLst xmlns:a="http://schemas.openxmlformats.org/drawingml/2006/main">
               <a:ext uri="{FF2B5EF4-FFF2-40B4-BE49-F238E27FC236}">
-                <a16:creationId xmlns:a16="http://schemas.microsoft.com/office/drawing/2014/main" id="{32F4B65A-0AB1-47DD-8117-F88FB31EA1C9}"/>
+                <a16:creationId xmlns:a16="http://schemas.microsoft.com/office/drawing/2014/main" id="{2AEC09F0-33AA-47C7-90D4-6AD99BE21E20}"/>
               </a:ext>
             </a:extLst>
           </p:cNvPr>
@@ -3898,7 +3898,7 @@
           <p:cNvPr id="2" name="s2-eyebrow">
             <a:extLst xmlns:a="http://schemas.openxmlformats.org/drawingml/2006/main">
               <a:ext uri="{FF2B5EF4-FFF2-40B4-BE49-F238E27FC236}">
-                <a16:creationId xmlns:a16="http://schemas.microsoft.com/office/drawing/2014/main" id="{5D650551-F429-421F-BEF9-18E9C0B11142}"/>
+                <a16:creationId xmlns:a16="http://schemas.microsoft.com/office/drawing/2014/main" id="{E4DF110F-74B7-476D-827D-F2007D93B839}"/>
               </a:ext>
             </a:extLst>
           </p:cNvPr>
@@ -3956,7 +3956,7 @@
           <p:cNvPr id="3" name="s2-title">
             <a:extLst xmlns:a="http://schemas.openxmlformats.org/drawingml/2006/main">
               <a:ext uri="{FF2B5EF4-FFF2-40B4-BE49-F238E27FC236}">
-                <a16:creationId xmlns:a16="http://schemas.microsoft.com/office/drawing/2014/main" id="{D4EAD3F6-71D2-46A1-A7C1-04806B213923}"/>
+                <a16:creationId xmlns:a16="http://schemas.microsoft.com/office/drawing/2014/main" id="{C4218A30-30BD-49FF-A935-5488552B9E2D}"/>
               </a:ext>
             </a:extLst>
           </p:cNvPr>
@@ -4014,7 +4014,7 @@
           <p:cNvPr id="4" name="s2-footer">
             <a:extLst xmlns:a="http://schemas.openxmlformats.org/drawingml/2006/main">
               <a:ext uri="{FF2B5EF4-FFF2-40B4-BE49-F238E27FC236}">
-                <a16:creationId xmlns:a16="http://schemas.microsoft.com/office/drawing/2014/main" id="{6159FEAB-6F49-4DD6-9E29-78310998E71A}"/>
+                <a16:creationId xmlns:a16="http://schemas.microsoft.com/office/drawing/2014/main" id="{DD759722-11D2-4256-9C06-23A6B42D5CD0}"/>
               </a:ext>
             </a:extLst>
           </p:cNvPr>
@@ -4045,7 +4045,7 @@
           <p:cNvPr id="5" name="s2-identity">
             <a:extLst xmlns:a="http://schemas.openxmlformats.org/drawingml/2006/main">
               <a:ext uri="{FF2B5EF4-FFF2-40B4-BE49-F238E27FC236}">
-                <a16:creationId xmlns:a16="http://schemas.microsoft.com/office/drawing/2014/main" id="{5A316A33-B197-4490-A71F-231E607B34C0}"/>
+                <a16:creationId xmlns:a16="http://schemas.microsoft.com/office/drawing/2014/main" id="{8125A1AE-8325-475B-8F0D-1D88113EA8D0}"/>
               </a:ext>
             </a:extLst>
           </p:cNvPr>
@@ -4103,7 +4103,7 @@
           <p:cNvPr id="6" name="objective-1">
             <a:extLst xmlns:a="http://schemas.openxmlformats.org/drawingml/2006/main">
               <a:ext uri="{FF2B5EF4-FFF2-40B4-BE49-F238E27FC236}">
-                <a16:creationId xmlns:a16="http://schemas.microsoft.com/office/drawing/2014/main" id="{4D7B525D-B2EF-4B1D-8F14-15257838F4B8}"/>
+                <a16:creationId xmlns:a16="http://schemas.microsoft.com/office/drawing/2014/main" id="{86DACA9A-5CEC-4606-8B54-08BEFEB1F52B}"/>
               </a:ext>
             </a:extLst>
           </p:cNvPr>
@@ -4190,7 +4190,7 @@
           <p:cNvPr id="7" name="objective-2">
             <a:extLst xmlns:a="http://schemas.openxmlformats.org/drawingml/2006/main">
               <a:ext uri="{FF2B5EF4-FFF2-40B4-BE49-F238E27FC236}">
-                <a16:creationId xmlns:a16="http://schemas.microsoft.com/office/drawing/2014/main" id="{A0108423-95FB-4A27-86A1-21C97CA94C69}"/>
+                <a16:creationId xmlns:a16="http://schemas.microsoft.com/office/drawing/2014/main" id="{11DC9E76-C81D-402E-B166-4838D0EC5B90}"/>
               </a:ext>
             </a:extLst>
           </p:cNvPr>
@@ -4275,7 +4275,7 @@
     </p:spTree>
     <p:extLst>
       <p:ext uri="{BB962C8B-B14F-4D97-AF65-F5344CB8AC3E}">
-        <p14:creationId xmlns:p14="http://schemas.microsoft.com/office/powerpoint/2010/main" val="962895261"/>
+        <p14:creationId xmlns:p14="http://schemas.microsoft.com/office/powerpoint/2010/main" val="1911265303"/>
       </p:ext>
     </p:extLst>
   </p:cSld>
@@ -4306,7 +4306,7 @@
           <p:cNvPr id="1" name="s3-rule">
             <a:extLst xmlns:a="http://schemas.openxmlformats.org/drawingml/2006/main">
               <a:ext uri="{FF2B5EF4-FFF2-40B4-BE49-F238E27FC236}">
-                <a16:creationId xmlns:a16="http://schemas.microsoft.com/office/drawing/2014/main" id="{37F86142-21B7-41A0-9927-1464707C57D8}"/>
+                <a16:creationId xmlns:a16="http://schemas.microsoft.com/office/drawing/2014/main" id="{0E72AE18-C6CA-41DA-A7FD-47165B7567E9}"/>
               </a:ext>
             </a:extLst>
           </p:cNvPr>
@@ -4339,7 +4339,7 @@
           <p:cNvPr id="2" name="s3-eyebrow">
             <a:extLst xmlns:a="http://schemas.openxmlformats.org/drawingml/2006/main">
               <a:ext uri="{FF2B5EF4-FFF2-40B4-BE49-F238E27FC236}">
-                <a16:creationId xmlns:a16="http://schemas.microsoft.com/office/drawing/2014/main" id="{66585011-D401-47AD-9268-F4B4BB93B0FD}"/>
+                <a16:creationId xmlns:a16="http://schemas.microsoft.com/office/drawing/2014/main" id="{8CEEE41F-773F-4D63-A019-E0B778FBB2DC}"/>
               </a:ext>
             </a:extLst>
           </p:cNvPr>
@@ -4397,7 +4397,7 @@
           <p:cNvPr id="3" name="s3-title">
             <a:extLst xmlns:a="http://schemas.openxmlformats.org/drawingml/2006/main">
               <a:ext uri="{FF2B5EF4-FFF2-40B4-BE49-F238E27FC236}">
-                <a16:creationId xmlns:a16="http://schemas.microsoft.com/office/drawing/2014/main" id="{999A59B2-71FE-4806-B343-87657588270C}"/>
+                <a16:creationId xmlns:a16="http://schemas.microsoft.com/office/drawing/2014/main" id="{778B3E01-9F43-4288-941F-8F1B8BA47ED9}"/>
               </a:ext>
             </a:extLst>
           </p:cNvPr>
@@ -4455,7 +4455,7 @@
           <p:cNvPr id="4" name="s3-footer">
             <a:extLst xmlns:a="http://schemas.openxmlformats.org/drawingml/2006/main">
               <a:ext uri="{FF2B5EF4-FFF2-40B4-BE49-F238E27FC236}">
-                <a16:creationId xmlns:a16="http://schemas.microsoft.com/office/drawing/2014/main" id="{5188A599-C177-4531-9FEB-19F4A3485623}"/>
+                <a16:creationId xmlns:a16="http://schemas.microsoft.com/office/drawing/2014/main" id="{AFE44037-EA19-44A7-8212-0B22D7403EF7}"/>
               </a:ext>
             </a:extLst>
           </p:cNvPr>
@@ -4486,7 +4486,7 @@
           <p:cNvPr id="5" name="s3-identity">
             <a:extLst xmlns:a="http://schemas.openxmlformats.org/drawingml/2006/main">
               <a:ext uri="{FF2B5EF4-FFF2-40B4-BE49-F238E27FC236}">
-                <a16:creationId xmlns:a16="http://schemas.microsoft.com/office/drawing/2014/main" id="{9BAFFD3B-75ED-41CA-B9DE-0F5682882B7C}"/>
+                <a16:creationId xmlns:a16="http://schemas.microsoft.com/office/drawing/2014/main" id="{78D8D6D2-CB2C-46DE-94EF-EC6ACA75C2AD}"/>
               </a:ext>
             </a:extLst>
           </p:cNvPr>
@@ -4544,7 +4544,7 @@
           <p:cNvPr id="6" name="core-no-0">
             <a:extLst xmlns:a="http://schemas.openxmlformats.org/drawingml/2006/main">
               <a:ext uri="{FF2B5EF4-FFF2-40B4-BE49-F238E27FC236}">
-                <a16:creationId xmlns:a16="http://schemas.microsoft.com/office/drawing/2014/main" id="{4C18D3E1-AC86-43E2-8196-B346F5DEBB73}"/>
+                <a16:creationId xmlns:a16="http://schemas.microsoft.com/office/drawing/2014/main" id="{3AB289E7-65C1-4F3F-8676-04C6A645906B}"/>
               </a:ext>
             </a:extLst>
           </p:cNvPr>
@@ -4602,7 +4602,7 @@
           <p:cNvPr id="7" name="core-label-0">
             <a:extLst xmlns:a="http://schemas.openxmlformats.org/drawingml/2006/main">
               <a:ext uri="{FF2B5EF4-FFF2-40B4-BE49-F238E27FC236}">
-                <a16:creationId xmlns:a16="http://schemas.microsoft.com/office/drawing/2014/main" id="{02D5CC58-9A41-44CC-B97B-1B922FAE9BA7}"/>
+                <a16:creationId xmlns:a16="http://schemas.microsoft.com/office/drawing/2014/main" id="{28B96D7B-8472-4C49-A3F8-5DE57A32BC0C}"/>
               </a:ext>
             </a:extLst>
           </p:cNvPr>
@@ -4660,7 +4660,7 @@
           <p:cNvPr id="8" name="core-body-0">
             <a:extLst xmlns:a="http://schemas.openxmlformats.org/drawingml/2006/main">
               <a:ext uri="{FF2B5EF4-FFF2-40B4-BE49-F238E27FC236}">
-                <a16:creationId xmlns:a16="http://schemas.microsoft.com/office/drawing/2014/main" id="{8B219BB8-3FA3-4AF2-8A6E-B5D5CA76D072}"/>
+                <a16:creationId xmlns:a16="http://schemas.microsoft.com/office/drawing/2014/main" id="{21C94E27-660B-4823-BEF2-12642EF357E0}"/>
               </a:ext>
             </a:extLst>
           </p:cNvPr>
@@ -4724,7 +4724,7 @@
           <p:cNvPr id="9" name="core-no-1">
             <a:extLst xmlns:a="http://schemas.openxmlformats.org/drawingml/2006/main">
               <a:ext uri="{FF2B5EF4-FFF2-40B4-BE49-F238E27FC236}">
-                <a16:creationId xmlns:a16="http://schemas.microsoft.com/office/drawing/2014/main" id="{D0988487-1740-4EB3-B976-5041ECA402AC}"/>
+                <a16:creationId xmlns:a16="http://schemas.microsoft.com/office/drawing/2014/main" id="{35E9E0CD-0557-438C-B2E1-B740D5751759}"/>
               </a:ext>
             </a:extLst>
           </p:cNvPr>
@@ -4782,7 +4782,7 @@
           <p:cNvPr id="10" name="core-body-1">
             <a:extLst xmlns:a="http://schemas.openxmlformats.org/drawingml/2006/main">
               <a:ext uri="{FF2B5EF4-FFF2-40B4-BE49-F238E27FC236}">
-                <a16:creationId xmlns:a16="http://schemas.microsoft.com/office/drawing/2014/main" id="{AF097C0F-983D-431D-A3D5-A5275E82F013}"/>
+                <a16:creationId xmlns:a16="http://schemas.microsoft.com/office/drawing/2014/main" id="{2BC8759B-4ACA-4B0B-866F-3A517591A37E}"/>
               </a:ext>
             </a:extLst>
           </p:cNvPr>
@@ -4846,7 +4846,7 @@
           <p:cNvPr id="11" name="s3-takeaway-rule">
             <a:extLst xmlns:a="http://schemas.openxmlformats.org/drawingml/2006/main">
               <a:ext uri="{FF2B5EF4-FFF2-40B4-BE49-F238E27FC236}">
-                <a16:creationId xmlns:a16="http://schemas.microsoft.com/office/drawing/2014/main" id="{DDD86718-4B84-4C4F-8DC5-EF8BFFB97213}"/>
+                <a16:creationId xmlns:a16="http://schemas.microsoft.com/office/drawing/2014/main" id="{3BC4415F-1913-42BB-9E4C-BCB9D47E1B1B}"/>
               </a:ext>
             </a:extLst>
           </p:cNvPr>
@@ -4879,7 +4879,7 @@
           <p:cNvPr id="12" name="s3-takeaway">
             <a:extLst xmlns:a="http://schemas.openxmlformats.org/drawingml/2006/main">
               <a:ext uri="{FF2B5EF4-FFF2-40B4-BE49-F238E27FC236}">
-                <a16:creationId xmlns:a16="http://schemas.microsoft.com/office/drawing/2014/main" id="{7C210936-3984-4319-A4B5-6DF83DA51CE7}"/>
+                <a16:creationId xmlns:a16="http://schemas.microsoft.com/office/drawing/2014/main" id="{9D4DB65A-C4EB-4BF5-B19A-D7B92CE7C310}"/>
               </a:ext>
             </a:extLst>
           </p:cNvPr>
@@ -4935,7 +4935,7 @@
     </p:spTree>
     <p:extLst>
       <p:ext uri="{BB962C8B-B14F-4D97-AF65-F5344CB8AC3E}">
-        <p14:creationId xmlns:p14="http://schemas.microsoft.com/office/powerpoint/2010/main" val="329291641"/>
+        <p14:creationId xmlns:p14="http://schemas.microsoft.com/office/powerpoint/2010/main" val="1733917662"/>
       </p:ext>
     </p:extLst>
   </p:cSld>
@@ -4966,7 +4966,7 @@
           <p:cNvPr id="1" name="s4-rule">
             <a:extLst xmlns:a="http://schemas.openxmlformats.org/drawingml/2006/main">
               <a:ext uri="{FF2B5EF4-FFF2-40B4-BE49-F238E27FC236}">
-                <a16:creationId xmlns:a16="http://schemas.microsoft.com/office/drawing/2014/main" id="{BFF21D3C-C979-41E2-A646-63B6BA7D7F74}"/>
+                <a16:creationId xmlns:a16="http://schemas.microsoft.com/office/drawing/2014/main" id="{D448584A-1992-43C1-910A-1A4B39D3DFC1}"/>
               </a:ext>
             </a:extLst>
           </p:cNvPr>
@@ -4999,7 +4999,7 @@
           <p:cNvPr id="2" name="s4-eyebrow">
             <a:extLst xmlns:a="http://schemas.openxmlformats.org/drawingml/2006/main">
               <a:ext uri="{FF2B5EF4-FFF2-40B4-BE49-F238E27FC236}">
-                <a16:creationId xmlns:a16="http://schemas.microsoft.com/office/drawing/2014/main" id="{5771C7A8-F943-4C81-BE7A-D44FC9912434}"/>
+                <a16:creationId xmlns:a16="http://schemas.microsoft.com/office/drawing/2014/main" id="{CAF38930-9C83-456C-A48A-52E0C8E15194}"/>
               </a:ext>
             </a:extLst>
           </p:cNvPr>
@@ -5057,7 +5057,7 @@
           <p:cNvPr id="3" name="s4-title">
             <a:extLst xmlns:a="http://schemas.openxmlformats.org/drawingml/2006/main">
               <a:ext uri="{FF2B5EF4-FFF2-40B4-BE49-F238E27FC236}">
-                <a16:creationId xmlns:a16="http://schemas.microsoft.com/office/drawing/2014/main" id="{B68429CF-4D20-4322-9806-CCA5CD774D18}"/>
+                <a16:creationId xmlns:a16="http://schemas.microsoft.com/office/drawing/2014/main" id="{98BAEEE5-6441-4EA0-819A-0BA84E57F4AC}"/>
               </a:ext>
             </a:extLst>
           </p:cNvPr>
@@ -5115,7 +5115,7 @@
           <p:cNvPr id="4" name="s4-footer">
             <a:extLst xmlns:a="http://schemas.openxmlformats.org/drawingml/2006/main">
               <a:ext uri="{FF2B5EF4-FFF2-40B4-BE49-F238E27FC236}">
-                <a16:creationId xmlns:a16="http://schemas.microsoft.com/office/drawing/2014/main" id="{18D0B160-1EBB-4D1F-8606-EB5C213B3908}"/>
+                <a16:creationId xmlns:a16="http://schemas.microsoft.com/office/drawing/2014/main" id="{B702C1DD-3C2D-48EA-A851-BF4A38546E5C}"/>
               </a:ext>
             </a:extLst>
           </p:cNvPr>
@@ -5146,7 +5146,7 @@
           <p:cNvPr id="5" name="s4-identity">
             <a:extLst xmlns:a="http://schemas.openxmlformats.org/drawingml/2006/main">
               <a:ext uri="{FF2B5EF4-FFF2-40B4-BE49-F238E27FC236}">
-                <a16:creationId xmlns:a16="http://schemas.microsoft.com/office/drawing/2014/main" id="{98734E62-A9C2-4BB6-BA64-3DB61D3ECF6A}"/>
+                <a16:creationId xmlns:a16="http://schemas.microsoft.com/office/drawing/2014/main" id="{C8324A04-B6B2-40B6-B2E2-66CAB60208FD}"/>
               </a:ext>
             </a:extLst>
           </p:cNvPr>
@@ -5204,7 +5204,7 @@
           <p:cNvPr id="6" name="core-no-0">
             <a:extLst xmlns:a="http://schemas.openxmlformats.org/drawingml/2006/main">
               <a:ext uri="{FF2B5EF4-FFF2-40B4-BE49-F238E27FC236}">
-                <a16:creationId xmlns:a16="http://schemas.microsoft.com/office/drawing/2014/main" id="{9695E48D-1A02-4F44-88BA-1D81827C093B}"/>
+                <a16:creationId xmlns:a16="http://schemas.microsoft.com/office/drawing/2014/main" id="{484B0DD3-04EC-4E00-8E58-96311B716C51}"/>
               </a:ext>
             </a:extLst>
           </p:cNvPr>
@@ -5262,7 +5262,7 @@
           <p:cNvPr id="7" name="core-label-0">
             <a:extLst xmlns:a="http://schemas.openxmlformats.org/drawingml/2006/main">
               <a:ext uri="{FF2B5EF4-FFF2-40B4-BE49-F238E27FC236}">
-                <a16:creationId xmlns:a16="http://schemas.microsoft.com/office/drawing/2014/main" id="{CD62081C-DBFA-4445-96AD-C1A00F3E7860}"/>
+                <a16:creationId xmlns:a16="http://schemas.microsoft.com/office/drawing/2014/main" id="{800EFE7C-0599-48A2-A25E-4028DC5B76AA}"/>
               </a:ext>
             </a:extLst>
           </p:cNvPr>
@@ -5320,7 +5320,7 @@
           <p:cNvPr id="8" name="core-body-0">
             <a:extLst xmlns:a="http://schemas.openxmlformats.org/drawingml/2006/main">
               <a:ext uri="{FF2B5EF4-FFF2-40B4-BE49-F238E27FC236}">
-                <a16:creationId xmlns:a16="http://schemas.microsoft.com/office/drawing/2014/main" id="{A810A9DF-160E-4BB4-B056-FC88B42D532C}"/>
+                <a16:creationId xmlns:a16="http://schemas.microsoft.com/office/drawing/2014/main" id="{0AD71D3B-4C8E-4FAB-8F31-6B6BC132886F}"/>
               </a:ext>
             </a:extLst>
           </p:cNvPr>
@@ -5384,7 +5384,7 @@
           <p:cNvPr id="9" name="core-no-1">
             <a:extLst xmlns:a="http://schemas.openxmlformats.org/drawingml/2006/main">
               <a:ext uri="{FF2B5EF4-FFF2-40B4-BE49-F238E27FC236}">
-                <a16:creationId xmlns:a16="http://schemas.microsoft.com/office/drawing/2014/main" id="{985E15A1-0574-49CF-9ECA-16571848AB56}"/>
+                <a16:creationId xmlns:a16="http://schemas.microsoft.com/office/drawing/2014/main" id="{82EC1017-24F3-469F-BD3A-BD8F846AD4B6}"/>
               </a:ext>
             </a:extLst>
           </p:cNvPr>
@@ -5442,7 +5442,7 @@
           <p:cNvPr id="10" name="core-body-1">
             <a:extLst xmlns:a="http://schemas.openxmlformats.org/drawingml/2006/main">
               <a:ext uri="{FF2B5EF4-FFF2-40B4-BE49-F238E27FC236}">
-                <a16:creationId xmlns:a16="http://schemas.microsoft.com/office/drawing/2014/main" id="{7768B647-7AC0-4402-8A91-8B3D4CF8E059}"/>
+                <a16:creationId xmlns:a16="http://schemas.microsoft.com/office/drawing/2014/main" id="{7C66CA87-CCA8-419C-973D-FDEA436467B3}"/>
               </a:ext>
             </a:extLst>
           </p:cNvPr>
@@ -5506,7 +5506,7 @@
           <p:cNvPr id="11" name="s4-takeaway-rule">
             <a:extLst xmlns:a="http://schemas.openxmlformats.org/drawingml/2006/main">
               <a:ext uri="{FF2B5EF4-FFF2-40B4-BE49-F238E27FC236}">
-                <a16:creationId xmlns:a16="http://schemas.microsoft.com/office/drawing/2014/main" id="{40BA5CA1-52B6-4C9C-85F3-0ADA81FA4E3E}"/>
+                <a16:creationId xmlns:a16="http://schemas.microsoft.com/office/drawing/2014/main" id="{875D8C74-FB04-423E-B811-F7F74A1E8CDC}"/>
               </a:ext>
             </a:extLst>
           </p:cNvPr>
@@ -5539,7 +5539,7 @@
           <p:cNvPr id="12" name="s4-takeaway">
             <a:extLst xmlns:a="http://schemas.openxmlformats.org/drawingml/2006/main">
               <a:ext uri="{FF2B5EF4-FFF2-40B4-BE49-F238E27FC236}">
-                <a16:creationId xmlns:a16="http://schemas.microsoft.com/office/drawing/2014/main" id="{26D44369-EEFC-4116-85CE-77B76EBB1D16}"/>
+                <a16:creationId xmlns:a16="http://schemas.microsoft.com/office/drawing/2014/main" id="{6170D106-A6B6-4A07-8F35-2554135AA2EC}"/>
               </a:ext>
             </a:extLst>
           </p:cNvPr>
@@ -5595,7 +5595,7 @@
     </p:spTree>
     <p:extLst>
       <p:ext uri="{BB962C8B-B14F-4D97-AF65-F5344CB8AC3E}">
-        <p14:creationId xmlns:p14="http://schemas.microsoft.com/office/powerpoint/2010/main" val="1968675893"/>
+        <p14:creationId xmlns:p14="http://schemas.microsoft.com/office/powerpoint/2010/main" val="2035022310"/>
       </p:ext>
     </p:extLst>
   </p:cSld>
@@ -5626,7 +5626,7 @@
           <p:cNvPr id="1" name="s5-rule">
             <a:extLst xmlns:a="http://schemas.openxmlformats.org/drawingml/2006/main">
               <a:ext uri="{FF2B5EF4-FFF2-40B4-BE49-F238E27FC236}">
-                <a16:creationId xmlns:a16="http://schemas.microsoft.com/office/drawing/2014/main" id="{FF81CD65-9FCD-4B43-89C2-B2C668AF785D}"/>
+                <a16:creationId xmlns:a16="http://schemas.microsoft.com/office/drawing/2014/main" id="{CE47AC47-B760-4902-BAEC-1EE6CB277483}"/>
               </a:ext>
             </a:extLst>
           </p:cNvPr>
@@ -5659,7 +5659,7 @@
           <p:cNvPr id="2" name="s5-eyebrow">
             <a:extLst xmlns:a="http://schemas.openxmlformats.org/drawingml/2006/main">
               <a:ext uri="{FF2B5EF4-FFF2-40B4-BE49-F238E27FC236}">
-                <a16:creationId xmlns:a16="http://schemas.microsoft.com/office/drawing/2014/main" id="{C236C867-DF67-4BFC-91A4-9D60ED212AD7}"/>
+                <a16:creationId xmlns:a16="http://schemas.microsoft.com/office/drawing/2014/main" id="{71FD1E7C-968D-4464-ADAE-7202CF524428}"/>
               </a:ext>
             </a:extLst>
           </p:cNvPr>
@@ -5717,7 +5717,7 @@
           <p:cNvPr id="3" name="s5-title">
             <a:extLst xmlns:a="http://schemas.openxmlformats.org/drawingml/2006/main">
               <a:ext uri="{FF2B5EF4-FFF2-40B4-BE49-F238E27FC236}">
-                <a16:creationId xmlns:a16="http://schemas.microsoft.com/office/drawing/2014/main" id="{FDE3C6F6-84BF-482F-A718-75E955115061}"/>
+                <a16:creationId xmlns:a16="http://schemas.microsoft.com/office/drawing/2014/main" id="{C89B9569-ECEF-4C79-9674-D9A394DD131F}"/>
               </a:ext>
             </a:extLst>
           </p:cNvPr>
@@ -5775,7 +5775,7 @@
           <p:cNvPr id="4" name="s5-footer">
             <a:extLst xmlns:a="http://schemas.openxmlformats.org/drawingml/2006/main">
               <a:ext uri="{FF2B5EF4-FFF2-40B4-BE49-F238E27FC236}">
-                <a16:creationId xmlns:a16="http://schemas.microsoft.com/office/drawing/2014/main" id="{2AE19937-9D1B-4A5B-98C7-64BBDEE4EADD}"/>
+                <a16:creationId xmlns:a16="http://schemas.microsoft.com/office/drawing/2014/main" id="{A99B502F-279F-495E-A29D-B6D881F01B27}"/>
               </a:ext>
             </a:extLst>
           </p:cNvPr>
@@ -5806,7 +5806,7 @@
           <p:cNvPr id="5" name="s5-identity">
             <a:extLst xmlns:a="http://schemas.openxmlformats.org/drawingml/2006/main">
               <a:ext uri="{FF2B5EF4-FFF2-40B4-BE49-F238E27FC236}">
-                <a16:creationId xmlns:a16="http://schemas.microsoft.com/office/drawing/2014/main" id="{42EAC9C6-55F3-4567-AF11-F8CC38855743}"/>
+                <a16:creationId xmlns:a16="http://schemas.microsoft.com/office/drawing/2014/main" id="{298E6290-CD96-4C9D-BC87-5B72B8C774B6}"/>
               </a:ext>
             </a:extLst>
           </p:cNvPr>
@@ -5864,7 +5864,7 @@
           <p:cNvPr id="6" name="core-no-0">
             <a:extLst xmlns:a="http://schemas.openxmlformats.org/drawingml/2006/main">
               <a:ext uri="{FF2B5EF4-FFF2-40B4-BE49-F238E27FC236}">
-                <a16:creationId xmlns:a16="http://schemas.microsoft.com/office/drawing/2014/main" id="{AB405B56-A479-4916-A469-90560E6EE1D8}"/>
+                <a16:creationId xmlns:a16="http://schemas.microsoft.com/office/drawing/2014/main" id="{7EF80909-4151-4C53-8C2C-54C63A1B2D11}"/>
               </a:ext>
             </a:extLst>
           </p:cNvPr>
@@ -5922,7 +5922,7 @@
           <p:cNvPr id="7" name="core-label-0">
             <a:extLst xmlns:a="http://schemas.openxmlformats.org/drawingml/2006/main">
               <a:ext uri="{FF2B5EF4-FFF2-40B4-BE49-F238E27FC236}">
-                <a16:creationId xmlns:a16="http://schemas.microsoft.com/office/drawing/2014/main" id="{51CD0237-321C-434F-BDA3-A2588FA08738}"/>
+                <a16:creationId xmlns:a16="http://schemas.microsoft.com/office/drawing/2014/main" id="{1673E931-B457-4C1E-9672-2E732EC69C74}"/>
               </a:ext>
             </a:extLst>
           </p:cNvPr>
@@ -5980,7 +5980,7 @@
           <p:cNvPr id="8" name="core-body-0">
             <a:extLst xmlns:a="http://schemas.openxmlformats.org/drawingml/2006/main">
               <a:ext uri="{FF2B5EF4-FFF2-40B4-BE49-F238E27FC236}">
-                <a16:creationId xmlns:a16="http://schemas.microsoft.com/office/drawing/2014/main" id="{40C974A3-6D22-4C44-ACBF-FC47F5258C84}"/>
+                <a16:creationId xmlns:a16="http://schemas.microsoft.com/office/drawing/2014/main" id="{9BB26DA2-80C2-489F-915D-59A0D2D60843}"/>
               </a:ext>
             </a:extLst>
           </p:cNvPr>
@@ -6044,7 +6044,7 @@
           <p:cNvPr id="9" name="core-no-1">
             <a:extLst xmlns:a="http://schemas.openxmlformats.org/drawingml/2006/main">
               <a:ext uri="{FF2B5EF4-FFF2-40B4-BE49-F238E27FC236}">
-                <a16:creationId xmlns:a16="http://schemas.microsoft.com/office/drawing/2014/main" id="{DA99C9DC-4606-4D91-BC44-C72D83C8BC01}"/>
+                <a16:creationId xmlns:a16="http://schemas.microsoft.com/office/drawing/2014/main" id="{3A521A46-81A2-443F-93F8-CC85BBFBEF3F}"/>
               </a:ext>
             </a:extLst>
           </p:cNvPr>
@@ -6102,7 +6102,7 @@
           <p:cNvPr id="10" name="core-body-1">
             <a:extLst xmlns:a="http://schemas.openxmlformats.org/drawingml/2006/main">
               <a:ext uri="{FF2B5EF4-FFF2-40B4-BE49-F238E27FC236}">
-                <a16:creationId xmlns:a16="http://schemas.microsoft.com/office/drawing/2014/main" id="{3A250F00-3D29-4462-8B53-91E86660A8AE}"/>
+                <a16:creationId xmlns:a16="http://schemas.microsoft.com/office/drawing/2014/main" id="{C5EDA583-0185-4C2A-BC24-9CE917AB5AA4}"/>
               </a:ext>
             </a:extLst>
           </p:cNvPr>
@@ -6166,7 +6166,7 @@
           <p:cNvPr id="11" name="s5-takeaway-rule">
             <a:extLst xmlns:a="http://schemas.openxmlformats.org/drawingml/2006/main">
               <a:ext uri="{FF2B5EF4-FFF2-40B4-BE49-F238E27FC236}">
-                <a16:creationId xmlns:a16="http://schemas.microsoft.com/office/drawing/2014/main" id="{C772782A-6BCE-4C51-AD6B-FE43F49B8D05}"/>
+                <a16:creationId xmlns:a16="http://schemas.microsoft.com/office/drawing/2014/main" id="{B5688B8B-31C8-4EC1-AA61-9F9F107971E2}"/>
               </a:ext>
             </a:extLst>
           </p:cNvPr>
@@ -6199,7 +6199,7 @@
           <p:cNvPr id="12" name="s5-takeaway">
             <a:extLst xmlns:a="http://schemas.openxmlformats.org/drawingml/2006/main">
               <a:ext uri="{FF2B5EF4-FFF2-40B4-BE49-F238E27FC236}">
-                <a16:creationId xmlns:a16="http://schemas.microsoft.com/office/drawing/2014/main" id="{CAEB14AD-F73D-435A-A2AD-7DF00F62E71E}"/>
+                <a16:creationId xmlns:a16="http://schemas.microsoft.com/office/drawing/2014/main" id="{ECA1C427-4496-4488-8630-2A6907971458}"/>
               </a:ext>
             </a:extLst>
           </p:cNvPr>
@@ -6255,7 +6255,7 @@
     </p:spTree>
     <p:extLst>
       <p:ext uri="{BB962C8B-B14F-4D97-AF65-F5344CB8AC3E}">
-        <p14:creationId xmlns:p14="http://schemas.microsoft.com/office/powerpoint/2010/main" val="1412171232"/>
+        <p14:creationId xmlns:p14="http://schemas.microsoft.com/office/powerpoint/2010/main" val="1700698014"/>
       </p:ext>
     </p:extLst>
   </p:cSld>
@@ -6286,7 +6286,7 @@
           <p:cNvPr id="1" name="s6-rule">
             <a:extLst xmlns:a="http://schemas.openxmlformats.org/drawingml/2006/main">
               <a:ext uri="{FF2B5EF4-FFF2-40B4-BE49-F238E27FC236}">
-                <a16:creationId xmlns:a16="http://schemas.microsoft.com/office/drawing/2014/main" id="{E878FA18-19C7-4B7A-AFA6-035A6B942E34}"/>
+                <a16:creationId xmlns:a16="http://schemas.microsoft.com/office/drawing/2014/main" id="{8F58AED1-CBAC-4FF9-A101-A84C14743F46}"/>
               </a:ext>
             </a:extLst>
           </p:cNvPr>
@@ -6319,7 +6319,7 @@
           <p:cNvPr id="2" name="s6-eyebrow">
             <a:extLst xmlns:a="http://schemas.openxmlformats.org/drawingml/2006/main">
               <a:ext uri="{FF2B5EF4-FFF2-40B4-BE49-F238E27FC236}">
-                <a16:creationId xmlns:a16="http://schemas.microsoft.com/office/drawing/2014/main" id="{5322CCD1-97A6-4604-A4FE-63550D252CFD}"/>
+                <a16:creationId xmlns:a16="http://schemas.microsoft.com/office/drawing/2014/main" id="{EAE8A21C-434C-40F8-B67A-D475E5CEF30D}"/>
               </a:ext>
             </a:extLst>
           </p:cNvPr>
@@ -6377,7 +6377,7 @@
           <p:cNvPr id="3" name="s6-title">
             <a:extLst xmlns:a="http://schemas.openxmlformats.org/drawingml/2006/main">
               <a:ext uri="{FF2B5EF4-FFF2-40B4-BE49-F238E27FC236}">
-                <a16:creationId xmlns:a16="http://schemas.microsoft.com/office/drawing/2014/main" id="{A32DE0B8-4F23-4D5A-8365-1E0197C7CBD6}"/>
+                <a16:creationId xmlns:a16="http://schemas.microsoft.com/office/drawing/2014/main" id="{F6ED9964-2FA6-46AE-9387-068163127E6A}"/>
               </a:ext>
             </a:extLst>
           </p:cNvPr>
@@ -6435,7 +6435,7 @@
           <p:cNvPr id="4" name="s6-footer">
             <a:extLst xmlns:a="http://schemas.openxmlformats.org/drawingml/2006/main">
               <a:ext uri="{FF2B5EF4-FFF2-40B4-BE49-F238E27FC236}">
-                <a16:creationId xmlns:a16="http://schemas.microsoft.com/office/drawing/2014/main" id="{BB0398AD-7D8A-4D13-AA09-E8D4A1EC87C8}"/>
+                <a16:creationId xmlns:a16="http://schemas.microsoft.com/office/drawing/2014/main" id="{CF092D2B-D57D-4DBE-BF2F-DA778751E313}"/>
               </a:ext>
             </a:extLst>
           </p:cNvPr>
@@ -6466,7 +6466,7 @@
           <p:cNvPr id="5" name="s6-identity">
             <a:extLst xmlns:a="http://schemas.openxmlformats.org/drawingml/2006/main">
               <a:ext uri="{FF2B5EF4-FFF2-40B4-BE49-F238E27FC236}">
-                <a16:creationId xmlns:a16="http://schemas.microsoft.com/office/drawing/2014/main" id="{2A97ABA6-45CF-4687-9451-3CEC872E994E}"/>
+                <a16:creationId xmlns:a16="http://schemas.microsoft.com/office/drawing/2014/main" id="{828A60CE-5FBC-4C36-9799-8911828BE781}"/>
               </a:ext>
             </a:extLst>
           </p:cNvPr>
@@ -6524,7 +6524,7 @@
           <p:cNvPr id="6" name="core-no-0">
             <a:extLst xmlns:a="http://schemas.openxmlformats.org/drawingml/2006/main">
               <a:ext uri="{FF2B5EF4-FFF2-40B4-BE49-F238E27FC236}">
-                <a16:creationId xmlns:a16="http://schemas.microsoft.com/office/drawing/2014/main" id="{732C03D1-9628-427F-A1BE-F2D4B6529CDA}"/>
+                <a16:creationId xmlns:a16="http://schemas.microsoft.com/office/drawing/2014/main" id="{27E67EEF-77B7-4132-8F2F-1AFDC57F1018}"/>
               </a:ext>
             </a:extLst>
           </p:cNvPr>
@@ -6582,7 +6582,7 @@
           <p:cNvPr id="7" name="core-label-0">
             <a:extLst xmlns:a="http://schemas.openxmlformats.org/drawingml/2006/main">
               <a:ext uri="{FF2B5EF4-FFF2-40B4-BE49-F238E27FC236}">
-                <a16:creationId xmlns:a16="http://schemas.microsoft.com/office/drawing/2014/main" id="{B805009A-DEF1-4500-8382-A086CCB089DA}"/>
+                <a16:creationId xmlns:a16="http://schemas.microsoft.com/office/drawing/2014/main" id="{EEE6C0C6-413B-43EE-B764-C4AF76B74FC2}"/>
               </a:ext>
             </a:extLst>
           </p:cNvPr>
@@ -6640,7 +6640,7 @@
           <p:cNvPr id="8" name="core-body-0">
             <a:extLst xmlns:a="http://schemas.openxmlformats.org/drawingml/2006/main">
               <a:ext uri="{FF2B5EF4-FFF2-40B4-BE49-F238E27FC236}">
-                <a16:creationId xmlns:a16="http://schemas.microsoft.com/office/drawing/2014/main" id="{38E7C64C-A1BF-41B2-98E2-57918E8ADEE2}"/>
+                <a16:creationId xmlns:a16="http://schemas.microsoft.com/office/drawing/2014/main" id="{AB92D606-B25B-4FFE-A43E-4CA7832A3EF7}"/>
               </a:ext>
             </a:extLst>
           </p:cNvPr>
@@ -6704,7 +6704,7 @@
           <p:cNvPr id="9" name="core-no-1">
             <a:extLst xmlns:a="http://schemas.openxmlformats.org/drawingml/2006/main">
               <a:ext uri="{FF2B5EF4-FFF2-40B4-BE49-F238E27FC236}">
-                <a16:creationId xmlns:a16="http://schemas.microsoft.com/office/drawing/2014/main" id="{9B682F21-8487-4EEA-967C-A0A7B6C69E61}"/>
+                <a16:creationId xmlns:a16="http://schemas.microsoft.com/office/drawing/2014/main" id="{65A6BF4C-AA74-42D9-BFB2-E2D6BE9A9E5B}"/>
               </a:ext>
             </a:extLst>
           </p:cNvPr>
@@ -6762,7 +6762,7 @@
           <p:cNvPr id="10" name="core-body-1">
             <a:extLst xmlns:a="http://schemas.openxmlformats.org/drawingml/2006/main">
               <a:ext uri="{FF2B5EF4-FFF2-40B4-BE49-F238E27FC236}">
-                <a16:creationId xmlns:a16="http://schemas.microsoft.com/office/drawing/2014/main" id="{3F306568-0BF3-45D8-950F-15E12F920AF8}"/>
+                <a16:creationId xmlns:a16="http://schemas.microsoft.com/office/drawing/2014/main" id="{B9591E36-5109-4AEF-9137-3FA2CC2E9A10}"/>
               </a:ext>
             </a:extLst>
           </p:cNvPr>
@@ -6826,7 +6826,7 @@
           <p:cNvPr id="11" name="s6-takeaway-rule">
             <a:extLst xmlns:a="http://schemas.openxmlformats.org/drawingml/2006/main">
               <a:ext uri="{FF2B5EF4-FFF2-40B4-BE49-F238E27FC236}">
-                <a16:creationId xmlns:a16="http://schemas.microsoft.com/office/drawing/2014/main" id="{1D9127EA-A7E9-4996-B946-5BE658175E02}"/>
+                <a16:creationId xmlns:a16="http://schemas.microsoft.com/office/drawing/2014/main" id="{F94509BF-CB08-4F21-89CE-5F3C03CB6A2F}"/>
               </a:ext>
             </a:extLst>
           </p:cNvPr>
@@ -6859,7 +6859,7 @@
           <p:cNvPr id="12" name="s6-takeaway">
             <a:extLst xmlns:a="http://schemas.openxmlformats.org/drawingml/2006/main">
               <a:ext uri="{FF2B5EF4-FFF2-40B4-BE49-F238E27FC236}">
-                <a16:creationId xmlns:a16="http://schemas.microsoft.com/office/drawing/2014/main" id="{EAE7FD21-2155-4DE6-8DA0-119BBEBFD8CA}"/>
+                <a16:creationId xmlns:a16="http://schemas.microsoft.com/office/drawing/2014/main" id="{0E305FA4-DCC6-49E0-AA29-D9AD15105CCB}"/>
               </a:ext>
             </a:extLst>
           </p:cNvPr>
@@ -6915,7 +6915,7 @@
     </p:spTree>
     <p:extLst>
       <p:ext uri="{BB962C8B-B14F-4D97-AF65-F5344CB8AC3E}">
-        <p14:creationId xmlns:p14="http://schemas.microsoft.com/office/powerpoint/2010/main" val="4497211"/>
+        <p14:creationId xmlns:p14="http://schemas.microsoft.com/office/powerpoint/2010/main" val="1076862440"/>
       </p:ext>
     </p:extLst>
   </p:cSld>
@@ -6946,7 +6946,7 @@
           <p:cNvPr id="1" name="s7-rule">
             <a:extLst xmlns:a="http://schemas.openxmlformats.org/drawingml/2006/main">
               <a:ext uri="{FF2B5EF4-FFF2-40B4-BE49-F238E27FC236}">
-                <a16:creationId xmlns:a16="http://schemas.microsoft.com/office/drawing/2014/main" id="{5035E310-1FD2-4ADA-9982-E0F29FA78A94}"/>
+                <a16:creationId xmlns:a16="http://schemas.microsoft.com/office/drawing/2014/main" id="{81FC6FFC-DE73-4CF3-97AC-24B391F97DC4}"/>
               </a:ext>
             </a:extLst>
           </p:cNvPr>
@@ -6979,7 +6979,7 @@
           <p:cNvPr id="2" name="s7-eyebrow">
             <a:extLst xmlns:a="http://schemas.openxmlformats.org/drawingml/2006/main">
               <a:ext uri="{FF2B5EF4-FFF2-40B4-BE49-F238E27FC236}">
-                <a16:creationId xmlns:a16="http://schemas.microsoft.com/office/drawing/2014/main" id="{C2398F72-6DE5-4988-B318-434404F89442}"/>
+                <a16:creationId xmlns:a16="http://schemas.microsoft.com/office/drawing/2014/main" id="{226AD962-EF22-48D4-892F-54E60F061295}"/>
               </a:ext>
             </a:extLst>
           </p:cNvPr>
@@ -7037,7 +7037,7 @@
           <p:cNvPr id="3" name="s7-title">
             <a:extLst xmlns:a="http://schemas.openxmlformats.org/drawingml/2006/main">
               <a:ext uri="{FF2B5EF4-FFF2-40B4-BE49-F238E27FC236}">
-                <a16:creationId xmlns:a16="http://schemas.microsoft.com/office/drawing/2014/main" id="{37B30E5C-399C-4CF8-80DB-D5931E67F691}"/>
+                <a16:creationId xmlns:a16="http://schemas.microsoft.com/office/drawing/2014/main" id="{B6762A7F-C180-435C-8337-BDC6F9E9FA4E}"/>
               </a:ext>
             </a:extLst>
           </p:cNvPr>
@@ -7095,7 +7095,7 @@
           <p:cNvPr id="4" name="s7-footer">
             <a:extLst xmlns:a="http://schemas.openxmlformats.org/drawingml/2006/main">
               <a:ext uri="{FF2B5EF4-FFF2-40B4-BE49-F238E27FC236}">
-                <a16:creationId xmlns:a16="http://schemas.microsoft.com/office/drawing/2014/main" id="{99C08192-4940-403E-9A3F-4694A5DCFC24}"/>
+                <a16:creationId xmlns:a16="http://schemas.microsoft.com/office/drawing/2014/main" id="{698FD8F0-5D3E-45E5-BB2D-67190A955C3B}"/>
               </a:ext>
             </a:extLst>
           </p:cNvPr>
@@ -7126,7 +7126,7 @@
           <p:cNvPr id="5" name="s7-identity">
             <a:extLst xmlns:a="http://schemas.openxmlformats.org/drawingml/2006/main">
               <a:ext uri="{FF2B5EF4-FFF2-40B4-BE49-F238E27FC236}">
-                <a16:creationId xmlns:a16="http://schemas.microsoft.com/office/drawing/2014/main" id="{B3111D9B-0A56-43C4-B68B-A8A4116F3513}"/>
+                <a16:creationId xmlns:a16="http://schemas.microsoft.com/office/drawing/2014/main" id="{164C2576-4C61-44A3-A7C7-C3201B9881DA}"/>
               </a:ext>
             </a:extLst>
           </p:cNvPr>
@@ -7184,7 +7184,7 @@
           <p:cNvPr id="6" name="core-no-0">
             <a:extLst xmlns:a="http://schemas.openxmlformats.org/drawingml/2006/main">
               <a:ext uri="{FF2B5EF4-FFF2-40B4-BE49-F238E27FC236}">
-                <a16:creationId xmlns:a16="http://schemas.microsoft.com/office/drawing/2014/main" id="{3FF990FF-1741-4392-8851-5CAA243204C8}"/>
+                <a16:creationId xmlns:a16="http://schemas.microsoft.com/office/drawing/2014/main" id="{E551D3D8-8314-4F00-A4C6-65219CCB07FB}"/>
               </a:ext>
             </a:extLst>
           </p:cNvPr>
@@ -7242,7 +7242,7 @@
           <p:cNvPr id="7" name="core-label-0">
             <a:extLst xmlns:a="http://schemas.openxmlformats.org/drawingml/2006/main">
               <a:ext uri="{FF2B5EF4-FFF2-40B4-BE49-F238E27FC236}">
-                <a16:creationId xmlns:a16="http://schemas.microsoft.com/office/drawing/2014/main" id="{38B64B12-1BFD-4BC7-9C11-BC6E3ACA845F}"/>
+                <a16:creationId xmlns:a16="http://schemas.microsoft.com/office/drawing/2014/main" id="{B791E348-F3CA-47EF-81D1-1CF244600150}"/>
               </a:ext>
             </a:extLst>
           </p:cNvPr>
@@ -7300,7 +7300,7 @@
           <p:cNvPr id="8" name="core-body-0">
             <a:extLst xmlns:a="http://schemas.openxmlformats.org/drawingml/2006/main">
               <a:ext uri="{FF2B5EF4-FFF2-40B4-BE49-F238E27FC236}">
-                <a16:creationId xmlns:a16="http://schemas.microsoft.com/office/drawing/2014/main" id="{7C158CF9-AF7A-4ABD-8C93-A595EB416566}"/>
+                <a16:creationId xmlns:a16="http://schemas.microsoft.com/office/drawing/2014/main" id="{778693E9-EB45-4A51-9FBB-026853D2742E}"/>
               </a:ext>
             </a:extLst>
           </p:cNvPr>
@@ -7364,7 +7364,7 @@
           <p:cNvPr id="9" name="core-no-1">
             <a:extLst xmlns:a="http://schemas.openxmlformats.org/drawingml/2006/main">
               <a:ext uri="{FF2B5EF4-FFF2-40B4-BE49-F238E27FC236}">
-                <a16:creationId xmlns:a16="http://schemas.microsoft.com/office/drawing/2014/main" id="{12CD7B85-A304-4DB3-9A6A-2C684A2EEDF1}"/>
+                <a16:creationId xmlns:a16="http://schemas.microsoft.com/office/drawing/2014/main" id="{18D91C88-5EFB-412F-A7D4-A82BD43036D8}"/>
               </a:ext>
             </a:extLst>
           </p:cNvPr>
@@ -7422,7 +7422,7 @@
           <p:cNvPr id="10" name="core-body-1">
             <a:extLst xmlns:a="http://schemas.openxmlformats.org/drawingml/2006/main">
               <a:ext uri="{FF2B5EF4-FFF2-40B4-BE49-F238E27FC236}">
-                <a16:creationId xmlns:a16="http://schemas.microsoft.com/office/drawing/2014/main" id="{9B15D696-FB76-47EC-937B-B00CA5D97CE7}"/>
+                <a16:creationId xmlns:a16="http://schemas.microsoft.com/office/drawing/2014/main" id="{5DDCF5CE-7DA9-4E62-89A4-4E15D3A71E8A}"/>
               </a:ext>
             </a:extLst>
           </p:cNvPr>
@@ -7486,7 +7486,7 @@
           <p:cNvPr id="11" name="s7-takeaway-rule">
             <a:extLst xmlns:a="http://schemas.openxmlformats.org/drawingml/2006/main">
               <a:ext uri="{FF2B5EF4-FFF2-40B4-BE49-F238E27FC236}">
-                <a16:creationId xmlns:a16="http://schemas.microsoft.com/office/drawing/2014/main" id="{02496E85-ADD0-4ED6-84C9-D9AB528B75AB}"/>
+                <a16:creationId xmlns:a16="http://schemas.microsoft.com/office/drawing/2014/main" id="{FB89E041-AD54-4B8C-B9C0-01E736062199}"/>
               </a:ext>
             </a:extLst>
           </p:cNvPr>
@@ -7519,7 +7519,7 @@
           <p:cNvPr id="12" name="s7-takeaway">
             <a:extLst xmlns:a="http://schemas.openxmlformats.org/drawingml/2006/main">
               <a:ext uri="{FF2B5EF4-FFF2-40B4-BE49-F238E27FC236}">
-                <a16:creationId xmlns:a16="http://schemas.microsoft.com/office/drawing/2014/main" id="{808F0192-97CC-4988-AF70-4A3F149BA1CB}"/>
+                <a16:creationId xmlns:a16="http://schemas.microsoft.com/office/drawing/2014/main" id="{A7480A49-74B7-441D-A5F1-FFF7C365C9DF}"/>
               </a:ext>
             </a:extLst>
           </p:cNvPr>
@@ -7575,7 +7575,7 @@
     </p:spTree>
     <p:extLst>
       <p:ext uri="{BB962C8B-B14F-4D97-AF65-F5344CB8AC3E}">
-        <p14:creationId xmlns:p14="http://schemas.microsoft.com/office/powerpoint/2010/main" val="784718333"/>
+        <p14:creationId xmlns:p14="http://schemas.microsoft.com/office/powerpoint/2010/main" val="884056395"/>
       </p:ext>
     </p:extLst>
   </p:cSld>
@@ -7606,7 +7606,7 @@
           <p:cNvPr id="1" name="s8-rule">
             <a:extLst xmlns:a="http://schemas.openxmlformats.org/drawingml/2006/main">
               <a:ext uri="{FF2B5EF4-FFF2-40B4-BE49-F238E27FC236}">
-                <a16:creationId xmlns:a16="http://schemas.microsoft.com/office/drawing/2014/main" id="{AE64C849-A0E8-47E3-AD0B-29E812D6E9A2}"/>
+                <a16:creationId xmlns:a16="http://schemas.microsoft.com/office/drawing/2014/main" id="{FB0B522D-9C92-4128-98D7-BDBDC8CD722C}"/>
               </a:ext>
             </a:extLst>
           </p:cNvPr>
@@ -7639,7 +7639,7 @@
           <p:cNvPr id="2" name="s8-eyebrow">
             <a:extLst xmlns:a="http://schemas.openxmlformats.org/drawingml/2006/main">
               <a:ext uri="{FF2B5EF4-FFF2-40B4-BE49-F238E27FC236}">
-                <a16:creationId xmlns:a16="http://schemas.microsoft.com/office/drawing/2014/main" id="{EC71160E-EA52-4E69-80A4-ACFFDE1DED88}"/>
+                <a16:creationId xmlns:a16="http://schemas.microsoft.com/office/drawing/2014/main" id="{A48CCE56-631A-4928-B855-EA96859E368E}"/>
               </a:ext>
             </a:extLst>
           </p:cNvPr>
@@ -7697,7 +7697,7 @@
           <p:cNvPr id="3" name="s8-title">
             <a:extLst xmlns:a="http://schemas.openxmlformats.org/drawingml/2006/main">
               <a:ext uri="{FF2B5EF4-FFF2-40B4-BE49-F238E27FC236}">
-                <a16:creationId xmlns:a16="http://schemas.microsoft.com/office/drawing/2014/main" id="{395E0ABA-CE9E-4861-AF59-56B4B2B8C5E6}"/>
+                <a16:creationId xmlns:a16="http://schemas.microsoft.com/office/drawing/2014/main" id="{2A14C1DB-F191-4025-8A64-FE156AC9B979}"/>
               </a:ext>
             </a:extLst>
           </p:cNvPr>
@@ -7755,7 +7755,7 @@
           <p:cNvPr id="4" name="s8-footer">
             <a:extLst xmlns:a="http://schemas.openxmlformats.org/drawingml/2006/main">
               <a:ext uri="{FF2B5EF4-FFF2-40B4-BE49-F238E27FC236}">
-                <a16:creationId xmlns:a16="http://schemas.microsoft.com/office/drawing/2014/main" id="{D4E85449-BE91-4241-8525-BA6F1498DBDA}"/>
+                <a16:creationId xmlns:a16="http://schemas.microsoft.com/office/drawing/2014/main" id="{2C15B8E3-7732-4C2D-A4EC-82DCB7DF2CC4}"/>
               </a:ext>
             </a:extLst>
           </p:cNvPr>
@@ -7786,7 +7786,7 @@
           <p:cNvPr id="5" name="s8-identity">
             <a:extLst xmlns:a="http://schemas.openxmlformats.org/drawingml/2006/main">
               <a:ext uri="{FF2B5EF4-FFF2-40B4-BE49-F238E27FC236}">
-                <a16:creationId xmlns:a16="http://schemas.microsoft.com/office/drawing/2014/main" id="{F78837C0-7975-4D27-B902-DAF9835EF97D}"/>
+                <a16:creationId xmlns:a16="http://schemas.microsoft.com/office/drawing/2014/main" id="{B4B9842F-611A-4872-B5FB-CE44FF421C85}"/>
               </a:ext>
             </a:extLst>
           </p:cNvPr>
@@ -7844,7 +7844,7 @@
           <p:cNvPr id="6" name="case-title">
             <a:extLst xmlns:a="http://schemas.openxmlformats.org/drawingml/2006/main">
               <a:ext uri="{FF2B5EF4-FFF2-40B4-BE49-F238E27FC236}">
-                <a16:creationId xmlns:a16="http://schemas.microsoft.com/office/drawing/2014/main" id="{AF9044B3-5492-4E4C-ADAF-2EBA094E8E48}"/>
+                <a16:creationId xmlns:a16="http://schemas.microsoft.com/office/drawing/2014/main" id="{F1BD2165-D4FA-4A99-BA67-E359DBCCC646}"/>
               </a:ext>
             </a:extLst>
           </p:cNvPr>
@@ -7908,7 +7908,7 @@
           <p:cNvPr id="7" name="case-row-0">
             <a:extLst xmlns:a="http://schemas.openxmlformats.org/drawingml/2006/main">
               <a:ext uri="{FF2B5EF4-FFF2-40B4-BE49-F238E27FC236}">
-                <a16:creationId xmlns:a16="http://schemas.microsoft.com/office/drawing/2014/main" id="{E3318A72-8786-4F6E-B0EA-A7229EADBEA5}"/>
+                <a16:creationId xmlns:a16="http://schemas.microsoft.com/office/drawing/2014/main" id="{C41F4176-861E-4656-8F50-81D395365A84}"/>
               </a:ext>
             </a:extLst>
           </p:cNvPr>
@@ -7972,7 +7972,7 @@
           <p:cNvPr id="8" name="case-row-1">
             <a:extLst xmlns:a="http://schemas.openxmlformats.org/drawingml/2006/main">
               <a:ext uri="{FF2B5EF4-FFF2-40B4-BE49-F238E27FC236}">
-                <a16:creationId xmlns:a16="http://schemas.microsoft.com/office/drawing/2014/main" id="{C344CF08-0A63-4A55-B488-0B909B0632C2}"/>
+                <a16:creationId xmlns:a16="http://schemas.microsoft.com/office/drawing/2014/main" id="{43D14C80-6A27-4A15-BC43-FD1590002AFE}"/>
               </a:ext>
             </a:extLst>
           </p:cNvPr>
@@ -8036,7 +8036,7 @@
           <p:cNvPr id="9" name="case-row-2">
             <a:extLst xmlns:a="http://schemas.openxmlformats.org/drawingml/2006/main">
               <a:ext uri="{FF2B5EF4-FFF2-40B4-BE49-F238E27FC236}">
-                <a16:creationId xmlns:a16="http://schemas.microsoft.com/office/drawing/2014/main" id="{954796C4-7026-4C4E-A764-8716FC8857A4}"/>
+                <a16:creationId xmlns:a16="http://schemas.microsoft.com/office/drawing/2014/main" id="{EC7931F6-09C3-46B7-91E6-9D2D33AF3EE2}"/>
               </a:ext>
             </a:extLst>
           </p:cNvPr>
@@ -8100,7 +8100,7 @@
           <p:cNvPr id="10" name="case-row-3">
             <a:extLst xmlns:a="http://schemas.openxmlformats.org/drawingml/2006/main">
               <a:ext uri="{FF2B5EF4-FFF2-40B4-BE49-F238E27FC236}">
-                <a16:creationId xmlns:a16="http://schemas.microsoft.com/office/drawing/2014/main" id="{28A4E0ED-0CF6-4B41-8F1B-E463C6626C4D}"/>
+                <a16:creationId xmlns:a16="http://schemas.microsoft.com/office/drawing/2014/main" id="{F7292679-58AD-458E-BD10-E1009BB469AA}"/>
               </a:ext>
             </a:extLst>
           </p:cNvPr>
@@ -8164,7 +8164,7 @@
           <p:cNvPr id="11" name="case-row-4">
             <a:extLst xmlns:a="http://schemas.openxmlformats.org/drawingml/2006/main">
               <a:ext uri="{FF2B5EF4-FFF2-40B4-BE49-F238E27FC236}">
-                <a16:creationId xmlns:a16="http://schemas.microsoft.com/office/drawing/2014/main" id="{AB26A648-A933-41B4-94D0-0573DC74C6D3}"/>
+                <a16:creationId xmlns:a16="http://schemas.microsoft.com/office/drawing/2014/main" id="{41FF55FA-878E-4BC5-8C67-58587486A3A3}"/>
               </a:ext>
             </a:extLst>
           </p:cNvPr>
@@ -8228,7 +8228,7 @@
           <p:cNvPr id="12" name="s8-takeaway-rule">
             <a:extLst xmlns:a="http://schemas.openxmlformats.org/drawingml/2006/main">
               <a:ext uri="{FF2B5EF4-FFF2-40B4-BE49-F238E27FC236}">
-                <a16:creationId xmlns:a16="http://schemas.microsoft.com/office/drawing/2014/main" id="{4A13D0C5-8994-4AAC-A623-1D9DA91B5381}"/>
+                <a16:creationId xmlns:a16="http://schemas.microsoft.com/office/drawing/2014/main" id="{95F53BE8-ECDE-42D2-9954-21EF6DE59CC9}"/>
               </a:ext>
             </a:extLst>
           </p:cNvPr>
@@ -8261,7 +8261,7 @@
           <p:cNvPr id="13" name="s8-takeaway">
             <a:extLst xmlns:a="http://schemas.openxmlformats.org/drawingml/2006/main">
               <a:ext uri="{FF2B5EF4-FFF2-40B4-BE49-F238E27FC236}">
-                <a16:creationId xmlns:a16="http://schemas.microsoft.com/office/drawing/2014/main" id="{92F6AC6E-8BD8-45E7-8981-29F92299EC87}"/>
+                <a16:creationId xmlns:a16="http://schemas.microsoft.com/office/drawing/2014/main" id="{D3304F02-E515-4FDD-A914-6DA438F1F227}"/>
               </a:ext>
             </a:extLst>
           </p:cNvPr>
@@ -8317,7 +8317,7 @@
     </p:spTree>
     <p:extLst>
       <p:ext uri="{BB962C8B-B14F-4D97-AF65-F5344CB8AC3E}">
-        <p14:creationId xmlns:p14="http://schemas.microsoft.com/office/powerpoint/2010/main" val="114930610"/>
+        <p14:creationId xmlns:p14="http://schemas.microsoft.com/office/powerpoint/2010/main" val="1469544261"/>
       </p:ext>
     </p:extLst>
   </p:cSld>
@@ -8348,7 +8348,7 @@
           <p:cNvPr id="1" name="s9-rule">
             <a:extLst xmlns:a="http://schemas.openxmlformats.org/drawingml/2006/main">
               <a:ext uri="{FF2B5EF4-FFF2-40B4-BE49-F238E27FC236}">
-                <a16:creationId xmlns:a16="http://schemas.microsoft.com/office/drawing/2014/main" id="{45D5036F-C875-4656-A085-050CC77867D8}"/>
+                <a16:creationId xmlns:a16="http://schemas.microsoft.com/office/drawing/2014/main" id="{1B817C44-D439-4EC3-9F1C-F685DE64AE00}"/>
               </a:ext>
             </a:extLst>
           </p:cNvPr>
@@ -8381,7 +8381,7 @@
           <p:cNvPr id="2" name="s9-eyebrow">
             <a:extLst xmlns:a="http://schemas.openxmlformats.org/drawingml/2006/main">
               <a:ext uri="{FF2B5EF4-FFF2-40B4-BE49-F238E27FC236}">
-                <a16:creationId xmlns:a16="http://schemas.microsoft.com/office/drawing/2014/main" id="{F33BA51C-39C6-4363-9EB2-FC602F32B263}"/>
+                <a16:creationId xmlns:a16="http://schemas.microsoft.com/office/drawing/2014/main" id="{3E2F6A9C-0257-4564-8EFF-5B4F7F1C0F8A}"/>
               </a:ext>
             </a:extLst>
           </p:cNvPr>
@@ -8439,7 +8439,7 @@
           <p:cNvPr id="3" name="s9-title">
             <a:extLst xmlns:a="http://schemas.openxmlformats.org/drawingml/2006/main">
               <a:ext uri="{FF2B5EF4-FFF2-40B4-BE49-F238E27FC236}">
-                <a16:creationId xmlns:a16="http://schemas.microsoft.com/office/drawing/2014/main" id="{7AA07E38-C43A-4776-AFC1-993176B9ECF2}"/>
+                <a16:creationId xmlns:a16="http://schemas.microsoft.com/office/drawing/2014/main" id="{7DCAC277-E446-4427-B601-07AAB5D36C1C}"/>
               </a:ext>
             </a:extLst>
           </p:cNvPr>
@@ -8497,7 +8497,7 @@
           <p:cNvPr id="4" name="s9-footer">
             <a:extLst xmlns:a="http://schemas.openxmlformats.org/drawingml/2006/main">
               <a:ext uri="{FF2B5EF4-FFF2-40B4-BE49-F238E27FC236}">
-                <a16:creationId xmlns:a16="http://schemas.microsoft.com/office/drawing/2014/main" id="{EC4E5427-0F9F-4374-A0B9-B8EB458D3690}"/>
+                <a16:creationId xmlns:a16="http://schemas.microsoft.com/office/drawing/2014/main" id="{5DAC28E7-273F-45DF-9DF9-3AB2A31F9920}"/>
               </a:ext>
             </a:extLst>
           </p:cNvPr>
@@ -8528,7 +8528,7 @@
           <p:cNvPr id="5" name="s9-identity">
             <a:extLst xmlns:a="http://schemas.openxmlformats.org/drawingml/2006/main">
               <a:ext uri="{FF2B5EF4-FFF2-40B4-BE49-F238E27FC236}">
-                <a16:creationId xmlns:a16="http://schemas.microsoft.com/office/drawing/2014/main" id="{A6AA5D37-0A0F-4347-A15E-0F75B8BA286A}"/>
+                <a16:creationId xmlns:a16="http://schemas.microsoft.com/office/drawing/2014/main" id="{1672653D-AB95-4EEF-92CB-4D8CC84ACABE}"/>
               </a:ext>
             </a:extLst>
           </p:cNvPr>
@@ -8586,7 +8586,7 @@
           <p:cNvPr id="6" name="practice-circle-0">
             <a:extLst xmlns:a="http://schemas.openxmlformats.org/drawingml/2006/main">
               <a:ext uri="{FF2B5EF4-FFF2-40B4-BE49-F238E27FC236}">
-                <a16:creationId xmlns:a16="http://schemas.microsoft.com/office/drawing/2014/main" id="{1C83980B-B4CC-4D15-97C6-5EED6DD845C1}"/>
+                <a16:creationId xmlns:a16="http://schemas.microsoft.com/office/drawing/2014/main" id="{5808A262-D590-4BD4-9172-5370D87D7359}"/>
               </a:ext>
             </a:extLst>
           </p:cNvPr>
@@ -8619,7 +8619,7 @@
           <p:cNvPr id="7" name="practice-number-0">
             <a:extLst xmlns:a="http://schemas.openxmlformats.org/drawingml/2006/main">
               <a:ext uri="{FF2B5EF4-FFF2-40B4-BE49-F238E27FC236}">
-                <a16:creationId xmlns:a16="http://schemas.microsoft.com/office/drawing/2014/main" id="{C4EB4F14-97C1-4B1E-85E7-3083E5F67BD9}"/>
+                <a16:creationId xmlns:a16="http://schemas.microsoft.com/office/drawing/2014/main" id="{C75E115F-B0A6-4CE8-8968-C7752846A128}"/>
               </a:ext>
             </a:extLst>
           </p:cNvPr>
@@ -8677,7 +8677,7 @@
           <p:cNvPr id="8" name="practice-item-0">
             <a:extLst xmlns:a="http://schemas.openxmlformats.org/drawingml/2006/main">
               <a:ext uri="{FF2B5EF4-FFF2-40B4-BE49-F238E27FC236}">
-                <a16:creationId xmlns:a16="http://schemas.microsoft.com/office/drawing/2014/main" id="{59053F53-D35D-4544-99C5-1C61D640CE02}"/>
+                <a16:creationId xmlns:a16="http://schemas.microsoft.com/office/drawing/2014/main" id="{BEC58ABF-932E-49A4-9A72-9EE7ED5654DC}"/>
               </a:ext>
             </a:extLst>
           </p:cNvPr>
@@ -8741,7 +8741,7 @@
           <p:cNvPr id="9" name="practice-connector-0">
             <a:extLst xmlns:a="http://schemas.openxmlformats.org/drawingml/2006/main">
               <a:ext uri="{FF2B5EF4-FFF2-40B4-BE49-F238E27FC236}">
-                <a16:creationId xmlns:a16="http://schemas.microsoft.com/office/drawing/2014/main" id="{29759D1F-8ECA-48E5-A49A-5FC22F94A8C4}"/>
+                <a16:creationId xmlns:a16="http://schemas.microsoft.com/office/drawing/2014/main" id="{25D4D298-FEB4-49A7-BBCC-9C8AC220E488}"/>
               </a:ext>
             </a:extLst>
           </p:cNvPr>
@@ -8772,7 +8772,7 @@
           <p:cNvPr id="10" name="practice-circle-1">
             <a:extLst xmlns:a="http://schemas.openxmlformats.org/drawingml/2006/main">
               <a:ext uri="{FF2B5EF4-FFF2-40B4-BE49-F238E27FC236}">
-                <a16:creationId xmlns:a16="http://schemas.microsoft.com/office/drawing/2014/main" id="{E7BEB486-AE30-433F-BF0A-4F6F63B12816}"/>
+                <a16:creationId xmlns:a16="http://schemas.microsoft.com/office/drawing/2014/main" id="{A4D70CAC-DF7D-4A76-AE6D-0CA0D9685FE1}"/>
               </a:ext>
             </a:extLst>
           </p:cNvPr>
@@ -8805,7 +8805,7 @@
           <p:cNvPr id="11" name="practice-number-1">
             <a:extLst xmlns:a="http://schemas.openxmlformats.org/drawingml/2006/main">
               <a:ext uri="{FF2B5EF4-FFF2-40B4-BE49-F238E27FC236}">
-                <a16:creationId xmlns:a16="http://schemas.microsoft.com/office/drawing/2014/main" id="{28AD92EE-E1CF-4F69-A3A4-880F8C158119}"/>
+                <a16:creationId xmlns:a16="http://schemas.microsoft.com/office/drawing/2014/main" id="{966A2800-56E3-4541-8E61-B9A3ED4C589F}"/>
               </a:ext>
             </a:extLst>
           </p:cNvPr>
@@ -8863,7 +8863,7 @@
           <p:cNvPr id="12" name="practice-item-1">
             <a:extLst xmlns:a="http://schemas.openxmlformats.org/drawingml/2006/main">
               <a:ext uri="{FF2B5EF4-FFF2-40B4-BE49-F238E27FC236}">
-                <a16:creationId xmlns:a16="http://schemas.microsoft.com/office/drawing/2014/main" id="{5A21F307-06E2-4CAB-AE69-3FAB8C32FE93}"/>
+                <a16:creationId xmlns:a16="http://schemas.microsoft.com/office/drawing/2014/main" id="{D1DEE756-3128-4C4E-92A9-B1F917FBA373}"/>
               </a:ext>
             </a:extLst>
           </p:cNvPr>
@@ -8927,7 +8927,7 @@
           <p:cNvPr id="13" name="practice-connector-1">
             <a:extLst xmlns:a="http://schemas.openxmlformats.org/drawingml/2006/main">
               <a:ext uri="{FF2B5EF4-FFF2-40B4-BE49-F238E27FC236}">
-                <a16:creationId xmlns:a16="http://schemas.microsoft.com/office/drawing/2014/main" id="{39481BB0-FA3C-48B8-B398-A69F1BF74C90}"/>
+                <a16:creationId xmlns:a16="http://schemas.microsoft.com/office/drawing/2014/main" id="{E768C49E-164A-4844-89C9-B08E8F547E03}"/>
               </a:ext>
             </a:extLst>
           </p:cNvPr>
@@ -8958,7 +8958,7 @@
           <p:cNvPr id="14" name="practice-circle-2">
             <a:extLst xmlns:a="http://schemas.openxmlformats.org/drawingml/2006/main">
               <a:ext uri="{FF2B5EF4-FFF2-40B4-BE49-F238E27FC236}">
-                <a16:creationId xmlns:a16="http://schemas.microsoft.com/office/drawing/2014/main" id="{59D0F7FD-C1FF-4D5F-92DC-3EF2770A64AB}"/>
+                <a16:creationId xmlns:a16="http://schemas.microsoft.com/office/drawing/2014/main" id="{82A4D609-62A9-4BC8-9436-82E3F1BCFA61}"/>
               </a:ext>
             </a:extLst>
           </p:cNvPr>
@@ -8991,7 +8991,7 @@
           <p:cNvPr id="15" name="practice-number-2">
             <a:extLst xmlns:a="http://schemas.openxmlformats.org/drawingml/2006/main">
               <a:ext uri="{FF2B5EF4-FFF2-40B4-BE49-F238E27FC236}">
-                <a16:creationId xmlns:a16="http://schemas.microsoft.com/office/drawing/2014/main" id="{C6834F26-BA6D-434D-9211-7B98C8057627}"/>
+                <a16:creationId xmlns:a16="http://schemas.microsoft.com/office/drawing/2014/main" id="{758643F9-4ADF-4DC2-A26A-7014C59CF04C}"/>
               </a:ext>
             </a:extLst>
           </p:cNvPr>
@@ -9049,7 +9049,7 @@
           <p:cNvPr id="16" name="practice-item-2">
             <a:extLst xmlns:a="http://schemas.openxmlformats.org/drawingml/2006/main">
               <a:ext uri="{FF2B5EF4-FFF2-40B4-BE49-F238E27FC236}">
-                <a16:creationId xmlns:a16="http://schemas.microsoft.com/office/drawing/2014/main" id="{78A674E3-AA74-4D50-9327-03B2B49C2398}"/>
+                <a16:creationId xmlns:a16="http://schemas.microsoft.com/office/drawing/2014/main" id="{D54C5647-2B23-4583-AFC7-0C8F25506853}"/>
               </a:ext>
             </a:extLst>
           </p:cNvPr>
@@ -9111,7 +9111,7 @@
     </p:spTree>
     <p:extLst>
       <p:ext uri="{BB962C8B-B14F-4D97-AF65-F5344CB8AC3E}">
-        <p14:creationId xmlns:p14="http://schemas.microsoft.com/office/powerpoint/2010/main" val="808941137"/>
+        <p14:creationId xmlns:p14="http://schemas.microsoft.com/office/powerpoint/2010/main" val="373717531"/>
       </p:ext>
     </p:extLst>
   </p:cSld>
